--- a/docs/pptx/auc3/jx-auc3-linsubhr-sens-grade2.pptx
+++ b/docs/pptx/auc3/jx-auc3-linsubhr-sens-grade2.pptx
@@ -5339,7 +5339,7 @@
           <p:spPr>
             <a:xfrm>
               <a:off x="817517" y="1896563"/>
-              <a:ext cx="6169365" cy="82021"/>
+              <a:ext cx="6833128" cy="82021"/>
             </a:xfrm>
             <a:prstGeom prst="rect">
               <a:avLst/>
@@ -5371,7 +5371,7 @@
                   <a:latin typeface="Helvetica"/>
                   <a:cs typeface="Helvetica"/>
                 </a:rPr>
-                <a:t>subHR per 0.1 ratio decline: 1.13 (1.05-1.23), p = 0.002  |  per IQR decline (Δ = 0.28): 1.43 (1.14-1.79)  |  IQR: [0.70, 0.98]</a:t>
+                <a:t>subHR per 0.1 ratio decline: 1.13 (1.05-1.23), p_Bonf = 0.012 (n = 6)  |  per IQR decline (Δ = 0.28): 1.43 (1.14-1.79)  |  IQR: [0.70, 0.98]</a:t>
               </a:r>
             </a:p>
           </p:txBody>

--- a/docs/pptx/auc3/jx-auc3-linsubhr-sens-grade2.pptx
+++ b/docs/pptx/auc3/jx-auc3-linsubhr-sens-grade2.pptx
@@ -5062,8 +5062,8 @@
           </p:nvSpPr>
           <p:spPr>
             <a:xfrm>
-              <a:off x="2137719" y="5785772"/>
-              <a:ext cx="155356" cy="80101"/>
+              <a:off x="2134610" y="5785772"/>
+              <a:ext cx="161574" cy="80101"/>
             </a:xfrm>
             <a:prstGeom prst="rect">
               <a:avLst/>
@@ -5095,7 +5095,7 @@
                   <a:latin typeface="Helvetica"/>
                   <a:cs typeface="Helvetica"/>
                 </a:rPr>
-                <a:t>0.6</a:t>
+                <a:t>-40</a:t>
               </a:r>
             </a:p>
           </p:txBody>
@@ -5108,8 +5108,8 @@
           </p:nvSpPr>
           <p:spPr>
             <a:xfrm>
-              <a:off x="3878840" y="5785772"/>
-              <a:ext cx="155356" cy="80101"/>
+              <a:off x="3875731" y="5785772"/>
+              <a:ext cx="161574" cy="80101"/>
             </a:xfrm>
             <a:prstGeom prst="rect">
               <a:avLst/>
@@ -5141,7 +5141,7 @@
                   <a:latin typeface="Helvetica"/>
                   <a:cs typeface="Helvetica"/>
                 </a:rPr>
-                <a:t>0.8</a:t>
+                <a:t>-20</a:t>
               </a:r>
             </a:p>
           </p:txBody>
@@ -5154,8 +5154,8 @@
           </p:nvSpPr>
           <p:spPr>
             <a:xfrm>
-              <a:off x="5619961" y="5785772"/>
-              <a:ext cx="155356" cy="80101"/>
+              <a:off x="5666549" y="5785772"/>
+              <a:ext cx="62179" cy="80101"/>
             </a:xfrm>
             <a:prstGeom prst="rect">
               <a:avLst/>
@@ -5187,7 +5187,7 @@
                   <a:latin typeface="Helvetica"/>
                   <a:cs typeface="Helvetica"/>
                 </a:rPr>
-                <a:t>1.0</a:t>
+                <a:t>0</a:t>
               </a:r>
             </a:p>
           </p:txBody>
@@ -5200,8 +5200,8 @@
           </p:nvSpPr>
           <p:spPr>
             <a:xfrm>
-              <a:off x="7361081" y="5785772"/>
-              <a:ext cx="155356" cy="80101"/>
+              <a:off x="7376580" y="5785772"/>
+              <a:ext cx="124358" cy="80101"/>
             </a:xfrm>
             <a:prstGeom prst="rect">
               <a:avLst/>
@@ -5233,7 +5233,7 @@
                   <a:latin typeface="Helvetica"/>
                   <a:cs typeface="Helvetica"/>
                 </a:rPr>
-                <a:t>1.2</a:t>
+                <a:t>20</a:t>
               </a:r>
             </a:p>
           </p:txBody>
@@ -5246,8 +5246,8 @@
           </p:nvSpPr>
           <p:spPr>
             <a:xfrm>
-              <a:off x="2691419" y="5925448"/>
-              <a:ext cx="4051889" cy="100218"/>
+              <a:off x="1561815" y="5925448"/>
+              <a:ext cx="6311097" cy="100218"/>
             </a:xfrm>
             <a:prstGeom prst="rect">
               <a:avLst/>
@@ -5279,7 +5279,7 @@
                   <a:latin typeface="Helvetica"/>
                   <a:cs typeface="Helvetica"/>
                 </a:rPr>
-                <a:t>Sensitivity eGFR Ratio (CKD-EPI 2012 CysC / CKD-EPI 2021 Cr)</a:t>
+                <a:t>Sensitivity eGFR Difference (%): 100 × (CKD-EPI 2012 CysC − CKD-EPI 2021 Cr) / CKD-EPI 2021 Cr</a:t>
               </a:r>
             </a:p>
           </p:txBody>
@@ -5339,7 +5339,7 @@
           <p:spPr>
             <a:xfrm>
               <a:off x="817517" y="1896563"/>
-              <a:ext cx="6833128" cy="82021"/>
+              <a:ext cx="6959864" cy="82021"/>
             </a:xfrm>
             <a:prstGeom prst="rect">
               <a:avLst/>
@@ -5371,7 +5371,7 @@
                   <a:latin typeface="Helvetica"/>
                   <a:cs typeface="Helvetica"/>
                 </a:rPr>
-                <a:t>subHR per 0.1 ratio decline: 1.13 (1.05-1.23), p_Bonf = 0.012 (n = 6)  |  per IQR decline (Δ = 0.28): 1.43 (1.14-1.79)  |  IQR: [0.70, 0.98]</a:t>
+                <a:t>subHR per 10 % decline: 1.13 (1.05-1.23), p_Bonf = 0.012 (n = 6)  |  per IQR decline (Δ = 28.1 %): 1.43 (1.14-1.79)  |  IQR: [-30.1, -2.1] %</a:t>
               </a:r>
             </a:p>
           </p:txBody>

--- a/docs/pptx/auc3/jx-auc3-linsubhr-sens-grade2.pptx
+++ b/docs/pptx/auc3/jx-auc3-linsubhr-sens-grade2.pptx
@@ -2265,34 +2265,26 @@
         </p:sp>
         <p:sp>
           <p:nvSpPr>
-            <p:cNvPr id="4" name="pl4"/>
+            <p:cNvPr id="4" name="rc4"/>
             <p:cNvSpPr/>
             <p:nvPr/>
           </p:nvSpPr>
           <p:spPr>
             <a:xfrm>
-              <a:off x="817517" y="5142518"/>
-              <a:ext cx="7799693" cy="0"/>
+              <a:off x="457200" y="1600200"/>
+              <a:ext cx="8229600" cy="4525962"/>
             </a:xfrm>
-            <a:custGeom>
+            <a:prstGeom prst="rect">
               <a:avLst/>
-              <a:pathLst>
-                <a:path w="7799693" h="0">
-                  <a:moveTo>
-                    <a:pt x="0" y="0"/>
-                  </a:moveTo>
-                  <a:lnTo>
-                    <a:pt x="7799693" y="0"/>
-                  </a:lnTo>
-                  <a:lnTo>
-                    <a:pt x="7799693" y="0"/>
-                  </a:lnTo>
-                </a:path>
-              </a:pathLst>
-            </a:custGeom>
-            <a:ln w="6775" cap="flat">
+            </a:prstGeom>
+            <a:solidFill>
+              <a:srgbClr val="FFFFFF">
+                <a:alpha val="100000"/>
+              </a:srgbClr>
+            </a:solidFill>
+            <a:ln w="13550" cap="rnd">
               <a:solidFill>
-                <a:srgbClr val="EBEBEB">
+                <a:srgbClr val="FFFFFF">
                   <a:alpha val="100000"/>
                 </a:srgbClr>
               </a:solidFill>
@@ -2314,21 +2306,21 @@
           </p:nvSpPr>
           <p:spPr>
             <a:xfrm>
-              <a:off x="817517" y="4313054"/>
-              <a:ext cx="7799693" cy="0"/>
+              <a:off x="887106" y="3250627"/>
+              <a:ext cx="7660515" cy="0"/>
             </a:xfrm>
             <a:custGeom>
               <a:avLst/>
               <a:pathLst>
-                <a:path w="7799693" h="0">
+                <a:path w="7660515" h="0">
                   <a:moveTo>
                     <a:pt x="0" y="0"/>
                   </a:moveTo>
                   <a:lnTo>
-                    <a:pt x="7799693" y="0"/>
-                  </a:lnTo>
-                  <a:lnTo>
-                    <a:pt x="7799693" y="0"/>
+                    <a:pt x="7660515" y="0"/>
+                  </a:lnTo>
+                  <a:lnTo>
+                    <a:pt x="7660515" y="0"/>
                   </a:lnTo>
                 </a:path>
               </a:pathLst>
@@ -2357,21 +2349,21 @@
           </p:nvSpPr>
           <p:spPr>
             <a:xfrm>
-              <a:off x="817517" y="3483591"/>
-              <a:ext cx="7799693" cy="0"/>
+              <a:off x="887106" y="2951293"/>
+              <a:ext cx="7660515" cy="0"/>
             </a:xfrm>
             <a:custGeom>
               <a:avLst/>
               <a:pathLst>
-                <a:path w="7799693" h="0">
+                <a:path w="7660515" h="0">
                   <a:moveTo>
                     <a:pt x="0" y="0"/>
                   </a:moveTo>
                   <a:lnTo>
-                    <a:pt x="7799693" y="0"/>
-                  </a:lnTo>
-                  <a:lnTo>
-                    <a:pt x="7799693" y="0"/>
+                    <a:pt x="7660515" y="0"/>
+                  </a:lnTo>
+                  <a:lnTo>
+                    <a:pt x="7660515" y="0"/>
                   </a:lnTo>
                 </a:path>
               </a:pathLst>
@@ -2400,21 +2392,21 @@
           </p:nvSpPr>
           <p:spPr>
             <a:xfrm>
-              <a:off x="817517" y="2654127"/>
-              <a:ext cx="7799693" cy="0"/>
+              <a:off x="887106" y="2651959"/>
+              <a:ext cx="7660515" cy="0"/>
             </a:xfrm>
             <a:custGeom>
               <a:avLst/>
               <a:pathLst>
-                <a:path w="7799693" h="0">
+                <a:path w="7660515" h="0">
                   <a:moveTo>
                     <a:pt x="0" y="0"/>
                   </a:moveTo>
                   <a:lnTo>
-                    <a:pt x="7799693" y="0"/>
-                  </a:lnTo>
-                  <a:lnTo>
-                    <a:pt x="7799693" y="0"/>
+                    <a:pt x="7660515" y="0"/>
+                  </a:lnTo>
+                  <a:lnTo>
+                    <a:pt x="7660515" y="0"/>
                   </a:lnTo>
                 </a:path>
               </a:pathLst>
@@ -2443,21 +2435,21 @@
           </p:nvSpPr>
           <p:spPr>
             <a:xfrm>
-              <a:off x="1344837" y="2073503"/>
-              <a:ext cx="0" cy="3649639"/>
+              <a:off x="887106" y="2352625"/>
+              <a:ext cx="7660515" cy="0"/>
             </a:xfrm>
             <a:custGeom>
               <a:avLst/>
               <a:pathLst>
-                <a:path w="0" h="3649639">
+                <a:path w="7660515" h="0">
                   <a:moveTo>
-                    <a:pt x="0" y="3649639"/>
+                    <a:pt x="0" y="0"/>
                   </a:moveTo>
                   <a:lnTo>
-                    <a:pt x="0" y="0"/>
-                  </a:lnTo>
-                  <a:lnTo>
-                    <a:pt x="0" y="0"/>
+                    <a:pt x="7660515" y="0"/>
+                  </a:lnTo>
+                  <a:lnTo>
+                    <a:pt x="7660515" y="0"/>
                   </a:lnTo>
                 </a:path>
               </a:pathLst>
@@ -2486,15 +2478,15 @@
           </p:nvSpPr>
           <p:spPr>
             <a:xfrm>
-              <a:off x="3085958" y="2073503"/>
-              <a:ext cx="0" cy="3649639"/>
+              <a:off x="1405017" y="2143092"/>
+              <a:ext cx="0" cy="1317069"/>
             </a:xfrm>
             <a:custGeom>
               <a:avLst/>
               <a:pathLst>
-                <a:path w="0" h="3649639">
+                <a:path w="0" h="1317069">
                   <a:moveTo>
-                    <a:pt x="0" y="3649639"/>
+                    <a:pt x="0" y="1317069"/>
                   </a:moveTo>
                   <a:lnTo>
                     <a:pt x="0" y="0"/>
@@ -2529,15 +2521,15 @@
           </p:nvSpPr>
           <p:spPr>
             <a:xfrm>
-              <a:off x="4827079" y="2073503"/>
-              <a:ext cx="0" cy="3649639"/>
+              <a:off x="3115069" y="2143092"/>
+              <a:ext cx="0" cy="1317069"/>
             </a:xfrm>
             <a:custGeom>
               <a:avLst/>
               <a:pathLst>
-                <a:path w="0" h="3649639">
+                <a:path w="0" h="1317069">
                   <a:moveTo>
-                    <a:pt x="0" y="3649639"/>
+                    <a:pt x="0" y="1317069"/>
                   </a:moveTo>
                   <a:lnTo>
                     <a:pt x="0" y="0"/>
@@ -2572,15 +2564,15 @@
           </p:nvSpPr>
           <p:spPr>
             <a:xfrm>
-              <a:off x="6568199" y="2073503"/>
-              <a:ext cx="0" cy="3649639"/>
+              <a:off x="4825121" y="2143092"/>
+              <a:ext cx="0" cy="1317069"/>
             </a:xfrm>
             <a:custGeom>
               <a:avLst/>
               <a:pathLst>
-                <a:path w="0" h="3649639">
+                <a:path w="0" h="1317069">
                   <a:moveTo>
-                    <a:pt x="0" y="3649639"/>
+                    <a:pt x="0" y="1317069"/>
                   </a:moveTo>
                   <a:lnTo>
                     <a:pt x="0" y="0"/>
@@ -2615,15 +2607,15 @@
           </p:nvSpPr>
           <p:spPr>
             <a:xfrm>
-              <a:off x="8309320" y="2073503"/>
-              <a:ext cx="0" cy="3649639"/>
+              <a:off x="6535173" y="2143092"/>
+              <a:ext cx="0" cy="1317069"/>
             </a:xfrm>
             <a:custGeom>
               <a:avLst/>
               <a:pathLst>
-                <a:path w="0" h="3649639">
+                <a:path w="0" h="1317069">
                   <a:moveTo>
-                    <a:pt x="0" y="3649639"/>
+                    <a:pt x="0" y="1317069"/>
                   </a:moveTo>
                   <a:lnTo>
                     <a:pt x="0" y="0"/>
@@ -2658,26 +2650,26 @@
           </p:nvSpPr>
           <p:spPr>
             <a:xfrm>
-              <a:off x="817517" y="5557249"/>
-              <a:ext cx="7799693" cy="0"/>
+              <a:off x="8245225" y="2143092"/>
+              <a:ext cx="0" cy="1317069"/>
             </a:xfrm>
             <a:custGeom>
               <a:avLst/>
               <a:pathLst>
-                <a:path w="7799693" h="0">
+                <a:path w="0" h="1317069">
                   <a:moveTo>
+                    <a:pt x="0" y="1317069"/>
+                  </a:moveTo>
+                  <a:lnTo>
                     <a:pt x="0" y="0"/>
-                  </a:moveTo>
-                  <a:lnTo>
-                    <a:pt x="7799693" y="0"/>
-                  </a:lnTo>
-                  <a:lnTo>
-                    <a:pt x="7799693" y="0"/>
+                  </a:lnTo>
+                  <a:lnTo>
+                    <a:pt x="0" y="0"/>
                   </a:lnTo>
                 </a:path>
               </a:pathLst>
             </a:custGeom>
-            <a:ln w="13550" cap="flat">
+            <a:ln w="6775" cap="flat">
               <a:solidFill>
                 <a:srgbClr val="EBEBEB">
                   <a:alpha val="100000"/>
@@ -2701,21 +2693,21 @@
           </p:nvSpPr>
           <p:spPr>
             <a:xfrm>
-              <a:off x="817517" y="4727786"/>
-              <a:ext cx="7799693" cy="0"/>
+              <a:off x="887106" y="3400294"/>
+              <a:ext cx="7660515" cy="0"/>
             </a:xfrm>
             <a:custGeom>
               <a:avLst/>
               <a:pathLst>
-                <a:path w="7799693" h="0">
+                <a:path w="7660515" h="0">
                   <a:moveTo>
                     <a:pt x="0" y="0"/>
                   </a:moveTo>
                   <a:lnTo>
-                    <a:pt x="7799693" y="0"/>
-                  </a:lnTo>
-                  <a:lnTo>
-                    <a:pt x="7799693" y="0"/>
+                    <a:pt x="7660515" y="0"/>
+                  </a:lnTo>
+                  <a:lnTo>
+                    <a:pt x="7660515" y="0"/>
                   </a:lnTo>
                 </a:path>
               </a:pathLst>
@@ -2744,21 +2736,21 @@
           </p:nvSpPr>
           <p:spPr>
             <a:xfrm>
-              <a:off x="817517" y="3898322"/>
-              <a:ext cx="7799693" cy="0"/>
+              <a:off x="887106" y="3100960"/>
+              <a:ext cx="7660515" cy="0"/>
             </a:xfrm>
             <a:custGeom>
               <a:avLst/>
               <a:pathLst>
-                <a:path w="7799693" h="0">
+                <a:path w="7660515" h="0">
                   <a:moveTo>
                     <a:pt x="0" y="0"/>
                   </a:moveTo>
                   <a:lnTo>
-                    <a:pt x="7799693" y="0"/>
-                  </a:lnTo>
-                  <a:lnTo>
-                    <a:pt x="7799693" y="0"/>
+                    <a:pt x="7660515" y="0"/>
+                  </a:lnTo>
+                  <a:lnTo>
+                    <a:pt x="7660515" y="0"/>
                   </a:lnTo>
                 </a:path>
               </a:pathLst>
@@ -2787,21 +2779,21 @@
           </p:nvSpPr>
           <p:spPr>
             <a:xfrm>
-              <a:off x="817517" y="3068859"/>
-              <a:ext cx="7799693" cy="0"/>
+              <a:off x="887106" y="2801626"/>
+              <a:ext cx="7660515" cy="0"/>
             </a:xfrm>
             <a:custGeom>
               <a:avLst/>
               <a:pathLst>
-                <a:path w="7799693" h="0">
+                <a:path w="7660515" h="0">
                   <a:moveTo>
                     <a:pt x="0" y="0"/>
                   </a:moveTo>
                   <a:lnTo>
-                    <a:pt x="7799693" y="0"/>
-                  </a:lnTo>
-                  <a:lnTo>
-                    <a:pt x="7799693" y="0"/>
+                    <a:pt x="7660515" y="0"/>
+                  </a:lnTo>
+                  <a:lnTo>
+                    <a:pt x="7660515" y="0"/>
                   </a:lnTo>
                 </a:path>
               </a:pathLst>
@@ -2830,21 +2822,21 @@
           </p:nvSpPr>
           <p:spPr>
             <a:xfrm>
-              <a:off x="817517" y="2239395"/>
-              <a:ext cx="7799693" cy="0"/>
+              <a:off x="887106" y="2502292"/>
+              <a:ext cx="7660515" cy="0"/>
             </a:xfrm>
             <a:custGeom>
               <a:avLst/>
               <a:pathLst>
-                <a:path w="7799693" h="0">
+                <a:path w="7660515" h="0">
                   <a:moveTo>
                     <a:pt x="0" y="0"/>
                   </a:moveTo>
                   <a:lnTo>
-                    <a:pt x="7799693" y="0"/>
-                  </a:lnTo>
-                  <a:lnTo>
-                    <a:pt x="7799693" y="0"/>
+                    <a:pt x="7660515" y="0"/>
+                  </a:lnTo>
+                  <a:lnTo>
+                    <a:pt x="7660515" y="0"/>
                   </a:lnTo>
                 </a:path>
               </a:pathLst>
@@ -2873,21 +2865,21 @@
           </p:nvSpPr>
           <p:spPr>
             <a:xfrm>
-              <a:off x="2215398" y="2073503"/>
-              <a:ext cx="0" cy="3649639"/>
+              <a:off x="887106" y="2202958"/>
+              <a:ext cx="7660515" cy="0"/>
             </a:xfrm>
             <a:custGeom>
               <a:avLst/>
               <a:pathLst>
-                <a:path w="0" h="3649639">
+                <a:path w="7660515" h="0">
                   <a:moveTo>
-                    <a:pt x="0" y="3649639"/>
+                    <a:pt x="0" y="0"/>
                   </a:moveTo>
                   <a:lnTo>
-                    <a:pt x="0" y="0"/>
-                  </a:lnTo>
-                  <a:lnTo>
-                    <a:pt x="0" y="0"/>
+                    <a:pt x="7660515" y="0"/>
+                  </a:lnTo>
+                  <a:lnTo>
+                    <a:pt x="7660515" y="0"/>
                   </a:lnTo>
                 </a:path>
               </a:pathLst>
@@ -2916,15 +2908,15 @@
           </p:nvSpPr>
           <p:spPr>
             <a:xfrm>
-              <a:off x="3956518" y="2073503"/>
-              <a:ext cx="0" cy="3649639"/>
+              <a:off x="2260043" y="2143092"/>
+              <a:ext cx="0" cy="1317069"/>
             </a:xfrm>
             <a:custGeom>
               <a:avLst/>
               <a:pathLst>
-                <a:path w="0" h="3649639">
+                <a:path w="0" h="1317069">
                   <a:moveTo>
-                    <a:pt x="0" y="3649639"/>
+                    <a:pt x="0" y="1317069"/>
                   </a:moveTo>
                   <a:lnTo>
                     <a:pt x="0" y="0"/>
@@ -2959,15 +2951,15 @@
           </p:nvSpPr>
           <p:spPr>
             <a:xfrm>
-              <a:off x="5697639" y="2073503"/>
-              <a:ext cx="0" cy="3649639"/>
+              <a:off x="3970095" y="2143092"/>
+              <a:ext cx="0" cy="1317069"/>
             </a:xfrm>
             <a:custGeom>
               <a:avLst/>
               <a:pathLst>
-                <a:path w="0" h="3649639">
+                <a:path w="0" h="1317069">
                   <a:moveTo>
-                    <a:pt x="0" y="3649639"/>
+                    <a:pt x="0" y="1317069"/>
                   </a:moveTo>
                   <a:lnTo>
                     <a:pt x="0" y="0"/>
@@ -3002,15 +2994,15 @@
           </p:nvSpPr>
           <p:spPr>
             <a:xfrm>
-              <a:off x="7438760" y="2073503"/>
-              <a:ext cx="0" cy="3649639"/>
+              <a:off x="5680147" y="2143092"/>
+              <a:ext cx="0" cy="1317069"/>
             </a:xfrm>
             <a:custGeom>
               <a:avLst/>
               <a:pathLst>
-                <a:path w="0" h="3649639">
+                <a:path w="0" h="1317069">
                   <a:moveTo>
-                    <a:pt x="0" y="3649639"/>
+                    <a:pt x="0" y="1317069"/>
                   </a:moveTo>
                   <a:lnTo>
                     <a:pt x="0" y="0"/>
@@ -3039,618 +3031,661 @@
         </p:sp>
         <p:sp>
           <p:nvSpPr>
-            <p:cNvPr id="22" name="pg22"/>
+            <p:cNvPr id="22" name="pl22"/>
             <p:cNvSpPr/>
             <p:nvPr/>
           </p:nvSpPr>
           <p:spPr>
             <a:xfrm>
-              <a:off x="1172049" y="3815289"/>
-              <a:ext cx="7090630" cy="1419141"/>
+              <a:off x="7390199" y="2143092"/>
+              <a:ext cx="0" cy="1317069"/>
             </a:xfrm>
             <a:custGeom>
               <a:avLst/>
               <a:pathLst>
-                <a:path w="7090630" h="1419141">
+                <a:path w="0" h="1317069">
+                  <a:moveTo>
+                    <a:pt x="0" y="1317069"/>
+                  </a:moveTo>
+                  <a:lnTo>
+                    <a:pt x="0" y="0"/>
+                  </a:lnTo>
+                  <a:lnTo>
+                    <a:pt x="0" y="0"/>
+                  </a:lnTo>
+                </a:path>
+              </a:pathLst>
+            </a:custGeom>
+            <a:ln w="13550" cap="flat">
+              <a:solidFill>
+                <a:srgbClr val="EBEBEB">
+                  <a:alpha val="100000"/>
+                </a:srgbClr>
+              </a:solidFill>
+              <a:prstDash val="solid"/>
+              <a:round/>
+            </a:ln>
+          </p:spPr>
+          <p:txBody>
+            <a:bodyPr/>
+            <a:lstStyle/>
+            <a:p/>
+          </p:txBody>
+        </p:sp>
+        <p:sp>
+          <p:nvSpPr>
+            <p:cNvPr id="23" name="pg23"/>
+            <p:cNvSpPr/>
+            <p:nvPr/>
+          </p:nvSpPr>
+          <p:spPr>
+            <a:xfrm>
+              <a:off x="1235312" y="2771662"/>
+              <a:ext cx="6964104" cy="512134"/>
+            </a:xfrm>
+            <a:custGeom>
+              <a:avLst/>
+              <a:pathLst>
+                <a:path w="6964104" h="512134">
                   <a:moveTo>
                     <a:pt x="0" y="0"/>
                   </a:moveTo>
                   <a:lnTo>
-                    <a:pt x="71622" y="29409"/>
-                  </a:lnTo>
-                  <a:lnTo>
-                    <a:pt x="143245" y="58322"/>
-                  </a:lnTo>
-                  <a:lnTo>
-                    <a:pt x="214867" y="86746"/>
-                  </a:lnTo>
-                  <a:lnTo>
-                    <a:pt x="286490" y="114691"/>
-                  </a:lnTo>
-                  <a:lnTo>
-                    <a:pt x="358112" y="142164"/>
-                  </a:lnTo>
-                  <a:lnTo>
-                    <a:pt x="429735" y="169173"/>
-                  </a:lnTo>
-                  <a:lnTo>
-                    <a:pt x="501357" y="195726"/>
-                  </a:lnTo>
-                  <a:lnTo>
-                    <a:pt x="572980" y="221831"/>
-                  </a:lnTo>
-                  <a:lnTo>
-                    <a:pt x="644602" y="247495"/>
-                  </a:lnTo>
-                  <a:lnTo>
-                    <a:pt x="716225" y="272726"/>
-                  </a:lnTo>
-                  <a:lnTo>
-                    <a:pt x="787847" y="297531"/>
-                  </a:lnTo>
-                  <a:lnTo>
-                    <a:pt x="859470" y="321917"/>
-                  </a:lnTo>
-                  <a:lnTo>
-                    <a:pt x="931092" y="345892"/>
-                  </a:lnTo>
-                  <a:lnTo>
-                    <a:pt x="1002715" y="369461"/>
-                  </a:lnTo>
-                  <a:lnTo>
-                    <a:pt x="1074337" y="392633"/>
-                  </a:lnTo>
-                  <a:lnTo>
-                    <a:pt x="1145960" y="415414"/>
-                  </a:lnTo>
-                  <a:lnTo>
-                    <a:pt x="1217582" y="437810"/>
-                  </a:lnTo>
-                  <a:lnTo>
-                    <a:pt x="1289205" y="459827"/>
-                  </a:lnTo>
-                  <a:lnTo>
-                    <a:pt x="1360827" y="481474"/>
-                  </a:lnTo>
-                  <a:lnTo>
-                    <a:pt x="1432450" y="502754"/>
-                  </a:lnTo>
-                  <a:lnTo>
-                    <a:pt x="1504073" y="523676"/>
-                  </a:lnTo>
-                  <a:lnTo>
-                    <a:pt x="1575695" y="544244"/>
-                  </a:lnTo>
-                  <a:lnTo>
-                    <a:pt x="1647318" y="564465"/>
-                  </a:lnTo>
-                  <a:lnTo>
-                    <a:pt x="1718940" y="584344"/>
-                  </a:lnTo>
-                  <a:lnTo>
-                    <a:pt x="1790563" y="603888"/>
-                  </a:lnTo>
-                  <a:lnTo>
-                    <a:pt x="1862185" y="623102"/>
-                  </a:lnTo>
-                  <a:lnTo>
-                    <a:pt x="1933808" y="641992"/>
-                  </a:lnTo>
-                  <a:lnTo>
-                    <a:pt x="2005430" y="660562"/>
-                  </a:lnTo>
-                  <a:lnTo>
-                    <a:pt x="2077053" y="678819"/>
-                  </a:lnTo>
-                  <a:lnTo>
-                    <a:pt x="2148675" y="696768"/>
-                  </a:lnTo>
-                  <a:lnTo>
-                    <a:pt x="2220298" y="714414"/>
-                  </a:lnTo>
-                  <a:lnTo>
-                    <a:pt x="2291920" y="731762"/>
-                  </a:lnTo>
-                  <a:lnTo>
-                    <a:pt x="2363543" y="748817"/>
-                  </a:lnTo>
-                  <a:lnTo>
-                    <a:pt x="2435165" y="765584"/>
-                  </a:lnTo>
-                  <a:lnTo>
-                    <a:pt x="2506788" y="782068"/>
-                  </a:lnTo>
-                  <a:lnTo>
-                    <a:pt x="2578410" y="798274"/>
-                  </a:lnTo>
-                  <a:lnTo>
-                    <a:pt x="2650033" y="814206"/>
-                  </a:lnTo>
-                  <a:lnTo>
-                    <a:pt x="2721655" y="829869"/>
-                  </a:lnTo>
-                  <a:lnTo>
-                    <a:pt x="2793278" y="845268"/>
-                  </a:lnTo>
-                  <a:lnTo>
-                    <a:pt x="2864901" y="860407"/>
-                  </a:lnTo>
-                  <a:lnTo>
-                    <a:pt x="2936523" y="875290"/>
-                  </a:lnTo>
-                  <a:lnTo>
-                    <a:pt x="3008146" y="889922"/>
-                  </a:lnTo>
-                  <a:lnTo>
-                    <a:pt x="3079768" y="904307"/>
-                  </a:lnTo>
-                  <a:lnTo>
-                    <a:pt x="3151391" y="913827"/>
-                  </a:lnTo>
-                  <a:lnTo>
-                    <a:pt x="3223013" y="916966"/>
-                  </a:lnTo>
-                  <a:lnTo>
-                    <a:pt x="3294636" y="920092"/>
-                  </a:lnTo>
-                  <a:lnTo>
-                    <a:pt x="3366258" y="923207"/>
-                  </a:lnTo>
-                  <a:lnTo>
-                    <a:pt x="3437881" y="926310"/>
-                  </a:lnTo>
-                  <a:lnTo>
-                    <a:pt x="3509503" y="929401"/>
-                  </a:lnTo>
-                  <a:lnTo>
-                    <a:pt x="3581126" y="932481"/>
-                  </a:lnTo>
-                  <a:lnTo>
-                    <a:pt x="3652748" y="935549"/>
-                  </a:lnTo>
-                  <a:lnTo>
-                    <a:pt x="3724371" y="938605"/>
-                  </a:lnTo>
-                  <a:lnTo>
-                    <a:pt x="3795993" y="941650"/>
-                  </a:lnTo>
-                  <a:lnTo>
-                    <a:pt x="3867616" y="944683"/>
-                  </a:lnTo>
-                  <a:lnTo>
-                    <a:pt x="3939238" y="947705"/>
-                  </a:lnTo>
-                  <a:lnTo>
-                    <a:pt x="4010861" y="950715"/>
-                  </a:lnTo>
-                  <a:lnTo>
-                    <a:pt x="4082483" y="953714"/>
-                  </a:lnTo>
-                  <a:lnTo>
-                    <a:pt x="4154106" y="956701"/>
-                  </a:lnTo>
-                  <a:lnTo>
-                    <a:pt x="4225729" y="959677"/>
-                  </a:lnTo>
-                  <a:lnTo>
-                    <a:pt x="4297351" y="962642"/>
-                  </a:lnTo>
-                  <a:lnTo>
-                    <a:pt x="4368974" y="965595"/>
-                  </a:lnTo>
-                  <a:lnTo>
-                    <a:pt x="4440596" y="968538"/>
-                  </a:lnTo>
-                  <a:lnTo>
-                    <a:pt x="4512219" y="971469"/>
-                  </a:lnTo>
-                  <a:lnTo>
-                    <a:pt x="4583841" y="974389"/>
-                  </a:lnTo>
-                  <a:lnTo>
-                    <a:pt x="4655464" y="977298"/>
-                  </a:lnTo>
-                  <a:lnTo>
-                    <a:pt x="4727086" y="980196"/>
-                  </a:lnTo>
-                  <a:lnTo>
-                    <a:pt x="4798709" y="983083"/>
-                  </a:lnTo>
-                  <a:lnTo>
-                    <a:pt x="4870331" y="985959"/>
-                  </a:lnTo>
-                  <a:lnTo>
-                    <a:pt x="4941954" y="988824"/>
-                  </a:lnTo>
-                  <a:lnTo>
-                    <a:pt x="5013576" y="991679"/>
-                  </a:lnTo>
-                  <a:lnTo>
-                    <a:pt x="5085199" y="994522"/>
-                  </a:lnTo>
-                  <a:lnTo>
-                    <a:pt x="5156821" y="997355"/>
-                  </a:lnTo>
-                  <a:lnTo>
-                    <a:pt x="5228444" y="1000177"/>
-                  </a:lnTo>
-                  <a:lnTo>
-                    <a:pt x="5300066" y="1002988"/>
-                  </a:lnTo>
-                  <a:lnTo>
-                    <a:pt x="5371689" y="1005789"/>
-                  </a:lnTo>
-                  <a:lnTo>
-                    <a:pt x="5443311" y="1008579"/>
-                  </a:lnTo>
-                  <a:lnTo>
-                    <a:pt x="5514934" y="1011359"/>
-                  </a:lnTo>
-                  <a:lnTo>
-                    <a:pt x="5586557" y="1014127"/>
-                  </a:lnTo>
-                  <a:lnTo>
-                    <a:pt x="5658179" y="1016886"/>
-                  </a:lnTo>
-                  <a:lnTo>
-                    <a:pt x="5729802" y="1019634"/>
-                  </a:lnTo>
-                  <a:lnTo>
-                    <a:pt x="5801424" y="1022371"/>
-                  </a:lnTo>
-                  <a:lnTo>
-                    <a:pt x="5873047" y="1025099"/>
-                  </a:lnTo>
-                  <a:lnTo>
-                    <a:pt x="5944669" y="1027816"/>
-                  </a:lnTo>
-                  <a:lnTo>
-                    <a:pt x="6016292" y="1030522"/>
-                  </a:lnTo>
-                  <a:lnTo>
-                    <a:pt x="6087914" y="1033218"/>
-                  </a:lnTo>
-                  <a:lnTo>
-                    <a:pt x="6159537" y="1035904"/>
-                  </a:lnTo>
-                  <a:lnTo>
-                    <a:pt x="6231159" y="1038580"/>
-                  </a:lnTo>
-                  <a:lnTo>
-                    <a:pt x="6302782" y="1041246"/>
-                  </a:lnTo>
-                  <a:lnTo>
-                    <a:pt x="6374404" y="1043902"/>
-                  </a:lnTo>
-                  <a:lnTo>
-                    <a:pt x="6446027" y="1046547"/>
-                  </a:lnTo>
-                  <a:lnTo>
-                    <a:pt x="6517649" y="1049183"/>
-                  </a:lnTo>
-                  <a:lnTo>
-                    <a:pt x="6589272" y="1051809"/>
-                  </a:lnTo>
-                  <a:lnTo>
-                    <a:pt x="6660894" y="1054424"/>
-                  </a:lnTo>
-                  <a:lnTo>
-                    <a:pt x="6732517" y="1057030"/>
-                  </a:lnTo>
-                  <a:lnTo>
-                    <a:pt x="6804139" y="1059626"/>
-                  </a:lnTo>
-                  <a:lnTo>
-                    <a:pt x="6875762" y="1062212"/>
-                  </a:lnTo>
-                  <a:lnTo>
-                    <a:pt x="6947385" y="1064788"/>
-                  </a:lnTo>
-                  <a:lnTo>
-                    <a:pt x="7019007" y="1067354"/>
-                  </a:lnTo>
-                  <a:lnTo>
-                    <a:pt x="7090630" y="1069911"/>
-                  </a:lnTo>
-                  <a:lnTo>
-                    <a:pt x="7090630" y="1419141"/>
-                  </a:lnTo>
-                  <a:lnTo>
-                    <a:pt x="7019007" y="1413597"/>
-                  </a:lnTo>
-                  <a:lnTo>
-                    <a:pt x="6947385" y="1407958"/>
-                  </a:lnTo>
-                  <a:lnTo>
-                    <a:pt x="6875762" y="1402223"/>
-                  </a:lnTo>
-                  <a:lnTo>
-                    <a:pt x="6804139" y="1396389"/>
-                  </a:lnTo>
-                  <a:lnTo>
-                    <a:pt x="6732517" y="1390454"/>
-                  </a:lnTo>
-                  <a:lnTo>
-                    <a:pt x="6660894" y="1384418"/>
-                  </a:lnTo>
-                  <a:lnTo>
-                    <a:pt x="6589272" y="1378278"/>
-                  </a:lnTo>
-                  <a:lnTo>
-                    <a:pt x="6517649" y="1372032"/>
-                  </a:lnTo>
-                  <a:lnTo>
-                    <a:pt x="6446027" y="1365680"/>
-                  </a:lnTo>
-                  <a:lnTo>
-                    <a:pt x="6374404" y="1359218"/>
-                  </a:lnTo>
-                  <a:lnTo>
-                    <a:pt x="6302782" y="1352645"/>
-                  </a:lnTo>
-                  <a:lnTo>
-                    <a:pt x="6231159" y="1345959"/>
-                  </a:lnTo>
-                  <a:lnTo>
-                    <a:pt x="6159537" y="1339159"/>
-                  </a:lnTo>
-                  <a:lnTo>
-                    <a:pt x="6087914" y="1332242"/>
-                  </a:lnTo>
-                  <a:lnTo>
-                    <a:pt x="6016292" y="1325206"/>
-                  </a:lnTo>
-                  <a:lnTo>
-                    <a:pt x="5944669" y="1318049"/>
-                  </a:lnTo>
-                  <a:lnTo>
-                    <a:pt x="5873047" y="1310769"/>
-                  </a:lnTo>
-                  <a:lnTo>
-                    <a:pt x="5801424" y="1303364"/>
-                  </a:lnTo>
-                  <a:lnTo>
-                    <a:pt x="5729802" y="1295833"/>
-                  </a:lnTo>
-                  <a:lnTo>
-                    <a:pt x="5658179" y="1288171"/>
-                  </a:lnTo>
-                  <a:lnTo>
-                    <a:pt x="5586557" y="1280378"/>
-                  </a:lnTo>
-                  <a:lnTo>
-                    <a:pt x="5514934" y="1272452"/>
-                  </a:lnTo>
-                  <a:lnTo>
-                    <a:pt x="5443311" y="1264389"/>
-                  </a:lnTo>
-                  <a:lnTo>
-                    <a:pt x="5371689" y="1256188"/>
-                  </a:lnTo>
-                  <a:lnTo>
-                    <a:pt x="5300066" y="1247846"/>
-                  </a:lnTo>
-                  <a:lnTo>
-                    <a:pt x="5228444" y="1239360"/>
-                  </a:lnTo>
-                  <a:lnTo>
-                    <a:pt x="5156821" y="1230729"/>
-                  </a:lnTo>
-                  <a:lnTo>
-                    <a:pt x="5085199" y="1221950"/>
-                  </a:lnTo>
-                  <a:lnTo>
-                    <a:pt x="5013576" y="1213020"/>
-                  </a:lnTo>
-                  <a:lnTo>
-                    <a:pt x="4941954" y="1203937"/>
-                  </a:lnTo>
-                  <a:lnTo>
-                    <a:pt x="4870331" y="1194697"/>
-                  </a:lnTo>
-                  <a:lnTo>
-                    <a:pt x="4798709" y="1185299"/>
-                  </a:lnTo>
-                  <a:lnTo>
-                    <a:pt x="4727086" y="1175740"/>
-                  </a:lnTo>
-                  <a:lnTo>
-                    <a:pt x="4655464" y="1166016"/>
-                  </a:lnTo>
-                  <a:lnTo>
-                    <a:pt x="4583841" y="1156126"/>
-                  </a:lnTo>
-                  <a:lnTo>
-                    <a:pt x="4512219" y="1146065"/>
-                  </a:lnTo>
-                  <a:lnTo>
-                    <a:pt x="4440596" y="1135832"/>
-                  </a:lnTo>
-                  <a:lnTo>
-                    <a:pt x="4368974" y="1125423"/>
-                  </a:lnTo>
-                  <a:lnTo>
-                    <a:pt x="4297351" y="1114836"/>
-                  </a:lnTo>
-                  <a:lnTo>
-                    <a:pt x="4225729" y="1104066"/>
-                  </a:lnTo>
-                  <a:lnTo>
-                    <a:pt x="4154106" y="1093112"/>
-                  </a:lnTo>
-                  <a:lnTo>
-                    <a:pt x="4082483" y="1081969"/>
-                  </a:lnTo>
-                  <a:lnTo>
-                    <a:pt x="4010861" y="1070635"/>
-                  </a:lnTo>
-                  <a:lnTo>
-                    <a:pt x="3939238" y="1059107"/>
-                  </a:lnTo>
-                  <a:lnTo>
-                    <a:pt x="3867616" y="1047380"/>
-                  </a:lnTo>
-                  <a:lnTo>
-                    <a:pt x="3795993" y="1035452"/>
-                  </a:lnTo>
-                  <a:lnTo>
-                    <a:pt x="3724371" y="1023320"/>
-                  </a:lnTo>
-                  <a:lnTo>
-                    <a:pt x="3652748" y="1010978"/>
-                  </a:lnTo>
-                  <a:lnTo>
-                    <a:pt x="3581126" y="998425"/>
-                  </a:lnTo>
-                  <a:lnTo>
-                    <a:pt x="3509503" y="985657"/>
-                  </a:lnTo>
-                  <a:lnTo>
-                    <a:pt x="3437881" y="972669"/>
-                  </a:lnTo>
-                  <a:lnTo>
-                    <a:pt x="3366258" y="959458"/>
-                  </a:lnTo>
-                  <a:lnTo>
-                    <a:pt x="3294636" y="946020"/>
-                  </a:lnTo>
-                  <a:lnTo>
-                    <a:pt x="3223013" y="932352"/>
-                  </a:lnTo>
-                  <a:lnTo>
-                    <a:pt x="3151391" y="918449"/>
-                  </a:lnTo>
-                  <a:lnTo>
-                    <a:pt x="3079768" y="910677"/>
-                  </a:lnTo>
-                  <a:lnTo>
-                    <a:pt x="3008146" y="907514"/>
-                  </a:lnTo>
-                  <a:lnTo>
-                    <a:pt x="2936523" y="904340"/>
-                  </a:lnTo>
-                  <a:lnTo>
-                    <a:pt x="2864901" y="901153"/>
-                  </a:lnTo>
-                  <a:lnTo>
-                    <a:pt x="2793278" y="897954"/>
-                  </a:lnTo>
-                  <a:lnTo>
-                    <a:pt x="2721655" y="894743"/>
-                  </a:lnTo>
-                  <a:lnTo>
-                    <a:pt x="2650033" y="891520"/>
-                  </a:lnTo>
-                  <a:lnTo>
-                    <a:pt x="2578410" y="888285"/>
-                  </a:lnTo>
-                  <a:lnTo>
-                    <a:pt x="2506788" y="885037"/>
-                  </a:lnTo>
-                  <a:lnTo>
-                    <a:pt x="2435165" y="881777"/>
-                  </a:lnTo>
-                  <a:lnTo>
-                    <a:pt x="2363543" y="878505"/>
-                  </a:lnTo>
-                  <a:lnTo>
-                    <a:pt x="2291920" y="875220"/>
-                  </a:lnTo>
-                  <a:lnTo>
-                    <a:pt x="2220298" y="871922"/>
-                  </a:lnTo>
-                  <a:lnTo>
-                    <a:pt x="2148675" y="868613"/>
-                  </a:lnTo>
-                  <a:lnTo>
-                    <a:pt x="2077053" y="865290"/>
-                  </a:lnTo>
-                  <a:lnTo>
-                    <a:pt x="2005430" y="861955"/>
-                  </a:lnTo>
-                  <a:lnTo>
-                    <a:pt x="1933808" y="858607"/>
-                  </a:lnTo>
-                  <a:lnTo>
-                    <a:pt x="1862185" y="855246"/>
-                  </a:lnTo>
-                  <a:lnTo>
-                    <a:pt x="1790563" y="851873"/>
-                  </a:lnTo>
-                  <a:lnTo>
-                    <a:pt x="1718940" y="848487"/>
-                  </a:lnTo>
-                  <a:lnTo>
-                    <a:pt x="1647318" y="845088"/>
-                  </a:lnTo>
-                  <a:lnTo>
-                    <a:pt x="1575695" y="841676"/>
-                  </a:lnTo>
-                  <a:lnTo>
-                    <a:pt x="1504073" y="838251"/>
-                  </a:lnTo>
-                  <a:lnTo>
-                    <a:pt x="1432450" y="834813"/>
-                  </a:lnTo>
-                  <a:lnTo>
-                    <a:pt x="1360827" y="831362"/>
-                  </a:lnTo>
-                  <a:lnTo>
-                    <a:pt x="1289205" y="827897"/>
-                  </a:lnTo>
-                  <a:lnTo>
-                    <a:pt x="1217582" y="824420"/>
-                  </a:lnTo>
-                  <a:lnTo>
-                    <a:pt x="1145960" y="820929"/>
-                  </a:lnTo>
-                  <a:lnTo>
-                    <a:pt x="1074337" y="817425"/>
-                  </a:lnTo>
-                  <a:lnTo>
-                    <a:pt x="1002715" y="813908"/>
-                  </a:lnTo>
-                  <a:lnTo>
-                    <a:pt x="931092" y="810377"/>
-                  </a:lnTo>
-                  <a:lnTo>
-                    <a:pt x="859470" y="806833"/>
-                  </a:lnTo>
-                  <a:lnTo>
-                    <a:pt x="787847" y="803276"/>
-                  </a:lnTo>
-                  <a:lnTo>
-                    <a:pt x="716225" y="799705"/>
-                  </a:lnTo>
-                  <a:lnTo>
-                    <a:pt x="644602" y="796120"/>
-                  </a:lnTo>
-                  <a:lnTo>
-                    <a:pt x="572980" y="792522"/>
-                  </a:lnTo>
-                  <a:lnTo>
-                    <a:pt x="501357" y="788910"/>
-                  </a:lnTo>
-                  <a:lnTo>
-                    <a:pt x="429735" y="785284"/>
-                  </a:lnTo>
-                  <a:lnTo>
-                    <a:pt x="358112" y="781644"/>
-                  </a:lnTo>
-                  <a:lnTo>
-                    <a:pt x="286490" y="777991"/>
-                  </a:lnTo>
-                  <a:lnTo>
-                    <a:pt x="214867" y="774324"/>
-                  </a:lnTo>
-                  <a:lnTo>
-                    <a:pt x="143245" y="770643"/>
-                  </a:lnTo>
-                  <a:lnTo>
-                    <a:pt x="71622" y="766947"/>
-                  </a:lnTo>
-                  <a:lnTo>
-                    <a:pt x="0" y="763238"/>
+                    <a:pt x="70344" y="10613"/>
+                  </a:lnTo>
+                  <a:lnTo>
+                    <a:pt x="140688" y="21047"/>
+                  </a:lnTo>
+                  <a:lnTo>
+                    <a:pt x="211033" y="31304"/>
+                  </a:lnTo>
+                  <a:lnTo>
+                    <a:pt x="281377" y="41389"/>
+                  </a:lnTo>
+                  <a:lnTo>
+                    <a:pt x="351722" y="51303"/>
+                  </a:lnTo>
+                  <a:lnTo>
+                    <a:pt x="422066" y="61050"/>
+                  </a:lnTo>
+                  <a:lnTo>
+                    <a:pt x="492411" y="70633"/>
+                  </a:lnTo>
+                  <a:lnTo>
+                    <a:pt x="562755" y="80053"/>
+                  </a:lnTo>
+                  <a:lnTo>
+                    <a:pt x="633100" y="89315"/>
+                  </a:lnTo>
+                  <a:lnTo>
+                    <a:pt x="703444" y="98420"/>
+                  </a:lnTo>
+                  <a:lnTo>
+                    <a:pt x="773789" y="107372"/>
+                  </a:lnTo>
+                  <a:lnTo>
+                    <a:pt x="844133" y="116172"/>
+                  </a:lnTo>
+                  <a:lnTo>
+                    <a:pt x="914478" y="124824"/>
+                  </a:lnTo>
+                  <a:lnTo>
+                    <a:pt x="984822" y="133330"/>
+                  </a:lnTo>
+                  <a:lnTo>
+                    <a:pt x="1055167" y="141692"/>
+                  </a:lnTo>
+                  <a:lnTo>
+                    <a:pt x="1125511" y="149913"/>
+                  </a:lnTo>
+                  <a:lnTo>
+                    <a:pt x="1195856" y="157995"/>
+                  </a:lnTo>
+                  <a:lnTo>
+                    <a:pt x="1266200" y="165941"/>
+                  </a:lnTo>
+                  <a:lnTo>
+                    <a:pt x="1336545" y="173752"/>
+                  </a:lnTo>
+                  <a:lnTo>
+                    <a:pt x="1406889" y="181432"/>
+                  </a:lnTo>
+                  <a:lnTo>
+                    <a:pt x="1477234" y="188982"/>
+                  </a:lnTo>
+                  <a:lnTo>
+                    <a:pt x="1547578" y="196404"/>
+                  </a:lnTo>
+                  <a:lnTo>
+                    <a:pt x="1617923" y="203702"/>
+                  </a:lnTo>
+                  <a:lnTo>
+                    <a:pt x="1688267" y="210876"/>
+                  </a:lnTo>
+                  <a:lnTo>
+                    <a:pt x="1758612" y="217929"/>
+                  </a:lnTo>
+                  <a:lnTo>
+                    <a:pt x="1828956" y="224863"/>
+                  </a:lnTo>
+                  <a:lnTo>
+                    <a:pt x="1899301" y="231679"/>
+                  </a:lnTo>
+                  <a:lnTo>
+                    <a:pt x="1969645" y="238381"/>
+                  </a:lnTo>
+                  <a:lnTo>
+                    <a:pt x="2039990" y="244970"/>
+                  </a:lnTo>
+                  <a:lnTo>
+                    <a:pt x="2110334" y="251447"/>
+                  </a:lnTo>
+                  <a:lnTo>
+                    <a:pt x="2180679" y="257815"/>
+                  </a:lnTo>
+                  <a:lnTo>
+                    <a:pt x="2251023" y="264075"/>
+                  </a:lnTo>
+                  <a:lnTo>
+                    <a:pt x="2321368" y="270230"/>
+                  </a:lnTo>
+                  <a:lnTo>
+                    <a:pt x="2391712" y="276281"/>
+                  </a:lnTo>
+                  <a:lnTo>
+                    <a:pt x="2462057" y="282230"/>
+                  </a:lnTo>
+                  <a:lnTo>
+                    <a:pt x="2532401" y="288078"/>
+                  </a:lnTo>
+                  <a:lnTo>
+                    <a:pt x="2602746" y="293828"/>
+                  </a:lnTo>
+                  <a:lnTo>
+                    <a:pt x="2673090" y="299480"/>
+                  </a:lnTo>
+                  <a:lnTo>
+                    <a:pt x="2743435" y="305037"/>
+                  </a:lnTo>
+                  <a:lnTo>
+                    <a:pt x="2813779" y="310500"/>
+                  </a:lnTo>
+                  <a:lnTo>
+                    <a:pt x="2884124" y="315871"/>
+                  </a:lnTo>
+                  <a:lnTo>
+                    <a:pt x="2954468" y="321152"/>
+                  </a:lnTo>
+                  <a:lnTo>
+                    <a:pt x="3024813" y="326343"/>
+                  </a:lnTo>
+                  <a:lnTo>
+                    <a:pt x="3095157" y="329778"/>
+                  </a:lnTo>
+                  <a:lnTo>
+                    <a:pt x="3165502" y="330911"/>
+                  </a:lnTo>
+                  <a:lnTo>
+                    <a:pt x="3235846" y="332039"/>
+                  </a:lnTo>
+                  <a:lnTo>
+                    <a:pt x="3306191" y="333163"/>
+                  </a:lnTo>
+                  <a:lnTo>
+                    <a:pt x="3376535" y="334283"/>
+                  </a:lnTo>
+                  <a:lnTo>
+                    <a:pt x="3446880" y="335399"/>
+                  </a:lnTo>
+                  <a:lnTo>
+                    <a:pt x="3517224" y="336510"/>
+                  </a:lnTo>
+                  <a:lnTo>
+                    <a:pt x="3587569" y="337617"/>
+                  </a:lnTo>
+                  <a:lnTo>
+                    <a:pt x="3657913" y="338720"/>
+                  </a:lnTo>
+                  <a:lnTo>
+                    <a:pt x="3728257" y="339819"/>
+                  </a:lnTo>
+                  <a:lnTo>
+                    <a:pt x="3798602" y="340914"/>
+                  </a:lnTo>
+                  <a:lnTo>
+                    <a:pt x="3868946" y="342004"/>
+                  </a:lnTo>
+                  <a:lnTo>
+                    <a:pt x="3939291" y="343090"/>
+                  </a:lnTo>
+                  <a:lnTo>
+                    <a:pt x="4009635" y="344172"/>
+                  </a:lnTo>
+                  <a:lnTo>
+                    <a:pt x="4079980" y="345251"/>
+                  </a:lnTo>
+                  <a:lnTo>
+                    <a:pt x="4150324" y="346325"/>
+                  </a:lnTo>
+                  <a:lnTo>
+                    <a:pt x="4220669" y="347394"/>
+                  </a:lnTo>
+                  <a:lnTo>
+                    <a:pt x="4291013" y="348460"/>
+                  </a:lnTo>
+                  <a:lnTo>
+                    <a:pt x="4361358" y="349522"/>
+                  </a:lnTo>
+                  <a:lnTo>
+                    <a:pt x="4431702" y="350580"/>
+                  </a:lnTo>
+                  <a:lnTo>
+                    <a:pt x="4502047" y="351634"/>
+                  </a:lnTo>
+                  <a:lnTo>
+                    <a:pt x="4572391" y="352684"/>
+                  </a:lnTo>
+                  <a:lnTo>
+                    <a:pt x="4642736" y="353729"/>
+                  </a:lnTo>
+                  <a:lnTo>
+                    <a:pt x="4713080" y="354771"/>
+                  </a:lnTo>
+                  <a:lnTo>
+                    <a:pt x="4783425" y="355809"/>
+                  </a:lnTo>
+                  <a:lnTo>
+                    <a:pt x="4853769" y="356843"/>
+                  </a:lnTo>
+                  <a:lnTo>
+                    <a:pt x="4924114" y="357873"/>
+                  </a:lnTo>
+                  <a:lnTo>
+                    <a:pt x="4994458" y="358899"/>
+                  </a:lnTo>
+                  <a:lnTo>
+                    <a:pt x="5064803" y="359922"/>
+                  </a:lnTo>
+                  <a:lnTo>
+                    <a:pt x="5135147" y="360940"/>
+                  </a:lnTo>
+                  <a:lnTo>
+                    <a:pt x="5205492" y="361955"/>
+                  </a:lnTo>
+                  <a:lnTo>
+                    <a:pt x="5275836" y="362965"/>
+                  </a:lnTo>
+                  <a:lnTo>
+                    <a:pt x="5346181" y="363972"/>
+                  </a:lnTo>
+                  <a:lnTo>
+                    <a:pt x="5416525" y="364975"/>
+                  </a:lnTo>
+                  <a:lnTo>
+                    <a:pt x="5486870" y="365974"/>
+                  </a:lnTo>
+                  <a:lnTo>
+                    <a:pt x="5557214" y="366970"/>
+                  </a:lnTo>
+                  <a:lnTo>
+                    <a:pt x="5627559" y="367962"/>
+                  </a:lnTo>
+                  <a:lnTo>
+                    <a:pt x="5697903" y="368949"/>
+                  </a:lnTo>
+                  <a:lnTo>
+                    <a:pt x="5768248" y="369934"/>
+                  </a:lnTo>
+                  <a:lnTo>
+                    <a:pt x="5838592" y="370914"/>
+                  </a:lnTo>
+                  <a:lnTo>
+                    <a:pt x="5908937" y="371891"/>
+                  </a:lnTo>
+                  <a:lnTo>
+                    <a:pt x="5979281" y="372864"/>
+                  </a:lnTo>
+                  <a:lnTo>
+                    <a:pt x="6049626" y="373833"/>
+                  </a:lnTo>
+                  <a:lnTo>
+                    <a:pt x="6119970" y="374799"/>
+                  </a:lnTo>
+                  <a:lnTo>
+                    <a:pt x="6190315" y="375761"/>
+                  </a:lnTo>
+                  <a:lnTo>
+                    <a:pt x="6260659" y="376719"/>
+                  </a:lnTo>
+                  <a:lnTo>
+                    <a:pt x="6331004" y="377674"/>
+                  </a:lnTo>
+                  <a:lnTo>
+                    <a:pt x="6401348" y="378625"/>
+                  </a:lnTo>
+                  <a:lnTo>
+                    <a:pt x="6471693" y="379573"/>
+                  </a:lnTo>
+                  <a:lnTo>
+                    <a:pt x="6542037" y="380517"/>
+                  </a:lnTo>
+                  <a:lnTo>
+                    <a:pt x="6612382" y="381457"/>
+                  </a:lnTo>
+                  <a:lnTo>
+                    <a:pt x="6682726" y="382394"/>
+                  </a:lnTo>
+                  <a:lnTo>
+                    <a:pt x="6753071" y="383327"/>
+                  </a:lnTo>
+                  <a:lnTo>
+                    <a:pt x="6823415" y="384257"/>
+                  </a:lnTo>
+                  <a:lnTo>
+                    <a:pt x="6893760" y="385183"/>
+                  </a:lnTo>
+                  <a:lnTo>
+                    <a:pt x="6964104" y="386105"/>
+                  </a:lnTo>
+                  <a:lnTo>
+                    <a:pt x="6964104" y="512134"/>
+                  </a:lnTo>
+                  <a:lnTo>
+                    <a:pt x="6893760" y="510134"/>
+                  </a:lnTo>
+                  <a:lnTo>
+                    <a:pt x="6823415" y="508099"/>
+                  </a:lnTo>
+                  <a:lnTo>
+                    <a:pt x="6753071" y="506029"/>
+                  </a:lnTo>
+                  <a:lnTo>
+                    <a:pt x="6682726" y="503923"/>
+                  </a:lnTo>
+                  <a:lnTo>
+                    <a:pt x="6612382" y="501782"/>
+                  </a:lnTo>
+                  <a:lnTo>
+                    <a:pt x="6542037" y="499603"/>
+                  </a:lnTo>
+                  <a:lnTo>
+                    <a:pt x="6471693" y="497388"/>
+                  </a:lnTo>
+                  <a:lnTo>
+                    <a:pt x="6401348" y="495134"/>
+                  </a:lnTo>
+                  <a:lnTo>
+                    <a:pt x="6331004" y="492841"/>
+                  </a:lnTo>
+                  <a:lnTo>
+                    <a:pt x="6260659" y="490509"/>
+                  </a:lnTo>
+                  <a:lnTo>
+                    <a:pt x="6190315" y="488137"/>
+                  </a:lnTo>
+                  <a:lnTo>
+                    <a:pt x="6119970" y="485725"/>
+                  </a:lnTo>
+                  <a:lnTo>
+                    <a:pt x="6049626" y="483271"/>
+                  </a:lnTo>
+                  <a:lnTo>
+                    <a:pt x="5979281" y="480774"/>
+                  </a:lnTo>
+                  <a:lnTo>
+                    <a:pt x="5908937" y="478235"/>
+                  </a:lnTo>
+                  <a:lnTo>
+                    <a:pt x="5838592" y="475653"/>
+                  </a:lnTo>
+                  <a:lnTo>
+                    <a:pt x="5768248" y="473025"/>
+                  </a:lnTo>
+                  <a:lnTo>
+                    <a:pt x="5697903" y="470353"/>
+                  </a:lnTo>
+                  <a:lnTo>
+                    <a:pt x="5627559" y="467635"/>
+                  </a:lnTo>
+                  <a:lnTo>
+                    <a:pt x="5557214" y="464870"/>
+                  </a:lnTo>
+                  <a:lnTo>
+                    <a:pt x="5486870" y="462058"/>
+                  </a:lnTo>
+                  <a:lnTo>
+                    <a:pt x="5416525" y="459198"/>
+                  </a:lnTo>
+                  <a:lnTo>
+                    <a:pt x="5346181" y="456288"/>
+                  </a:lnTo>
+                  <a:lnTo>
+                    <a:pt x="5275836" y="453328"/>
+                  </a:lnTo>
+                  <a:lnTo>
+                    <a:pt x="5205492" y="450318"/>
+                  </a:lnTo>
+                  <a:lnTo>
+                    <a:pt x="5135147" y="447256"/>
+                  </a:lnTo>
+                  <a:lnTo>
+                    <a:pt x="5064803" y="444141"/>
+                  </a:lnTo>
+                  <a:lnTo>
+                    <a:pt x="4994458" y="440973"/>
+                  </a:lnTo>
+                  <a:lnTo>
+                    <a:pt x="4924114" y="437750"/>
+                  </a:lnTo>
+                  <a:lnTo>
+                    <a:pt x="4853769" y="434472"/>
+                  </a:lnTo>
+                  <a:lnTo>
+                    <a:pt x="4783425" y="431138"/>
+                  </a:lnTo>
+                  <a:lnTo>
+                    <a:pt x="4713080" y="427746"/>
+                  </a:lnTo>
+                  <a:lnTo>
+                    <a:pt x="4642736" y="424297"/>
+                  </a:lnTo>
+                  <a:lnTo>
+                    <a:pt x="4572391" y="420788"/>
+                  </a:lnTo>
+                  <a:lnTo>
+                    <a:pt x="4502047" y="417218"/>
+                  </a:lnTo>
+                  <a:lnTo>
+                    <a:pt x="4431702" y="413588"/>
+                  </a:lnTo>
+                  <a:lnTo>
+                    <a:pt x="4361358" y="409895"/>
+                  </a:lnTo>
+                  <a:lnTo>
+                    <a:pt x="4291013" y="406138"/>
+                  </a:lnTo>
+                  <a:lnTo>
+                    <a:pt x="4220669" y="402318"/>
+                  </a:lnTo>
+                  <a:lnTo>
+                    <a:pt x="4150324" y="398431"/>
+                  </a:lnTo>
+                  <a:lnTo>
+                    <a:pt x="4079980" y="394478"/>
+                  </a:lnTo>
+                  <a:lnTo>
+                    <a:pt x="4009635" y="390457"/>
+                  </a:lnTo>
+                  <a:lnTo>
+                    <a:pt x="3939291" y="386367"/>
+                  </a:lnTo>
+                  <a:lnTo>
+                    <a:pt x="3868946" y="382206"/>
+                  </a:lnTo>
+                  <a:lnTo>
+                    <a:pt x="3798602" y="377975"/>
+                  </a:lnTo>
+                  <a:lnTo>
+                    <a:pt x="3728257" y="373670"/>
+                  </a:lnTo>
+                  <a:lnTo>
+                    <a:pt x="3657913" y="369292"/>
+                  </a:lnTo>
+                  <a:lnTo>
+                    <a:pt x="3587569" y="364838"/>
+                  </a:lnTo>
+                  <a:lnTo>
+                    <a:pt x="3517224" y="360308"/>
+                  </a:lnTo>
+                  <a:lnTo>
+                    <a:pt x="3446880" y="355700"/>
+                  </a:lnTo>
+                  <a:lnTo>
+                    <a:pt x="3376535" y="351013"/>
+                  </a:lnTo>
+                  <a:lnTo>
+                    <a:pt x="3306191" y="346246"/>
+                  </a:lnTo>
+                  <a:lnTo>
+                    <a:pt x="3235846" y="341396"/>
+                  </a:lnTo>
+                  <a:lnTo>
+                    <a:pt x="3165502" y="336464"/>
+                  </a:lnTo>
+                  <a:lnTo>
+                    <a:pt x="3095157" y="331446"/>
+                  </a:lnTo>
+                  <a:lnTo>
+                    <a:pt x="3024813" y="328641"/>
+                  </a:lnTo>
+                  <a:lnTo>
+                    <a:pt x="2954468" y="327500"/>
+                  </a:lnTo>
+                  <a:lnTo>
+                    <a:pt x="2884124" y="326355"/>
+                  </a:lnTo>
+                  <a:lnTo>
+                    <a:pt x="2813779" y="325205"/>
+                  </a:lnTo>
+                  <a:lnTo>
+                    <a:pt x="2743435" y="324050"/>
+                  </a:lnTo>
+                  <a:lnTo>
+                    <a:pt x="2673090" y="322892"/>
+                  </a:lnTo>
+                  <a:lnTo>
+                    <a:pt x="2602746" y="321728"/>
+                  </a:lnTo>
+                  <a:lnTo>
+                    <a:pt x="2532401" y="320561"/>
+                  </a:lnTo>
+                  <a:lnTo>
+                    <a:pt x="2462057" y="319389"/>
+                  </a:lnTo>
+                  <a:lnTo>
+                    <a:pt x="2391712" y="318212"/>
+                  </a:lnTo>
+                  <a:lnTo>
+                    <a:pt x="2321368" y="317031"/>
+                  </a:lnTo>
+                  <a:lnTo>
+                    <a:pt x="2251023" y="315846"/>
+                  </a:lnTo>
+                  <a:lnTo>
+                    <a:pt x="2180679" y="314656"/>
+                  </a:lnTo>
+                  <a:lnTo>
+                    <a:pt x="2110334" y="313461"/>
+                  </a:lnTo>
+                  <a:lnTo>
+                    <a:pt x="2039990" y="312262"/>
+                  </a:lnTo>
+                  <a:lnTo>
+                    <a:pt x="1969645" y="311059"/>
+                  </a:lnTo>
+                  <a:lnTo>
+                    <a:pt x="1899301" y="309851"/>
+                  </a:lnTo>
+                  <a:lnTo>
+                    <a:pt x="1828956" y="308638"/>
+                  </a:lnTo>
+                  <a:lnTo>
+                    <a:pt x="1758612" y="307421"/>
+                  </a:lnTo>
+                  <a:lnTo>
+                    <a:pt x="1688267" y="306199"/>
+                  </a:lnTo>
+                  <a:lnTo>
+                    <a:pt x="1617923" y="304972"/>
+                  </a:lnTo>
+                  <a:lnTo>
+                    <a:pt x="1547578" y="303741"/>
+                  </a:lnTo>
+                  <a:lnTo>
+                    <a:pt x="1477234" y="302505"/>
+                  </a:lnTo>
+                  <a:lnTo>
+                    <a:pt x="1406889" y="301264"/>
+                  </a:lnTo>
+                  <a:lnTo>
+                    <a:pt x="1336545" y="300019"/>
+                  </a:lnTo>
+                  <a:lnTo>
+                    <a:pt x="1266200" y="298768"/>
+                  </a:lnTo>
+                  <a:lnTo>
+                    <a:pt x="1195856" y="297513"/>
+                  </a:lnTo>
+                  <a:lnTo>
+                    <a:pt x="1125511" y="296254"/>
+                  </a:lnTo>
+                  <a:lnTo>
+                    <a:pt x="1055167" y="294989"/>
+                  </a:lnTo>
+                  <a:lnTo>
+                    <a:pt x="984822" y="293720"/>
+                  </a:lnTo>
+                  <a:lnTo>
+                    <a:pt x="914478" y="292446"/>
+                  </a:lnTo>
+                  <a:lnTo>
+                    <a:pt x="844133" y="291167"/>
+                  </a:lnTo>
+                  <a:lnTo>
+                    <a:pt x="773789" y="289883"/>
+                  </a:lnTo>
+                  <a:lnTo>
+                    <a:pt x="703444" y="288594"/>
+                  </a:lnTo>
+                  <a:lnTo>
+                    <a:pt x="633100" y="287301"/>
+                  </a:lnTo>
+                  <a:lnTo>
+                    <a:pt x="562755" y="286002"/>
+                  </a:lnTo>
+                  <a:lnTo>
+                    <a:pt x="492411" y="284699"/>
+                  </a:lnTo>
+                  <a:lnTo>
+                    <a:pt x="422066" y="283390"/>
+                  </a:lnTo>
+                  <a:lnTo>
+                    <a:pt x="351722" y="282077"/>
+                  </a:lnTo>
+                  <a:lnTo>
+                    <a:pt x="281377" y="280758"/>
+                  </a:lnTo>
+                  <a:lnTo>
+                    <a:pt x="211033" y="279435"/>
+                  </a:lnTo>
+                  <a:lnTo>
+                    <a:pt x="140688" y="278106"/>
+                  </a:lnTo>
+                  <a:lnTo>
+                    <a:pt x="70344" y="276773"/>
+                  </a:lnTo>
+                  <a:lnTo>
+                    <a:pt x="0" y="275434"/>
                   </a:lnTo>
                   <a:close/>
                 </a:path>
@@ -3670,643 +3705,318 @@
         </p:sp>
         <p:sp>
           <p:nvSpPr>
-            <p:cNvPr id="23" name="pl23"/>
-            <p:cNvSpPr/>
-            <p:nvPr/>
-          </p:nvSpPr>
-          <p:spPr>
-            <a:xfrm>
-              <a:off x="1172049" y="3815289"/>
-              <a:ext cx="7090630" cy="1069911"/>
-            </a:xfrm>
-            <a:custGeom>
-              <a:avLst/>
-              <a:pathLst>
-                <a:path w="7090630" h="1069911">
-                  <a:moveTo>
-                    <a:pt x="0" y="0"/>
-                  </a:moveTo>
-                  <a:lnTo>
-                    <a:pt x="71622" y="29409"/>
-                  </a:lnTo>
-                  <a:lnTo>
-                    <a:pt x="143245" y="58322"/>
-                  </a:lnTo>
-                  <a:lnTo>
-                    <a:pt x="214867" y="86746"/>
-                  </a:lnTo>
-                  <a:lnTo>
-                    <a:pt x="286490" y="114691"/>
-                  </a:lnTo>
-                  <a:lnTo>
-                    <a:pt x="358112" y="142164"/>
-                  </a:lnTo>
-                  <a:lnTo>
-                    <a:pt x="429735" y="169173"/>
-                  </a:lnTo>
-                  <a:lnTo>
-                    <a:pt x="501357" y="195726"/>
-                  </a:lnTo>
-                  <a:lnTo>
-                    <a:pt x="572980" y="221831"/>
-                  </a:lnTo>
-                  <a:lnTo>
-                    <a:pt x="644602" y="247495"/>
-                  </a:lnTo>
-                  <a:lnTo>
-                    <a:pt x="716225" y="272726"/>
-                  </a:lnTo>
-                  <a:lnTo>
-                    <a:pt x="787847" y="297531"/>
-                  </a:lnTo>
-                  <a:lnTo>
-                    <a:pt x="859470" y="321917"/>
-                  </a:lnTo>
-                  <a:lnTo>
-                    <a:pt x="931092" y="345892"/>
-                  </a:lnTo>
-                  <a:lnTo>
-                    <a:pt x="1002715" y="369461"/>
-                  </a:lnTo>
-                  <a:lnTo>
-                    <a:pt x="1074337" y="392633"/>
-                  </a:lnTo>
-                  <a:lnTo>
-                    <a:pt x="1145960" y="415414"/>
-                  </a:lnTo>
-                  <a:lnTo>
-                    <a:pt x="1217582" y="437810"/>
-                  </a:lnTo>
-                  <a:lnTo>
-                    <a:pt x="1289205" y="459827"/>
-                  </a:lnTo>
-                  <a:lnTo>
-                    <a:pt x="1360827" y="481474"/>
-                  </a:lnTo>
-                  <a:lnTo>
-                    <a:pt x="1432450" y="502754"/>
-                  </a:lnTo>
-                  <a:lnTo>
-                    <a:pt x="1504073" y="523676"/>
-                  </a:lnTo>
-                  <a:lnTo>
-                    <a:pt x="1575695" y="544244"/>
-                  </a:lnTo>
-                  <a:lnTo>
-                    <a:pt x="1647318" y="564465"/>
-                  </a:lnTo>
-                  <a:lnTo>
-                    <a:pt x="1718940" y="584344"/>
-                  </a:lnTo>
-                  <a:lnTo>
-                    <a:pt x="1790563" y="603888"/>
-                  </a:lnTo>
-                  <a:lnTo>
-                    <a:pt x="1862185" y="623102"/>
-                  </a:lnTo>
-                  <a:lnTo>
-                    <a:pt x="1933808" y="641992"/>
-                  </a:lnTo>
-                  <a:lnTo>
-                    <a:pt x="2005430" y="660562"/>
-                  </a:lnTo>
-                  <a:lnTo>
-                    <a:pt x="2077053" y="678819"/>
-                  </a:lnTo>
-                  <a:lnTo>
-                    <a:pt x="2148675" y="696768"/>
-                  </a:lnTo>
-                  <a:lnTo>
-                    <a:pt x="2220298" y="714414"/>
-                  </a:lnTo>
-                  <a:lnTo>
-                    <a:pt x="2291920" y="731762"/>
-                  </a:lnTo>
-                  <a:lnTo>
-                    <a:pt x="2363543" y="748817"/>
-                  </a:lnTo>
-                  <a:lnTo>
-                    <a:pt x="2435165" y="765584"/>
-                  </a:lnTo>
-                  <a:lnTo>
-                    <a:pt x="2506788" y="782068"/>
-                  </a:lnTo>
-                  <a:lnTo>
-                    <a:pt x="2578410" y="798274"/>
-                  </a:lnTo>
-                  <a:lnTo>
-                    <a:pt x="2650033" y="814206"/>
-                  </a:lnTo>
-                  <a:lnTo>
-                    <a:pt x="2721655" y="829869"/>
-                  </a:lnTo>
-                  <a:lnTo>
-                    <a:pt x="2793278" y="845268"/>
-                  </a:lnTo>
-                  <a:lnTo>
-                    <a:pt x="2864901" y="860407"/>
-                  </a:lnTo>
-                  <a:lnTo>
-                    <a:pt x="2936523" y="875290"/>
-                  </a:lnTo>
-                  <a:lnTo>
-                    <a:pt x="3008146" y="889922"/>
-                  </a:lnTo>
-                  <a:lnTo>
-                    <a:pt x="3079768" y="904307"/>
-                  </a:lnTo>
-                  <a:lnTo>
-                    <a:pt x="3151391" y="913827"/>
-                  </a:lnTo>
-                  <a:lnTo>
-                    <a:pt x="3223013" y="916966"/>
-                  </a:lnTo>
-                  <a:lnTo>
-                    <a:pt x="3294636" y="920092"/>
-                  </a:lnTo>
-                  <a:lnTo>
-                    <a:pt x="3366258" y="923207"/>
-                  </a:lnTo>
-                  <a:lnTo>
-                    <a:pt x="3437881" y="926310"/>
-                  </a:lnTo>
-                  <a:lnTo>
-                    <a:pt x="3509503" y="929401"/>
-                  </a:lnTo>
-                  <a:lnTo>
-                    <a:pt x="3581126" y="932481"/>
-                  </a:lnTo>
-                  <a:lnTo>
-                    <a:pt x="3652748" y="935549"/>
-                  </a:lnTo>
-                  <a:lnTo>
-                    <a:pt x="3724371" y="938605"/>
-                  </a:lnTo>
-                  <a:lnTo>
-                    <a:pt x="3795993" y="941650"/>
-                  </a:lnTo>
-                  <a:lnTo>
-                    <a:pt x="3867616" y="944683"/>
-                  </a:lnTo>
-                  <a:lnTo>
-                    <a:pt x="3939238" y="947705"/>
-                  </a:lnTo>
-                  <a:lnTo>
-                    <a:pt x="4010861" y="950715"/>
-                  </a:lnTo>
-                  <a:lnTo>
-                    <a:pt x="4082483" y="953714"/>
-                  </a:lnTo>
-                  <a:lnTo>
-                    <a:pt x="4154106" y="956701"/>
-                  </a:lnTo>
-                  <a:lnTo>
-                    <a:pt x="4225729" y="959677"/>
-                  </a:lnTo>
-                  <a:lnTo>
-                    <a:pt x="4297351" y="962642"/>
-                  </a:lnTo>
-                  <a:lnTo>
-                    <a:pt x="4368974" y="965595"/>
-                  </a:lnTo>
-                  <a:lnTo>
-                    <a:pt x="4440596" y="968538"/>
-                  </a:lnTo>
-                  <a:lnTo>
-                    <a:pt x="4512219" y="971469"/>
-                  </a:lnTo>
-                  <a:lnTo>
-                    <a:pt x="4583841" y="974389"/>
-                  </a:lnTo>
-                  <a:lnTo>
-                    <a:pt x="4655464" y="977298"/>
-                  </a:lnTo>
-                  <a:lnTo>
-                    <a:pt x="4727086" y="980196"/>
-                  </a:lnTo>
-                  <a:lnTo>
-                    <a:pt x="4798709" y="983083"/>
-                  </a:lnTo>
-                  <a:lnTo>
-                    <a:pt x="4870331" y="985959"/>
-                  </a:lnTo>
-                  <a:lnTo>
-                    <a:pt x="4941954" y="988824"/>
-                  </a:lnTo>
-                  <a:lnTo>
-                    <a:pt x="5013576" y="991679"/>
-                  </a:lnTo>
-                  <a:lnTo>
-                    <a:pt x="5085199" y="994522"/>
-                  </a:lnTo>
-                  <a:lnTo>
-                    <a:pt x="5156821" y="997355"/>
-                  </a:lnTo>
-                  <a:lnTo>
-                    <a:pt x="5228444" y="1000177"/>
-                  </a:lnTo>
-                  <a:lnTo>
-                    <a:pt x="5300066" y="1002988"/>
-                  </a:lnTo>
-                  <a:lnTo>
-                    <a:pt x="5371689" y="1005789"/>
-                  </a:lnTo>
-                  <a:lnTo>
-                    <a:pt x="5443311" y="1008579"/>
-                  </a:lnTo>
-                  <a:lnTo>
-                    <a:pt x="5514934" y="1011359"/>
-                  </a:lnTo>
-                  <a:lnTo>
-                    <a:pt x="5586557" y="1014127"/>
-                  </a:lnTo>
-                  <a:lnTo>
-                    <a:pt x="5658179" y="1016886"/>
-                  </a:lnTo>
-                  <a:lnTo>
-                    <a:pt x="5729802" y="1019634"/>
-                  </a:lnTo>
-                  <a:lnTo>
-                    <a:pt x="5801424" y="1022371"/>
-                  </a:lnTo>
-                  <a:lnTo>
-                    <a:pt x="5873047" y="1025099"/>
-                  </a:lnTo>
-                  <a:lnTo>
-                    <a:pt x="5944669" y="1027816"/>
-                  </a:lnTo>
-                  <a:lnTo>
-                    <a:pt x="6016292" y="1030522"/>
-                  </a:lnTo>
-                  <a:lnTo>
-                    <a:pt x="6087914" y="1033218"/>
-                  </a:lnTo>
-                  <a:lnTo>
-                    <a:pt x="6159537" y="1035904"/>
-                  </a:lnTo>
-                  <a:lnTo>
-                    <a:pt x="6231159" y="1038580"/>
-                  </a:lnTo>
-                  <a:lnTo>
-                    <a:pt x="6302782" y="1041246"/>
-                  </a:lnTo>
-                  <a:lnTo>
-                    <a:pt x="6374404" y="1043902"/>
-                  </a:lnTo>
-                  <a:lnTo>
-                    <a:pt x="6446027" y="1046547"/>
-                  </a:lnTo>
-                  <a:lnTo>
-                    <a:pt x="6517649" y="1049183"/>
-                  </a:lnTo>
-                  <a:lnTo>
-                    <a:pt x="6589272" y="1051809"/>
-                  </a:lnTo>
-                  <a:lnTo>
-                    <a:pt x="6660894" y="1054424"/>
-                  </a:lnTo>
-                  <a:lnTo>
-                    <a:pt x="6732517" y="1057030"/>
-                  </a:lnTo>
-                  <a:lnTo>
-                    <a:pt x="6804139" y="1059626"/>
-                  </a:lnTo>
-                  <a:lnTo>
-                    <a:pt x="6875762" y="1062212"/>
-                  </a:lnTo>
-                  <a:lnTo>
-                    <a:pt x="6947385" y="1064788"/>
-                  </a:lnTo>
-                  <a:lnTo>
-                    <a:pt x="7019007" y="1067354"/>
-                  </a:lnTo>
-                  <a:lnTo>
-                    <a:pt x="7090630" y="1069911"/>
-                  </a:lnTo>
-                </a:path>
-              </a:pathLst>
-            </a:custGeom>
-          </p:spPr>
-          <p:txBody>
-            <a:bodyPr/>
-            <a:lstStyle/>
-            <a:p/>
-          </p:txBody>
-        </p:sp>
-        <p:sp>
-          <p:nvSpPr>
             <p:cNvPr id="24" name="pl24"/>
             <p:cNvSpPr/>
             <p:nvPr/>
           </p:nvSpPr>
           <p:spPr>
             <a:xfrm>
-              <a:off x="1172049" y="4578528"/>
-              <a:ext cx="7090630" cy="655903"/>
+              <a:off x="1235312" y="2771662"/>
+              <a:ext cx="6964104" cy="386105"/>
             </a:xfrm>
             <a:custGeom>
               <a:avLst/>
               <a:pathLst>
-                <a:path w="7090630" h="655903">
+                <a:path w="6964104" h="386105">
                   <a:moveTo>
-                    <a:pt x="7090630" y="655903"/>
+                    <a:pt x="0" y="0"/>
                   </a:moveTo>
                   <a:lnTo>
-                    <a:pt x="7019007" y="650359"/>
-                  </a:lnTo>
-                  <a:lnTo>
-                    <a:pt x="6947385" y="644720"/>
-                  </a:lnTo>
-                  <a:lnTo>
-                    <a:pt x="6875762" y="638984"/>
-                  </a:lnTo>
-                  <a:lnTo>
-                    <a:pt x="6804139" y="633150"/>
-                  </a:lnTo>
-                  <a:lnTo>
-                    <a:pt x="6732517" y="627216"/>
-                  </a:lnTo>
-                  <a:lnTo>
-                    <a:pt x="6660894" y="621179"/>
-                  </a:lnTo>
-                  <a:lnTo>
-                    <a:pt x="6589272" y="615039"/>
-                  </a:lnTo>
-                  <a:lnTo>
-                    <a:pt x="6517649" y="608794"/>
-                  </a:lnTo>
-                  <a:lnTo>
-                    <a:pt x="6446027" y="602441"/>
-                  </a:lnTo>
-                  <a:lnTo>
-                    <a:pt x="6374404" y="595979"/>
-                  </a:lnTo>
-                  <a:lnTo>
-                    <a:pt x="6302782" y="589407"/>
-                  </a:lnTo>
-                  <a:lnTo>
-                    <a:pt x="6231159" y="582721"/>
-                  </a:lnTo>
-                  <a:lnTo>
-                    <a:pt x="6159537" y="575920"/>
-                  </a:lnTo>
-                  <a:lnTo>
-                    <a:pt x="6087914" y="569003"/>
-                  </a:lnTo>
-                  <a:lnTo>
-                    <a:pt x="6016292" y="561967"/>
-                  </a:lnTo>
-                  <a:lnTo>
-                    <a:pt x="5944669" y="554810"/>
-                  </a:lnTo>
-                  <a:lnTo>
-                    <a:pt x="5873047" y="547531"/>
-                  </a:lnTo>
-                  <a:lnTo>
-                    <a:pt x="5801424" y="540126"/>
-                  </a:lnTo>
-                  <a:lnTo>
-                    <a:pt x="5729802" y="532594"/>
-                  </a:lnTo>
-                  <a:lnTo>
-                    <a:pt x="5658179" y="524933"/>
-                  </a:lnTo>
-                  <a:lnTo>
-                    <a:pt x="5586557" y="517140"/>
-                  </a:lnTo>
-                  <a:lnTo>
-                    <a:pt x="5514934" y="509213"/>
-                  </a:lnTo>
-                  <a:lnTo>
-                    <a:pt x="5443311" y="501151"/>
-                  </a:lnTo>
-                  <a:lnTo>
-                    <a:pt x="5371689" y="492949"/>
-                  </a:lnTo>
-                  <a:lnTo>
-                    <a:pt x="5300066" y="484607"/>
-                  </a:lnTo>
-                  <a:lnTo>
-                    <a:pt x="5228444" y="476122"/>
-                  </a:lnTo>
-                  <a:lnTo>
-                    <a:pt x="5156821" y="467491"/>
-                  </a:lnTo>
-                  <a:lnTo>
-                    <a:pt x="5085199" y="458712"/>
-                  </a:lnTo>
-                  <a:lnTo>
-                    <a:pt x="5013576" y="449782"/>
-                  </a:lnTo>
-                  <a:lnTo>
-                    <a:pt x="4941954" y="440698"/>
-                  </a:lnTo>
-                  <a:lnTo>
-                    <a:pt x="4870331" y="431459"/>
-                  </a:lnTo>
-                  <a:lnTo>
-                    <a:pt x="4798709" y="422061"/>
-                  </a:lnTo>
-                  <a:lnTo>
-                    <a:pt x="4727086" y="412501"/>
-                  </a:lnTo>
-                  <a:lnTo>
-                    <a:pt x="4655464" y="402778"/>
-                  </a:lnTo>
-                  <a:lnTo>
-                    <a:pt x="4583841" y="392887"/>
-                  </a:lnTo>
-                  <a:lnTo>
-                    <a:pt x="4512219" y="382827"/>
-                  </a:lnTo>
-                  <a:lnTo>
-                    <a:pt x="4440596" y="372594"/>
-                  </a:lnTo>
-                  <a:lnTo>
-                    <a:pt x="4368974" y="362185"/>
-                  </a:lnTo>
-                  <a:lnTo>
-                    <a:pt x="4297351" y="351597"/>
-                  </a:lnTo>
-                  <a:lnTo>
-                    <a:pt x="4225729" y="340828"/>
-                  </a:lnTo>
-                  <a:lnTo>
-                    <a:pt x="4154106" y="329873"/>
-                  </a:lnTo>
-                  <a:lnTo>
-                    <a:pt x="4082483" y="318731"/>
-                  </a:lnTo>
-                  <a:lnTo>
-                    <a:pt x="4010861" y="307397"/>
-                  </a:lnTo>
-                  <a:lnTo>
-                    <a:pt x="3939238" y="295868"/>
-                  </a:lnTo>
-                  <a:lnTo>
-                    <a:pt x="3867616" y="284142"/>
-                  </a:lnTo>
-                  <a:lnTo>
-                    <a:pt x="3795993" y="272214"/>
-                  </a:lnTo>
-                  <a:lnTo>
-                    <a:pt x="3724371" y="260081"/>
-                  </a:lnTo>
-                  <a:lnTo>
-                    <a:pt x="3652748" y="247740"/>
-                  </a:lnTo>
-                  <a:lnTo>
-                    <a:pt x="3581126" y="235187"/>
-                  </a:lnTo>
-                  <a:lnTo>
-                    <a:pt x="3509503" y="222418"/>
-                  </a:lnTo>
-                  <a:lnTo>
-                    <a:pt x="3437881" y="209431"/>
-                  </a:lnTo>
-                  <a:lnTo>
-                    <a:pt x="3366258" y="196220"/>
-                  </a:lnTo>
-                  <a:lnTo>
-                    <a:pt x="3294636" y="182782"/>
-                  </a:lnTo>
-                  <a:lnTo>
-                    <a:pt x="3223013" y="169113"/>
-                  </a:lnTo>
-                  <a:lnTo>
-                    <a:pt x="3151391" y="155210"/>
-                  </a:lnTo>
-                  <a:lnTo>
-                    <a:pt x="3079768" y="147438"/>
-                  </a:lnTo>
-                  <a:lnTo>
-                    <a:pt x="3008146" y="144276"/>
-                  </a:lnTo>
-                  <a:lnTo>
-                    <a:pt x="2936523" y="141101"/>
-                  </a:lnTo>
-                  <a:lnTo>
-                    <a:pt x="2864901" y="137914"/>
-                  </a:lnTo>
-                  <a:lnTo>
-                    <a:pt x="2793278" y="134716"/>
-                  </a:lnTo>
-                  <a:lnTo>
-                    <a:pt x="2721655" y="131505"/>
-                  </a:lnTo>
-                  <a:lnTo>
-                    <a:pt x="2650033" y="128282"/>
-                  </a:lnTo>
-                  <a:lnTo>
-                    <a:pt x="2578410" y="125046"/>
-                  </a:lnTo>
-                  <a:lnTo>
-                    <a:pt x="2506788" y="121799"/>
-                  </a:lnTo>
-                  <a:lnTo>
-                    <a:pt x="2435165" y="118539"/>
-                  </a:lnTo>
-                  <a:lnTo>
-                    <a:pt x="2363543" y="115266"/>
-                  </a:lnTo>
-                  <a:lnTo>
-                    <a:pt x="2291920" y="111981"/>
-                  </a:lnTo>
-                  <a:lnTo>
-                    <a:pt x="2220298" y="108684"/>
-                  </a:lnTo>
-                  <a:lnTo>
-                    <a:pt x="2148675" y="105374"/>
-                  </a:lnTo>
-                  <a:lnTo>
-                    <a:pt x="2077053" y="102051"/>
-                  </a:lnTo>
-                  <a:lnTo>
-                    <a:pt x="2005430" y="98716"/>
-                  </a:lnTo>
-                  <a:lnTo>
-                    <a:pt x="1933808" y="95368"/>
-                  </a:lnTo>
-                  <a:lnTo>
-                    <a:pt x="1862185" y="92008"/>
-                  </a:lnTo>
-                  <a:lnTo>
-                    <a:pt x="1790563" y="88634"/>
-                  </a:lnTo>
-                  <a:lnTo>
-                    <a:pt x="1718940" y="85248"/>
-                  </a:lnTo>
-                  <a:lnTo>
-                    <a:pt x="1647318" y="81849"/>
-                  </a:lnTo>
-                  <a:lnTo>
-                    <a:pt x="1575695" y="78437"/>
-                  </a:lnTo>
-                  <a:lnTo>
-                    <a:pt x="1504073" y="75012"/>
-                  </a:lnTo>
-                  <a:lnTo>
-                    <a:pt x="1432450" y="71574"/>
-                  </a:lnTo>
-                  <a:lnTo>
-                    <a:pt x="1360827" y="68123"/>
-                  </a:lnTo>
-                  <a:lnTo>
-                    <a:pt x="1289205" y="64659"/>
-                  </a:lnTo>
-                  <a:lnTo>
-                    <a:pt x="1217582" y="61181"/>
-                  </a:lnTo>
-                  <a:lnTo>
-                    <a:pt x="1145960" y="57691"/>
-                  </a:lnTo>
-                  <a:lnTo>
-                    <a:pt x="1074337" y="54187"/>
-                  </a:lnTo>
-                  <a:lnTo>
-                    <a:pt x="1002715" y="50670"/>
-                  </a:lnTo>
-                  <a:lnTo>
-                    <a:pt x="931092" y="47139"/>
-                  </a:lnTo>
-                  <a:lnTo>
-                    <a:pt x="859470" y="43595"/>
-                  </a:lnTo>
-                  <a:lnTo>
-                    <a:pt x="787847" y="40037"/>
-                  </a:lnTo>
-                  <a:lnTo>
-                    <a:pt x="716225" y="36466"/>
-                  </a:lnTo>
-                  <a:lnTo>
-                    <a:pt x="644602" y="32882"/>
-                  </a:lnTo>
-                  <a:lnTo>
-                    <a:pt x="572980" y="29283"/>
-                  </a:lnTo>
-                  <a:lnTo>
-                    <a:pt x="501357" y="25671"/>
-                  </a:lnTo>
-                  <a:lnTo>
-                    <a:pt x="429735" y="22045"/>
-                  </a:lnTo>
-                  <a:lnTo>
-                    <a:pt x="358112" y="18406"/>
-                  </a:lnTo>
-                  <a:lnTo>
-                    <a:pt x="286490" y="14753"/>
-                  </a:lnTo>
-                  <a:lnTo>
-                    <a:pt x="214867" y="11085"/>
-                  </a:lnTo>
-                  <a:lnTo>
-                    <a:pt x="143245" y="7404"/>
-                  </a:lnTo>
-                  <a:lnTo>
-                    <a:pt x="71622" y="3709"/>
-                  </a:lnTo>
-                  <a:lnTo>
-                    <a:pt x="0" y="0"/>
+                    <a:pt x="70344" y="10613"/>
+                  </a:lnTo>
+                  <a:lnTo>
+                    <a:pt x="140688" y="21047"/>
+                  </a:lnTo>
+                  <a:lnTo>
+                    <a:pt x="211033" y="31304"/>
+                  </a:lnTo>
+                  <a:lnTo>
+                    <a:pt x="281377" y="41389"/>
+                  </a:lnTo>
+                  <a:lnTo>
+                    <a:pt x="351722" y="51303"/>
+                  </a:lnTo>
+                  <a:lnTo>
+                    <a:pt x="422066" y="61050"/>
+                  </a:lnTo>
+                  <a:lnTo>
+                    <a:pt x="492411" y="70633"/>
+                  </a:lnTo>
+                  <a:lnTo>
+                    <a:pt x="562755" y="80053"/>
+                  </a:lnTo>
+                  <a:lnTo>
+                    <a:pt x="633100" y="89315"/>
+                  </a:lnTo>
+                  <a:lnTo>
+                    <a:pt x="703444" y="98420"/>
+                  </a:lnTo>
+                  <a:lnTo>
+                    <a:pt x="773789" y="107372"/>
+                  </a:lnTo>
+                  <a:lnTo>
+                    <a:pt x="844133" y="116172"/>
+                  </a:lnTo>
+                  <a:lnTo>
+                    <a:pt x="914478" y="124824"/>
+                  </a:lnTo>
+                  <a:lnTo>
+                    <a:pt x="984822" y="133330"/>
+                  </a:lnTo>
+                  <a:lnTo>
+                    <a:pt x="1055167" y="141692"/>
+                  </a:lnTo>
+                  <a:lnTo>
+                    <a:pt x="1125511" y="149913"/>
+                  </a:lnTo>
+                  <a:lnTo>
+                    <a:pt x="1195856" y="157995"/>
+                  </a:lnTo>
+                  <a:lnTo>
+                    <a:pt x="1266200" y="165941"/>
+                  </a:lnTo>
+                  <a:lnTo>
+                    <a:pt x="1336545" y="173752"/>
+                  </a:lnTo>
+                  <a:lnTo>
+                    <a:pt x="1406889" y="181432"/>
+                  </a:lnTo>
+                  <a:lnTo>
+                    <a:pt x="1477234" y="188982"/>
+                  </a:lnTo>
+                  <a:lnTo>
+                    <a:pt x="1547578" y="196404"/>
+                  </a:lnTo>
+                  <a:lnTo>
+                    <a:pt x="1617923" y="203702"/>
+                  </a:lnTo>
+                  <a:lnTo>
+                    <a:pt x="1688267" y="210876"/>
+                  </a:lnTo>
+                  <a:lnTo>
+                    <a:pt x="1758612" y="217929"/>
+                  </a:lnTo>
+                  <a:lnTo>
+                    <a:pt x="1828956" y="224863"/>
+                  </a:lnTo>
+                  <a:lnTo>
+                    <a:pt x="1899301" y="231679"/>
+                  </a:lnTo>
+                  <a:lnTo>
+                    <a:pt x="1969645" y="238381"/>
+                  </a:lnTo>
+                  <a:lnTo>
+                    <a:pt x="2039990" y="244970"/>
+                  </a:lnTo>
+                  <a:lnTo>
+                    <a:pt x="2110334" y="251447"/>
+                  </a:lnTo>
+                  <a:lnTo>
+                    <a:pt x="2180679" y="257815"/>
+                  </a:lnTo>
+                  <a:lnTo>
+                    <a:pt x="2251023" y="264075"/>
+                  </a:lnTo>
+                  <a:lnTo>
+                    <a:pt x="2321368" y="270230"/>
+                  </a:lnTo>
+                  <a:lnTo>
+                    <a:pt x="2391712" y="276281"/>
+                  </a:lnTo>
+                  <a:lnTo>
+                    <a:pt x="2462057" y="282230"/>
+                  </a:lnTo>
+                  <a:lnTo>
+                    <a:pt x="2532401" y="288078"/>
+                  </a:lnTo>
+                  <a:lnTo>
+                    <a:pt x="2602746" y="293828"/>
+                  </a:lnTo>
+                  <a:lnTo>
+                    <a:pt x="2673090" y="299480"/>
+                  </a:lnTo>
+                  <a:lnTo>
+                    <a:pt x="2743435" y="305037"/>
+                  </a:lnTo>
+                  <a:lnTo>
+                    <a:pt x="2813779" y="310500"/>
+                  </a:lnTo>
+                  <a:lnTo>
+                    <a:pt x="2884124" y="315871"/>
+                  </a:lnTo>
+                  <a:lnTo>
+                    <a:pt x="2954468" y="321152"/>
+                  </a:lnTo>
+                  <a:lnTo>
+                    <a:pt x="3024813" y="326343"/>
+                  </a:lnTo>
+                  <a:lnTo>
+                    <a:pt x="3095157" y="329778"/>
+                  </a:lnTo>
+                  <a:lnTo>
+                    <a:pt x="3165502" y="330911"/>
+                  </a:lnTo>
+                  <a:lnTo>
+                    <a:pt x="3235846" y="332039"/>
+                  </a:lnTo>
+                  <a:lnTo>
+                    <a:pt x="3306191" y="333163"/>
+                  </a:lnTo>
+                  <a:lnTo>
+                    <a:pt x="3376535" y="334283"/>
+                  </a:lnTo>
+                  <a:lnTo>
+                    <a:pt x="3446880" y="335399"/>
+                  </a:lnTo>
+                  <a:lnTo>
+                    <a:pt x="3517224" y="336510"/>
+                  </a:lnTo>
+                  <a:lnTo>
+                    <a:pt x="3587569" y="337617"/>
+                  </a:lnTo>
+                  <a:lnTo>
+                    <a:pt x="3657913" y="338720"/>
+                  </a:lnTo>
+                  <a:lnTo>
+                    <a:pt x="3728257" y="339819"/>
+                  </a:lnTo>
+                  <a:lnTo>
+                    <a:pt x="3798602" y="340914"/>
+                  </a:lnTo>
+                  <a:lnTo>
+                    <a:pt x="3868946" y="342004"/>
+                  </a:lnTo>
+                  <a:lnTo>
+                    <a:pt x="3939291" y="343090"/>
+                  </a:lnTo>
+                  <a:lnTo>
+                    <a:pt x="4009635" y="344172"/>
+                  </a:lnTo>
+                  <a:lnTo>
+                    <a:pt x="4079980" y="345251"/>
+                  </a:lnTo>
+                  <a:lnTo>
+                    <a:pt x="4150324" y="346325"/>
+                  </a:lnTo>
+                  <a:lnTo>
+                    <a:pt x="4220669" y="347394"/>
+                  </a:lnTo>
+                  <a:lnTo>
+                    <a:pt x="4291013" y="348460"/>
+                  </a:lnTo>
+                  <a:lnTo>
+                    <a:pt x="4361358" y="349522"/>
+                  </a:lnTo>
+                  <a:lnTo>
+                    <a:pt x="4431702" y="350580"/>
+                  </a:lnTo>
+                  <a:lnTo>
+                    <a:pt x="4502047" y="351634"/>
+                  </a:lnTo>
+                  <a:lnTo>
+                    <a:pt x="4572391" y="352684"/>
+                  </a:lnTo>
+                  <a:lnTo>
+                    <a:pt x="4642736" y="353729"/>
+                  </a:lnTo>
+                  <a:lnTo>
+                    <a:pt x="4713080" y="354771"/>
+                  </a:lnTo>
+                  <a:lnTo>
+                    <a:pt x="4783425" y="355809"/>
+                  </a:lnTo>
+                  <a:lnTo>
+                    <a:pt x="4853769" y="356843"/>
+                  </a:lnTo>
+                  <a:lnTo>
+                    <a:pt x="4924114" y="357873"/>
+                  </a:lnTo>
+                  <a:lnTo>
+                    <a:pt x="4994458" y="358899"/>
+                  </a:lnTo>
+                  <a:lnTo>
+                    <a:pt x="5064803" y="359922"/>
+                  </a:lnTo>
+                  <a:lnTo>
+                    <a:pt x="5135147" y="360940"/>
+                  </a:lnTo>
+                  <a:lnTo>
+                    <a:pt x="5205492" y="361955"/>
+                  </a:lnTo>
+                  <a:lnTo>
+                    <a:pt x="5275836" y="362965"/>
+                  </a:lnTo>
+                  <a:lnTo>
+                    <a:pt x="5346181" y="363972"/>
+                  </a:lnTo>
+                  <a:lnTo>
+                    <a:pt x="5416525" y="364975"/>
+                  </a:lnTo>
+                  <a:lnTo>
+                    <a:pt x="5486870" y="365974"/>
+                  </a:lnTo>
+                  <a:lnTo>
+                    <a:pt x="5557214" y="366970"/>
+                  </a:lnTo>
+                  <a:lnTo>
+                    <a:pt x="5627559" y="367962"/>
+                  </a:lnTo>
+                  <a:lnTo>
+                    <a:pt x="5697903" y="368949"/>
+                  </a:lnTo>
+                  <a:lnTo>
+                    <a:pt x="5768248" y="369934"/>
+                  </a:lnTo>
+                  <a:lnTo>
+                    <a:pt x="5838592" y="370914"/>
+                  </a:lnTo>
+                  <a:lnTo>
+                    <a:pt x="5908937" y="371891"/>
+                  </a:lnTo>
+                  <a:lnTo>
+                    <a:pt x="5979281" y="372864"/>
+                  </a:lnTo>
+                  <a:lnTo>
+                    <a:pt x="6049626" y="373833"/>
+                  </a:lnTo>
+                  <a:lnTo>
+                    <a:pt x="6119970" y="374799"/>
+                  </a:lnTo>
+                  <a:lnTo>
+                    <a:pt x="6190315" y="375761"/>
+                  </a:lnTo>
+                  <a:lnTo>
+                    <a:pt x="6260659" y="376719"/>
+                  </a:lnTo>
+                  <a:lnTo>
+                    <a:pt x="6331004" y="377674"/>
+                  </a:lnTo>
+                  <a:lnTo>
+                    <a:pt x="6401348" y="378625"/>
+                  </a:lnTo>
+                  <a:lnTo>
+                    <a:pt x="6471693" y="379573"/>
+                  </a:lnTo>
+                  <a:lnTo>
+                    <a:pt x="6542037" y="380517"/>
+                  </a:lnTo>
+                  <a:lnTo>
+                    <a:pt x="6612382" y="381457"/>
+                  </a:lnTo>
+                  <a:lnTo>
+                    <a:pt x="6682726" y="382394"/>
+                  </a:lnTo>
+                  <a:lnTo>
+                    <a:pt x="6753071" y="383327"/>
+                  </a:lnTo>
+                  <a:lnTo>
+                    <a:pt x="6823415" y="384257"/>
+                  </a:lnTo>
+                  <a:lnTo>
+                    <a:pt x="6893760" y="385183"/>
+                  </a:lnTo>
+                  <a:lnTo>
+                    <a:pt x="6964104" y="386105"/>
                   </a:lnTo>
                 </a:path>
               </a:pathLst>
@@ -4326,312 +4036,637 @@
           </p:nvSpPr>
           <p:spPr>
             <a:xfrm>
-              <a:off x="1172049" y="4251534"/>
-              <a:ext cx="7090630" cy="839937"/>
+              <a:off x="1235312" y="3047096"/>
+              <a:ext cx="6964104" cy="236699"/>
             </a:xfrm>
             <a:custGeom>
               <a:avLst/>
               <a:pathLst>
-                <a:path w="7090630" h="839937">
+                <a:path w="6964104" h="236699">
+                  <a:moveTo>
+                    <a:pt x="6964104" y="236699"/>
+                  </a:moveTo>
+                  <a:lnTo>
+                    <a:pt x="6893760" y="234699"/>
+                  </a:lnTo>
+                  <a:lnTo>
+                    <a:pt x="6823415" y="232664"/>
+                  </a:lnTo>
+                  <a:lnTo>
+                    <a:pt x="6753071" y="230594"/>
+                  </a:lnTo>
+                  <a:lnTo>
+                    <a:pt x="6682726" y="228489"/>
+                  </a:lnTo>
+                  <a:lnTo>
+                    <a:pt x="6612382" y="226347"/>
+                  </a:lnTo>
+                  <a:lnTo>
+                    <a:pt x="6542037" y="224169"/>
+                  </a:lnTo>
+                  <a:lnTo>
+                    <a:pt x="6471693" y="221953"/>
+                  </a:lnTo>
+                  <a:lnTo>
+                    <a:pt x="6401348" y="219699"/>
+                  </a:lnTo>
+                  <a:lnTo>
+                    <a:pt x="6331004" y="217406"/>
+                  </a:lnTo>
+                  <a:lnTo>
+                    <a:pt x="6260659" y="215075"/>
+                  </a:lnTo>
+                  <a:lnTo>
+                    <a:pt x="6190315" y="212703"/>
+                  </a:lnTo>
+                  <a:lnTo>
+                    <a:pt x="6119970" y="210290"/>
+                  </a:lnTo>
+                  <a:lnTo>
+                    <a:pt x="6049626" y="207836"/>
+                  </a:lnTo>
+                  <a:lnTo>
+                    <a:pt x="5979281" y="205340"/>
+                  </a:lnTo>
+                  <a:lnTo>
+                    <a:pt x="5908937" y="202800"/>
+                  </a:lnTo>
+                  <a:lnTo>
+                    <a:pt x="5838592" y="200218"/>
+                  </a:lnTo>
+                  <a:lnTo>
+                    <a:pt x="5768248" y="197591"/>
+                  </a:lnTo>
+                  <a:lnTo>
+                    <a:pt x="5697903" y="194918"/>
+                  </a:lnTo>
+                  <a:lnTo>
+                    <a:pt x="5627559" y="192200"/>
+                  </a:lnTo>
+                  <a:lnTo>
+                    <a:pt x="5557214" y="189436"/>
+                  </a:lnTo>
+                  <a:lnTo>
+                    <a:pt x="5486870" y="186623"/>
+                  </a:lnTo>
+                  <a:lnTo>
+                    <a:pt x="5416525" y="183763"/>
+                  </a:lnTo>
+                  <a:lnTo>
+                    <a:pt x="5346181" y="180853"/>
+                  </a:lnTo>
+                  <a:lnTo>
+                    <a:pt x="5275836" y="177893"/>
+                  </a:lnTo>
+                  <a:lnTo>
+                    <a:pt x="5205492" y="174883"/>
+                  </a:lnTo>
+                  <a:lnTo>
+                    <a:pt x="5135147" y="171821"/>
+                  </a:lnTo>
+                  <a:lnTo>
+                    <a:pt x="5064803" y="168706"/>
+                  </a:lnTo>
+                  <a:lnTo>
+                    <a:pt x="4994458" y="165538"/>
+                  </a:lnTo>
+                  <a:lnTo>
+                    <a:pt x="4924114" y="162315"/>
+                  </a:lnTo>
+                  <a:lnTo>
+                    <a:pt x="4853769" y="159037"/>
+                  </a:lnTo>
+                  <a:lnTo>
+                    <a:pt x="4783425" y="155703"/>
+                  </a:lnTo>
+                  <a:lnTo>
+                    <a:pt x="4713080" y="152311"/>
+                  </a:lnTo>
+                  <a:lnTo>
+                    <a:pt x="4642736" y="148862"/>
+                  </a:lnTo>
+                  <a:lnTo>
+                    <a:pt x="4572391" y="145353"/>
+                  </a:lnTo>
+                  <a:lnTo>
+                    <a:pt x="4502047" y="141783"/>
+                  </a:lnTo>
+                  <a:lnTo>
+                    <a:pt x="4431702" y="138153"/>
+                  </a:lnTo>
+                  <a:lnTo>
+                    <a:pt x="4361358" y="134460"/>
+                  </a:lnTo>
+                  <a:lnTo>
+                    <a:pt x="4291013" y="130704"/>
+                  </a:lnTo>
+                  <a:lnTo>
+                    <a:pt x="4220669" y="126883"/>
+                  </a:lnTo>
+                  <a:lnTo>
+                    <a:pt x="4150324" y="122996"/>
+                  </a:lnTo>
+                  <a:lnTo>
+                    <a:pt x="4079980" y="119043"/>
+                  </a:lnTo>
+                  <a:lnTo>
+                    <a:pt x="4009635" y="115022"/>
+                  </a:lnTo>
+                  <a:lnTo>
+                    <a:pt x="3939291" y="110932"/>
+                  </a:lnTo>
+                  <a:lnTo>
+                    <a:pt x="3868946" y="106772"/>
+                  </a:lnTo>
+                  <a:lnTo>
+                    <a:pt x="3798602" y="102540"/>
+                  </a:lnTo>
+                  <a:lnTo>
+                    <a:pt x="3728257" y="98235"/>
+                  </a:lnTo>
+                  <a:lnTo>
+                    <a:pt x="3657913" y="93857"/>
+                  </a:lnTo>
+                  <a:lnTo>
+                    <a:pt x="3587569" y="89403"/>
+                  </a:lnTo>
+                  <a:lnTo>
+                    <a:pt x="3517224" y="84873"/>
+                  </a:lnTo>
+                  <a:lnTo>
+                    <a:pt x="3446880" y="80265"/>
+                  </a:lnTo>
+                  <a:lnTo>
+                    <a:pt x="3376535" y="75578"/>
+                  </a:lnTo>
+                  <a:lnTo>
+                    <a:pt x="3306191" y="70811"/>
+                  </a:lnTo>
+                  <a:lnTo>
+                    <a:pt x="3235846" y="65961"/>
+                  </a:lnTo>
+                  <a:lnTo>
+                    <a:pt x="3165502" y="61029"/>
+                  </a:lnTo>
+                  <a:lnTo>
+                    <a:pt x="3095157" y="56011"/>
+                  </a:lnTo>
+                  <a:lnTo>
+                    <a:pt x="3024813" y="53207"/>
+                  </a:lnTo>
+                  <a:lnTo>
+                    <a:pt x="2954468" y="52065"/>
+                  </a:lnTo>
+                  <a:lnTo>
+                    <a:pt x="2884124" y="50920"/>
+                  </a:lnTo>
+                  <a:lnTo>
+                    <a:pt x="2813779" y="49770"/>
+                  </a:lnTo>
+                  <a:lnTo>
+                    <a:pt x="2743435" y="48615"/>
+                  </a:lnTo>
+                  <a:lnTo>
+                    <a:pt x="2673090" y="47457"/>
+                  </a:lnTo>
+                  <a:lnTo>
+                    <a:pt x="2602746" y="46294"/>
+                  </a:lnTo>
+                  <a:lnTo>
+                    <a:pt x="2532401" y="45126"/>
+                  </a:lnTo>
+                  <a:lnTo>
+                    <a:pt x="2462057" y="43954"/>
+                  </a:lnTo>
+                  <a:lnTo>
+                    <a:pt x="2391712" y="42777"/>
+                  </a:lnTo>
+                  <a:lnTo>
+                    <a:pt x="2321368" y="41597"/>
+                  </a:lnTo>
+                  <a:lnTo>
+                    <a:pt x="2251023" y="40411"/>
+                  </a:lnTo>
+                  <a:lnTo>
+                    <a:pt x="2180679" y="39221"/>
+                  </a:lnTo>
+                  <a:lnTo>
+                    <a:pt x="2110334" y="38027"/>
+                  </a:lnTo>
+                  <a:lnTo>
+                    <a:pt x="2039990" y="36828"/>
+                  </a:lnTo>
+                  <a:lnTo>
+                    <a:pt x="1969645" y="35624"/>
+                  </a:lnTo>
+                  <a:lnTo>
+                    <a:pt x="1899301" y="34416"/>
+                  </a:lnTo>
+                  <a:lnTo>
+                    <a:pt x="1828956" y="33203"/>
+                  </a:lnTo>
+                  <a:lnTo>
+                    <a:pt x="1758612" y="31986"/>
+                  </a:lnTo>
+                  <a:lnTo>
+                    <a:pt x="1688267" y="30764"/>
+                  </a:lnTo>
+                  <a:lnTo>
+                    <a:pt x="1617923" y="29537"/>
+                  </a:lnTo>
+                  <a:lnTo>
+                    <a:pt x="1547578" y="28306"/>
+                  </a:lnTo>
+                  <a:lnTo>
+                    <a:pt x="1477234" y="27070"/>
+                  </a:lnTo>
+                  <a:lnTo>
+                    <a:pt x="1406889" y="25829"/>
+                  </a:lnTo>
+                  <a:lnTo>
+                    <a:pt x="1336545" y="24584"/>
+                  </a:lnTo>
+                  <a:lnTo>
+                    <a:pt x="1266200" y="23334"/>
+                  </a:lnTo>
+                  <a:lnTo>
+                    <a:pt x="1195856" y="22079"/>
+                  </a:lnTo>
+                  <a:lnTo>
+                    <a:pt x="1125511" y="20819"/>
+                  </a:lnTo>
+                  <a:lnTo>
+                    <a:pt x="1055167" y="19554"/>
+                  </a:lnTo>
+                  <a:lnTo>
+                    <a:pt x="984822" y="18285"/>
+                  </a:lnTo>
+                  <a:lnTo>
+                    <a:pt x="914478" y="17011"/>
+                  </a:lnTo>
+                  <a:lnTo>
+                    <a:pt x="844133" y="15732"/>
+                  </a:lnTo>
+                  <a:lnTo>
+                    <a:pt x="773789" y="14448"/>
+                  </a:lnTo>
+                  <a:lnTo>
+                    <a:pt x="703444" y="13159"/>
+                  </a:lnTo>
+                  <a:lnTo>
+                    <a:pt x="633100" y="11866"/>
+                  </a:lnTo>
+                  <a:lnTo>
+                    <a:pt x="562755" y="10567"/>
+                  </a:lnTo>
+                  <a:lnTo>
+                    <a:pt x="492411" y="9264"/>
+                  </a:lnTo>
+                  <a:lnTo>
+                    <a:pt x="422066" y="7955"/>
+                  </a:lnTo>
+                  <a:lnTo>
+                    <a:pt x="351722" y="6642"/>
+                  </a:lnTo>
+                  <a:lnTo>
+                    <a:pt x="281377" y="5324"/>
+                  </a:lnTo>
+                  <a:lnTo>
+                    <a:pt x="211033" y="4000"/>
+                  </a:lnTo>
+                  <a:lnTo>
+                    <a:pt x="140688" y="2672"/>
+                  </a:lnTo>
+                  <a:lnTo>
+                    <a:pt x="70344" y="1338"/>
+                  </a:lnTo>
+                  <a:lnTo>
+                    <a:pt x="0" y="0"/>
+                  </a:lnTo>
+                </a:path>
+              </a:pathLst>
+            </a:custGeom>
+          </p:spPr>
+          <p:txBody>
+            <a:bodyPr/>
+            <a:lstStyle/>
+            <a:p/>
+          </p:txBody>
+        </p:sp>
+        <p:sp>
+          <p:nvSpPr>
+            <p:cNvPr id="26" name="pl26"/>
+            <p:cNvSpPr/>
+            <p:nvPr/>
+          </p:nvSpPr>
+          <p:spPr>
+            <a:xfrm>
+              <a:off x="1235312" y="2929092"/>
+              <a:ext cx="6964104" cy="303113"/>
+            </a:xfrm>
+            <a:custGeom>
+              <a:avLst/>
+              <a:pathLst>
+                <a:path w="6964104" h="303113">
                   <a:moveTo>
                     <a:pt x="0" y="0"/>
                   </a:moveTo>
                   <a:lnTo>
-                    <a:pt x="71622" y="13524"/>
-                  </a:lnTo>
-                  <a:lnTo>
-                    <a:pt x="143245" y="26909"/>
-                  </a:lnTo>
-                  <a:lnTo>
-                    <a:pt x="214867" y="40155"/>
-                  </a:lnTo>
-                  <a:lnTo>
-                    <a:pt x="286490" y="53264"/>
-                  </a:lnTo>
-                  <a:lnTo>
-                    <a:pt x="358112" y="66237"/>
-                  </a:lnTo>
-                  <a:lnTo>
-                    <a:pt x="429735" y="79075"/>
-                  </a:lnTo>
-                  <a:lnTo>
-                    <a:pt x="501357" y="91781"/>
-                  </a:lnTo>
-                  <a:lnTo>
-                    <a:pt x="572980" y="104355"/>
-                  </a:lnTo>
-                  <a:lnTo>
-                    <a:pt x="644602" y="116799"/>
-                  </a:lnTo>
-                  <a:lnTo>
-                    <a:pt x="716225" y="129113"/>
-                  </a:lnTo>
-                  <a:lnTo>
-                    <a:pt x="787847" y="141301"/>
-                  </a:lnTo>
-                  <a:lnTo>
-                    <a:pt x="859470" y="153362"/>
-                  </a:lnTo>
-                  <a:lnTo>
-                    <a:pt x="931092" y="165298"/>
-                  </a:lnTo>
-                  <a:lnTo>
-                    <a:pt x="1002715" y="177110"/>
-                  </a:lnTo>
-                  <a:lnTo>
-                    <a:pt x="1074337" y="188801"/>
-                  </a:lnTo>
-                  <a:lnTo>
-                    <a:pt x="1145960" y="200370"/>
-                  </a:lnTo>
-                  <a:lnTo>
-                    <a:pt x="1217582" y="211819"/>
-                  </a:lnTo>
-                  <a:lnTo>
-                    <a:pt x="1289205" y="223150"/>
-                  </a:lnTo>
-                  <a:lnTo>
-                    <a:pt x="1360827" y="234363"/>
-                  </a:lnTo>
-                  <a:lnTo>
-                    <a:pt x="1432450" y="245460"/>
-                  </a:lnTo>
-                  <a:lnTo>
-                    <a:pt x="1504073" y="256442"/>
-                  </a:lnTo>
-                  <a:lnTo>
-                    <a:pt x="1575695" y="267311"/>
-                  </a:lnTo>
-                  <a:lnTo>
-                    <a:pt x="1647318" y="278067"/>
-                  </a:lnTo>
-                  <a:lnTo>
-                    <a:pt x="1718940" y="288711"/>
-                  </a:lnTo>
-                  <a:lnTo>
-                    <a:pt x="1790563" y="299245"/>
-                  </a:lnTo>
-                  <a:lnTo>
-                    <a:pt x="1862185" y="309670"/>
-                  </a:lnTo>
-                  <a:lnTo>
-                    <a:pt x="1933808" y="319987"/>
-                  </a:lnTo>
-                  <a:lnTo>
-                    <a:pt x="2005430" y="330198"/>
-                  </a:lnTo>
-                  <a:lnTo>
-                    <a:pt x="2077053" y="340302"/>
-                  </a:lnTo>
-                  <a:lnTo>
-                    <a:pt x="2148675" y="350302"/>
-                  </a:lnTo>
-                  <a:lnTo>
-                    <a:pt x="2220298" y="360198"/>
-                  </a:lnTo>
-                  <a:lnTo>
-                    <a:pt x="2291920" y="369992"/>
-                  </a:lnTo>
-                  <a:lnTo>
-                    <a:pt x="2363543" y="379684"/>
-                  </a:lnTo>
-                  <a:lnTo>
-                    <a:pt x="2435165" y="389276"/>
-                  </a:lnTo>
-                  <a:lnTo>
-                    <a:pt x="2506788" y="398769"/>
-                  </a:lnTo>
-                  <a:lnTo>
-                    <a:pt x="2578410" y="408163"/>
-                  </a:lnTo>
-                  <a:lnTo>
-                    <a:pt x="2650033" y="417460"/>
-                  </a:lnTo>
-                  <a:lnTo>
-                    <a:pt x="2721655" y="426660"/>
-                  </a:lnTo>
-                  <a:lnTo>
-                    <a:pt x="2793278" y="435766"/>
-                  </a:lnTo>
-                  <a:lnTo>
-                    <a:pt x="2864901" y="444777"/>
-                  </a:lnTo>
-                  <a:lnTo>
-                    <a:pt x="2936523" y="453694"/>
-                  </a:lnTo>
-                  <a:lnTo>
-                    <a:pt x="3008146" y="462520"/>
-                  </a:lnTo>
-                  <a:lnTo>
-                    <a:pt x="3079768" y="471253"/>
-                  </a:lnTo>
-                  <a:lnTo>
-                    <a:pt x="3151391" y="479897"/>
-                  </a:lnTo>
-                  <a:lnTo>
-                    <a:pt x="3223013" y="488451"/>
-                  </a:lnTo>
-                  <a:lnTo>
-                    <a:pt x="3294636" y="496916"/>
-                  </a:lnTo>
-                  <a:lnTo>
-                    <a:pt x="3366258" y="505294"/>
-                  </a:lnTo>
-                  <a:lnTo>
-                    <a:pt x="3437881" y="513584"/>
-                  </a:lnTo>
-                  <a:lnTo>
-                    <a:pt x="3509503" y="521789"/>
-                  </a:lnTo>
-                  <a:lnTo>
-                    <a:pt x="3581126" y="529909"/>
-                  </a:lnTo>
-                  <a:lnTo>
-                    <a:pt x="3652748" y="537945"/>
-                  </a:lnTo>
-                  <a:lnTo>
-                    <a:pt x="3724371" y="545898"/>
-                  </a:lnTo>
-                  <a:lnTo>
-                    <a:pt x="3795993" y="553768"/>
-                  </a:lnTo>
-                  <a:lnTo>
-                    <a:pt x="3867616" y="561557"/>
-                  </a:lnTo>
-                  <a:lnTo>
-                    <a:pt x="3939238" y="569265"/>
-                  </a:lnTo>
-                  <a:lnTo>
-                    <a:pt x="4010861" y="576893"/>
-                  </a:lnTo>
-                  <a:lnTo>
-                    <a:pt x="4082483" y="584442"/>
-                  </a:lnTo>
-                  <a:lnTo>
-                    <a:pt x="4154106" y="591913"/>
-                  </a:lnTo>
-                  <a:lnTo>
-                    <a:pt x="4225729" y="599307"/>
-                  </a:lnTo>
-                  <a:lnTo>
-                    <a:pt x="4297351" y="606624"/>
-                  </a:lnTo>
-                  <a:lnTo>
-                    <a:pt x="4368974" y="613865"/>
-                  </a:lnTo>
-                  <a:lnTo>
-                    <a:pt x="4440596" y="621031"/>
-                  </a:lnTo>
-                  <a:lnTo>
-                    <a:pt x="4512219" y="628123"/>
-                  </a:lnTo>
-                  <a:lnTo>
-                    <a:pt x="4583841" y="635142"/>
-                  </a:lnTo>
-                  <a:lnTo>
-                    <a:pt x="4655464" y="642088"/>
-                  </a:lnTo>
-                  <a:lnTo>
-                    <a:pt x="4727086" y="648962"/>
-                  </a:lnTo>
-                  <a:lnTo>
-                    <a:pt x="4798709" y="655764"/>
-                  </a:lnTo>
-                  <a:lnTo>
-                    <a:pt x="4870331" y="662497"/>
-                  </a:lnTo>
-                  <a:lnTo>
-                    <a:pt x="4941954" y="669159"/>
-                  </a:lnTo>
-                  <a:lnTo>
-                    <a:pt x="5013576" y="675753"/>
-                  </a:lnTo>
-                  <a:lnTo>
-                    <a:pt x="5085199" y="682278"/>
-                  </a:lnTo>
-                  <a:lnTo>
-                    <a:pt x="5156821" y="688735"/>
-                  </a:lnTo>
-                  <a:lnTo>
-                    <a:pt x="5228444" y="695126"/>
-                  </a:lnTo>
-                  <a:lnTo>
-                    <a:pt x="5300066" y="701451"/>
-                  </a:lnTo>
-                  <a:lnTo>
-                    <a:pt x="5371689" y="707710"/>
-                  </a:lnTo>
-                  <a:lnTo>
-                    <a:pt x="5443311" y="713904"/>
-                  </a:lnTo>
-                  <a:lnTo>
-                    <a:pt x="5514934" y="720034"/>
-                  </a:lnTo>
-                  <a:lnTo>
-                    <a:pt x="5586557" y="726100"/>
-                  </a:lnTo>
-                  <a:lnTo>
-                    <a:pt x="5658179" y="732104"/>
-                  </a:lnTo>
-                  <a:lnTo>
-                    <a:pt x="5729802" y="738046"/>
-                  </a:lnTo>
-                  <a:lnTo>
-                    <a:pt x="5801424" y="743925"/>
-                  </a:lnTo>
-                  <a:lnTo>
-                    <a:pt x="5873047" y="749745"/>
-                  </a:lnTo>
-                  <a:lnTo>
-                    <a:pt x="5944669" y="755503"/>
-                  </a:lnTo>
-                  <a:lnTo>
-                    <a:pt x="6016292" y="761202"/>
-                  </a:lnTo>
-                  <a:lnTo>
-                    <a:pt x="6087914" y="766843"/>
-                  </a:lnTo>
-                  <a:lnTo>
-                    <a:pt x="6159537" y="772424"/>
-                  </a:lnTo>
-                  <a:lnTo>
-                    <a:pt x="6231159" y="777948"/>
-                  </a:lnTo>
-                  <a:lnTo>
-                    <a:pt x="6302782" y="783415"/>
-                  </a:lnTo>
-                  <a:lnTo>
-                    <a:pt x="6374404" y="788825"/>
-                  </a:lnTo>
-                  <a:lnTo>
-                    <a:pt x="6446027" y="794179"/>
-                  </a:lnTo>
-                  <a:lnTo>
-                    <a:pt x="6517649" y="799477"/>
-                  </a:lnTo>
-                  <a:lnTo>
-                    <a:pt x="6589272" y="804721"/>
-                  </a:lnTo>
-                  <a:lnTo>
-                    <a:pt x="6660894" y="809910"/>
-                  </a:lnTo>
-                  <a:lnTo>
-                    <a:pt x="6732517" y="815046"/>
-                  </a:lnTo>
-                  <a:lnTo>
-                    <a:pt x="6804139" y="820128"/>
-                  </a:lnTo>
-                  <a:lnTo>
-                    <a:pt x="6875762" y="825158"/>
-                  </a:lnTo>
-                  <a:lnTo>
-                    <a:pt x="6947385" y="830136"/>
-                  </a:lnTo>
-                  <a:lnTo>
-                    <a:pt x="7019007" y="835062"/>
-                  </a:lnTo>
-                  <a:lnTo>
-                    <a:pt x="7090630" y="839937"/>
+                    <a:pt x="70344" y="4880"/>
+                  </a:lnTo>
+                  <a:lnTo>
+                    <a:pt x="140688" y="9710"/>
+                  </a:lnTo>
+                  <a:lnTo>
+                    <a:pt x="211033" y="14491"/>
+                  </a:lnTo>
+                  <a:lnTo>
+                    <a:pt x="281377" y="19221"/>
+                  </a:lnTo>
+                  <a:lnTo>
+                    <a:pt x="351722" y="23903"/>
+                  </a:lnTo>
+                  <a:lnTo>
+                    <a:pt x="422066" y="28536"/>
+                  </a:lnTo>
+                  <a:lnTo>
+                    <a:pt x="492411" y="33121"/>
+                  </a:lnTo>
+                  <a:lnTo>
+                    <a:pt x="562755" y="37659"/>
+                  </a:lnTo>
+                  <a:lnTo>
+                    <a:pt x="633100" y="42150"/>
+                  </a:lnTo>
+                  <a:lnTo>
+                    <a:pt x="703444" y="46594"/>
+                  </a:lnTo>
+                  <a:lnTo>
+                    <a:pt x="773789" y="50992"/>
+                  </a:lnTo>
+                  <a:lnTo>
+                    <a:pt x="844133" y="55344"/>
+                  </a:lnTo>
+                  <a:lnTo>
+                    <a:pt x="914478" y="59652"/>
+                  </a:lnTo>
+                  <a:lnTo>
+                    <a:pt x="984822" y="63915"/>
+                  </a:lnTo>
+                  <a:lnTo>
+                    <a:pt x="1055167" y="68133"/>
+                  </a:lnTo>
+                  <a:lnTo>
+                    <a:pt x="1125511" y="72308"/>
+                  </a:lnTo>
+                  <a:lnTo>
+                    <a:pt x="1195856" y="76440"/>
+                  </a:lnTo>
+                  <a:lnTo>
+                    <a:pt x="1266200" y="80529"/>
+                  </a:lnTo>
+                  <a:lnTo>
+                    <a:pt x="1336545" y="84576"/>
+                  </a:lnTo>
+                  <a:lnTo>
+                    <a:pt x="1406889" y="88580"/>
+                  </a:lnTo>
+                  <a:lnTo>
+                    <a:pt x="1477234" y="92544"/>
+                  </a:lnTo>
+                  <a:lnTo>
+                    <a:pt x="1547578" y="96466"/>
+                  </a:lnTo>
+                  <a:lnTo>
+                    <a:pt x="1617923" y="100347"/>
+                  </a:lnTo>
+                  <a:lnTo>
+                    <a:pt x="1688267" y="104189"/>
+                  </a:lnTo>
+                  <a:lnTo>
+                    <a:pt x="1758612" y="107990"/>
+                  </a:lnTo>
+                  <a:lnTo>
+                    <a:pt x="1828956" y="111752"/>
+                  </a:lnTo>
+                  <a:lnTo>
+                    <a:pt x="1899301" y="115476"/>
+                  </a:lnTo>
+                  <a:lnTo>
+                    <a:pt x="1969645" y="119160"/>
+                  </a:lnTo>
+                  <a:lnTo>
+                    <a:pt x="2039990" y="122807"/>
+                  </a:lnTo>
+                  <a:lnTo>
+                    <a:pt x="2110334" y="126415"/>
+                  </a:lnTo>
+                  <a:lnTo>
+                    <a:pt x="2180679" y="129987"/>
+                  </a:lnTo>
+                  <a:lnTo>
+                    <a:pt x="2251023" y="133521"/>
+                  </a:lnTo>
+                  <a:lnTo>
+                    <a:pt x="2321368" y="137019"/>
+                  </a:lnTo>
+                  <a:lnTo>
+                    <a:pt x="2391712" y="140480"/>
+                  </a:lnTo>
+                  <a:lnTo>
+                    <a:pt x="2462057" y="143906"/>
+                  </a:lnTo>
+                  <a:lnTo>
+                    <a:pt x="2532401" y="147296"/>
+                  </a:lnTo>
+                  <a:lnTo>
+                    <a:pt x="2602746" y="150651"/>
+                  </a:lnTo>
+                  <a:lnTo>
+                    <a:pt x="2673090" y="153971"/>
+                  </a:lnTo>
+                  <a:lnTo>
+                    <a:pt x="2743435" y="157257"/>
+                  </a:lnTo>
+                  <a:lnTo>
+                    <a:pt x="2813779" y="160509"/>
+                  </a:lnTo>
+                  <a:lnTo>
+                    <a:pt x="2884124" y="163727"/>
+                  </a:lnTo>
+                  <a:lnTo>
+                    <a:pt x="2954468" y="166912"/>
+                  </a:lnTo>
+                  <a:lnTo>
+                    <a:pt x="3024813" y="170064"/>
+                  </a:lnTo>
+                  <a:lnTo>
+                    <a:pt x="3095157" y="173183"/>
+                  </a:lnTo>
+                  <a:lnTo>
+                    <a:pt x="3165502" y="176270"/>
+                  </a:lnTo>
+                  <a:lnTo>
+                    <a:pt x="3235846" y="179325"/>
+                  </a:lnTo>
+                  <a:lnTo>
+                    <a:pt x="3306191" y="182348"/>
+                  </a:lnTo>
+                  <a:lnTo>
+                    <a:pt x="3376535" y="185340"/>
+                  </a:lnTo>
+                  <a:lnTo>
+                    <a:pt x="3446880" y="188301"/>
+                  </a:lnTo>
+                  <a:lnTo>
+                    <a:pt x="3517224" y="191232"/>
+                  </a:lnTo>
+                  <a:lnTo>
+                    <a:pt x="3587569" y="194131"/>
+                  </a:lnTo>
+                  <a:lnTo>
+                    <a:pt x="3657913" y="197001"/>
+                  </a:lnTo>
+                  <a:lnTo>
+                    <a:pt x="3728257" y="199842"/>
+                  </a:lnTo>
+                  <a:lnTo>
+                    <a:pt x="3798602" y="202652"/>
+                  </a:lnTo>
+                  <a:lnTo>
+                    <a:pt x="3868946" y="205434"/>
+                  </a:lnTo>
+                  <a:lnTo>
+                    <a:pt x="3939291" y="208187"/>
+                  </a:lnTo>
+                  <a:lnTo>
+                    <a:pt x="4009635" y="210911"/>
+                  </a:lnTo>
+                  <a:lnTo>
+                    <a:pt x="4079980" y="213607"/>
+                  </a:lnTo>
+                  <a:lnTo>
+                    <a:pt x="4150324" y="216275"/>
+                  </a:lnTo>
+                  <a:lnTo>
+                    <a:pt x="4220669" y="218916"/>
+                  </a:lnTo>
+                  <a:lnTo>
+                    <a:pt x="4291013" y="221529"/>
+                  </a:lnTo>
+                  <a:lnTo>
+                    <a:pt x="4361358" y="224115"/>
+                  </a:lnTo>
+                  <a:lnTo>
+                    <a:pt x="4431702" y="226675"/>
+                  </a:lnTo>
+                  <a:lnTo>
+                    <a:pt x="4502047" y="229207"/>
+                  </a:lnTo>
+                  <a:lnTo>
+                    <a:pt x="4572391" y="231714"/>
+                  </a:lnTo>
+                  <a:lnTo>
+                    <a:pt x="4642736" y="234195"/>
+                  </a:lnTo>
+                  <a:lnTo>
+                    <a:pt x="4713080" y="236650"/>
+                  </a:lnTo>
+                  <a:lnTo>
+                    <a:pt x="4783425" y="239079"/>
+                  </a:lnTo>
+                  <a:lnTo>
+                    <a:pt x="4853769" y="241483"/>
+                  </a:lnTo>
+                  <a:lnTo>
+                    <a:pt x="4924114" y="243863"/>
+                  </a:lnTo>
+                  <a:lnTo>
+                    <a:pt x="4994458" y="246218"/>
+                  </a:lnTo>
+                  <a:lnTo>
+                    <a:pt x="5064803" y="248548"/>
+                  </a:lnTo>
+                  <a:lnTo>
+                    <a:pt x="5135147" y="250854"/>
+                  </a:lnTo>
+                  <a:lnTo>
+                    <a:pt x="5205492" y="253137"/>
+                  </a:lnTo>
+                  <a:lnTo>
+                    <a:pt x="5275836" y="255395"/>
+                  </a:lnTo>
+                  <a:lnTo>
+                    <a:pt x="5346181" y="257631"/>
+                  </a:lnTo>
+                  <a:lnTo>
+                    <a:pt x="5416525" y="259843"/>
+                  </a:lnTo>
+                  <a:lnTo>
+                    <a:pt x="5486870" y="262032"/>
+                  </a:lnTo>
+                  <a:lnTo>
+                    <a:pt x="5557214" y="264199"/>
+                  </a:lnTo>
+                  <a:lnTo>
+                    <a:pt x="5627559" y="266343"/>
+                  </a:lnTo>
+                  <a:lnTo>
+                    <a:pt x="5697903" y="268465"/>
+                  </a:lnTo>
+                  <a:lnTo>
+                    <a:pt x="5768248" y="270565"/>
+                  </a:lnTo>
+                  <a:lnTo>
+                    <a:pt x="5838592" y="272643"/>
+                  </a:lnTo>
+                  <a:lnTo>
+                    <a:pt x="5908937" y="274700"/>
+                  </a:lnTo>
+                  <a:lnTo>
+                    <a:pt x="5979281" y="276735"/>
+                  </a:lnTo>
+                  <a:lnTo>
+                    <a:pt x="6049626" y="278749"/>
+                  </a:lnTo>
+                  <a:lnTo>
+                    <a:pt x="6119970" y="280743"/>
+                  </a:lnTo>
+                  <a:lnTo>
+                    <a:pt x="6190315" y="282716"/>
+                  </a:lnTo>
+                  <a:lnTo>
+                    <a:pt x="6260659" y="284668"/>
+                  </a:lnTo>
+                  <a:lnTo>
+                    <a:pt x="6331004" y="286600"/>
+                  </a:lnTo>
+                  <a:lnTo>
+                    <a:pt x="6401348" y="288512"/>
+                  </a:lnTo>
+                  <a:lnTo>
+                    <a:pt x="6471693" y="290405"/>
+                  </a:lnTo>
+                  <a:lnTo>
+                    <a:pt x="6542037" y="292277"/>
+                  </a:lnTo>
+                  <a:lnTo>
+                    <a:pt x="6612382" y="294131"/>
+                  </a:lnTo>
+                  <a:lnTo>
+                    <a:pt x="6682726" y="295965"/>
+                  </a:lnTo>
+                  <a:lnTo>
+                    <a:pt x="6753071" y="297780"/>
+                  </a:lnTo>
+                  <a:lnTo>
+                    <a:pt x="6823415" y="299576"/>
+                  </a:lnTo>
+                  <a:lnTo>
+                    <a:pt x="6893760" y="301354"/>
+                  </a:lnTo>
+                  <a:lnTo>
+                    <a:pt x="6964104" y="303113"/>
                   </a:lnTo>
                 </a:path>
               </a:pathLst>
@@ -4654,27 +4689,27 @@
         </p:sp>
         <p:sp>
           <p:nvSpPr>
-            <p:cNvPr id="26" name="pl26"/>
+            <p:cNvPr id="27" name="pl27"/>
             <p:cNvSpPr/>
             <p:nvPr/>
           </p:nvSpPr>
           <p:spPr>
             <a:xfrm>
-              <a:off x="817517" y="4727786"/>
-              <a:ext cx="7799693" cy="0"/>
+              <a:off x="887106" y="3100960"/>
+              <a:ext cx="7660515" cy="0"/>
             </a:xfrm>
             <a:custGeom>
               <a:avLst/>
               <a:pathLst>
-                <a:path w="7799693" h="0">
+                <a:path w="7660515" h="0">
                   <a:moveTo>
                     <a:pt x="0" y="0"/>
                   </a:moveTo>
                   <a:lnTo>
-                    <a:pt x="7799693" y="0"/>
-                  </a:lnTo>
-                  <a:lnTo>
-                    <a:pt x="7799693" y="0"/>
+                    <a:pt x="7660515" y="0"/>
+                  </a:lnTo>
+                  <a:lnTo>
+                    <a:pt x="7660515" y="0"/>
                   </a:lnTo>
                 </a:path>
               </a:pathLst>
@@ -4697,21 +4732,21 @@
         </p:sp>
         <p:sp>
           <p:nvSpPr>
-            <p:cNvPr id="27" name="pl27"/>
+            <p:cNvPr id="28" name="pl28"/>
             <p:cNvSpPr/>
             <p:nvPr/>
           </p:nvSpPr>
           <p:spPr>
             <a:xfrm>
-              <a:off x="4293144" y="2073503"/>
-              <a:ext cx="0" cy="3649639"/>
+              <a:off x="4300713" y="2143092"/>
+              <a:ext cx="0" cy="1317069"/>
             </a:xfrm>
             <a:custGeom>
               <a:avLst/>
               <a:pathLst>
-                <a:path w="0" h="3649639">
+                <a:path w="0" h="1317069">
                   <a:moveTo>
-                    <a:pt x="0" y="3649639"/>
+                    <a:pt x="0" y="1317069"/>
                   </a:moveTo>
                   <a:lnTo>
                     <a:pt x="0" y="0"/>
@@ -4740,21 +4775,21 @@
         </p:sp>
         <p:sp>
           <p:nvSpPr>
-            <p:cNvPr id="28" name="pl28"/>
+            <p:cNvPr id="29" name="pl29"/>
             <p:cNvSpPr/>
             <p:nvPr/>
           </p:nvSpPr>
           <p:spPr>
             <a:xfrm>
-              <a:off x="3074393" y="2073503"/>
-              <a:ext cx="0" cy="3649639"/>
+              <a:off x="3103710" y="2143092"/>
+              <a:ext cx="0" cy="1317069"/>
             </a:xfrm>
             <a:custGeom>
               <a:avLst/>
               <a:pathLst>
-                <a:path w="0" h="3649639">
+                <a:path w="0" h="1317069">
                   <a:moveTo>
-                    <a:pt x="0" y="3649639"/>
+                    <a:pt x="0" y="1317069"/>
                   </a:moveTo>
                   <a:lnTo>
                     <a:pt x="0" y="0"/>
@@ -4783,21 +4818,21 @@
         </p:sp>
         <p:sp>
           <p:nvSpPr>
-            <p:cNvPr id="29" name="pl29"/>
+            <p:cNvPr id="30" name="pl30"/>
             <p:cNvSpPr/>
             <p:nvPr/>
           </p:nvSpPr>
           <p:spPr>
             <a:xfrm>
-              <a:off x="5518580" y="2073503"/>
-              <a:ext cx="0" cy="3649639"/>
+              <a:off x="5504283" y="2143092"/>
+              <a:ext cx="0" cy="1317069"/>
             </a:xfrm>
             <a:custGeom>
               <a:avLst/>
               <a:pathLst>
-                <a:path w="0" h="3649639">
+                <a:path w="0" h="1317069">
                   <a:moveTo>
-                    <a:pt x="0" y="3649639"/>
+                    <a:pt x="0" y="1317069"/>
                   </a:moveTo>
                   <a:lnTo>
                     <a:pt x="0" y="0"/>
@@ -4826,13 +4861,13 @@
         </p:sp>
         <p:sp>
           <p:nvSpPr>
-            <p:cNvPr id="30" name="tx30"/>
+            <p:cNvPr id="31" name="tx31"/>
             <p:cNvSpPr/>
             <p:nvPr/>
           </p:nvSpPr>
           <p:spPr>
             <a:xfrm>
-              <a:off x="692708" y="5517199"/>
+              <a:off x="762297" y="3360243"/>
               <a:ext cx="62179" cy="80101"/>
             </a:xfrm>
             <a:prstGeom prst="rect">
@@ -4872,13 +4907,13 @@
         </p:sp>
         <p:sp>
           <p:nvSpPr>
-            <p:cNvPr id="31" name="tx31"/>
+            <p:cNvPr id="32" name="tx32"/>
             <p:cNvSpPr/>
             <p:nvPr/>
           </p:nvSpPr>
           <p:spPr>
             <a:xfrm>
-              <a:off x="692708" y="4687735"/>
+              <a:off x="762297" y="3060909"/>
               <a:ext cx="62179" cy="80101"/>
             </a:xfrm>
             <a:prstGeom prst="rect">
@@ -4918,13 +4953,13 @@
         </p:sp>
         <p:sp>
           <p:nvSpPr>
-            <p:cNvPr id="32" name="tx32"/>
+            <p:cNvPr id="33" name="tx33"/>
             <p:cNvSpPr/>
             <p:nvPr/>
           </p:nvSpPr>
           <p:spPr>
             <a:xfrm>
-              <a:off x="692708" y="3858272"/>
+              <a:off x="762297" y="2761575"/>
               <a:ext cx="62179" cy="80101"/>
             </a:xfrm>
             <a:prstGeom prst="rect">
@@ -4964,13 +4999,13 @@
         </p:sp>
         <p:sp>
           <p:nvSpPr>
-            <p:cNvPr id="33" name="tx33"/>
+            <p:cNvPr id="34" name="tx34"/>
             <p:cNvSpPr/>
             <p:nvPr/>
           </p:nvSpPr>
           <p:spPr>
             <a:xfrm>
-              <a:off x="692708" y="3028808"/>
+              <a:off x="762297" y="2462242"/>
               <a:ext cx="62179" cy="80101"/>
             </a:xfrm>
             <a:prstGeom prst="rect">
@@ -5010,13 +5045,13 @@
         </p:sp>
         <p:sp>
           <p:nvSpPr>
-            <p:cNvPr id="34" name="tx34"/>
+            <p:cNvPr id="35" name="tx35"/>
             <p:cNvSpPr/>
             <p:nvPr/>
           </p:nvSpPr>
           <p:spPr>
             <a:xfrm>
-              <a:off x="692708" y="2199345"/>
+              <a:off x="762297" y="2162908"/>
               <a:ext cx="62179" cy="80101"/>
             </a:xfrm>
             <a:prstGeom prst="rect">
@@ -5056,13 +5091,13 @@
         </p:sp>
         <p:sp>
           <p:nvSpPr>
-            <p:cNvPr id="35" name="tx35"/>
+            <p:cNvPr id="36" name="tx36"/>
             <p:cNvSpPr/>
             <p:nvPr/>
           </p:nvSpPr>
           <p:spPr>
             <a:xfrm>
-              <a:off x="2134610" y="5785772"/>
+              <a:off x="2179256" y="3522791"/>
               <a:ext cx="161574" cy="80101"/>
             </a:xfrm>
             <a:prstGeom prst="rect">
@@ -5102,13 +5137,13 @@
         </p:sp>
         <p:sp>
           <p:nvSpPr>
-            <p:cNvPr id="36" name="tx36"/>
+            <p:cNvPr id="37" name="tx37"/>
             <p:cNvSpPr/>
             <p:nvPr/>
           </p:nvSpPr>
           <p:spPr>
             <a:xfrm>
-              <a:off x="3875731" y="5785772"/>
+              <a:off x="3889308" y="3522791"/>
               <a:ext cx="161574" cy="80101"/>
             </a:xfrm>
             <a:prstGeom prst="rect">
@@ -5148,13 +5183,13 @@
         </p:sp>
         <p:sp>
           <p:nvSpPr>
-            <p:cNvPr id="37" name="tx37"/>
+            <p:cNvPr id="38" name="tx38"/>
             <p:cNvSpPr/>
             <p:nvPr/>
           </p:nvSpPr>
           <p:spPr>
             <a:xfrm>
-              <a:off x="5666549" y="5785772"/>
+              <a:off x="5649057" y="3522791"/>
               <a:ext cx="62179" cy="80101"/>
             </a:xfrm>
             <a:prstGeom prst="rect">
@@ -5194,13 +5229,13 @@
         </p:sp>
         <p:sp>
           <p:nvSpPr>
-            <p:cNvPr id="38" name="tx38"/>
+            <p:cNvPr id="39" name="tx39"/>
             <p:cNvSpPr/>
             <p:nvPr/>
           </p:nvSpPr>
           <p:spPr>
             <a:xfrm>
-              <a:off x="7376580" y="5785772"/>
+              <a:off x="7328020" y="3522791"/>
               <a:ext cx="124358" cy="80101"/>
             </a:xfrm>
             <a:prstGeom prst="rect">
@@ -5240,13 +5275,13 @@
         </p:sp>
         <p:sp>
           <p:nvSpPr>
-            <p:cNvPr id="39" name="tx39"/>
+            <p:cNvPr id="40" name="tx40"/>
             <p:cNvSpPr/>
             <p:nvPr/>
           </p:nvSpPr>
           <p:spPr>
             <a:xfrm>
-              <a:off x="1561815" y="5925448"/>
+              <a:off x="1561815" y="3662467"/>
               <a:ext cx="6311097" cy="100218"/>
             </a:xfrm>
             <a:prstGeom prst="rect">
@@ -5286,13 +5321,13 @@
         </p:sp>
         <p:sp>
           <p:nvSpPr>
-            <p:cNvPr id="40" name="tx40"/>
+            <p:cNvPr id="41" name="tx41"/>
             <p:cNvSpPr/>
             <p:nvPr/>
           </p:nvSpPr>
           <p:spPr>
             <a:xfrm rot="-5400000">
-              <a:off x="68446" y="3848213"/>
+              <a:off x="138035" y="2751517"/>
               <a:ext cx="1016904" cy="100218"/>
             </a:xfrm>
             <a:prstGeom prst="rect">
@@ -5332,13 +5367,13 @@
         </p:sp>
         <p:sp>
           <p:nvSpPr>
-            <p:cNvPr id="41" name="tx41"/>
+            <p:cNvPr id="42" name="tx42"/>
             <p:cNvSpPr/>
             <p:nvPr/>
           </p:nvSpPr>
           <p:spPr>
             <a:xfrm>
-              <a:off x="817517" y="1896563"/>
+              <a:off x="887106" y="1966152"/>
               <a:ext cx="6959864" cy="82021"/>
             </a:xfrm>
             <a:prstGeom prst="rect">
@@ -5378,13 +5413,3789 @@
         </p:sp>
         <p:sp>
           <p:nvSpPr>
-            <p:cNvPr id="42" name="tx42"/>
+            <p:cNvPr id="43" name="tx43"/>
             <p:cNvSpPr/>
             <p:nvPr/>
           </p:nvSpPr>
           <p:spPr>
             <a:xfrm>
-              <a:off x="817517" y="1669789"/>
+              <a:off x="887106" y="1739378"/>
+              <a:ext cx="4346874" cy="120152"/>
+            </a:xfrm>
+            <a:prstGeom prst="rect">
+              <a:avLst/>
+            </a:prstGeom>
+            <a:noFill/>
+          </p:spPr>
+          <p:txBody>
+            <a:bodyPr lIns="0" rIns="0" tIns="0" bIns="0" anchorCtr="1" anchor="ctr" wrap="none"/>
+            <a:lstStyle/>
+            <a:p>
+              <a:pPr algn="l" marL="0" marR="0" indent="0">
+                <a:lnSpc>
+                  <a:spcPts val="1320"/>
+                </a:lnSpc>
+                <a:spcBef>
+                  <a:spcPts val="0"/>
+                </a:spcBef>
+                <a:spcAft>
+                  <a:spcPts val="0"/>
+                </a:spcAft>
+              </a:pPr>
+              <a:r>
+                <a:rPr sz="1320">
+                  <a:solidFill>
+                    <a:srgbClr val="000000">
+                      <a:alpha val="100000"/>
+                    </a:srgbClr>
+                  </a:solidFill>
+                  <a:latin typeface="Helvetica"/>
+                  <a:cs typeface="Helvetica"/>
+                </a:rPr>
+                <a:t>Composite Grade 2 AEs (Sensitivity, Carboplatin AUC ≥ 3)</a:t>
+              </a:r>
+            </a:p>
+          </p:txBody>
+        </p:sp>
+        <p:sp>
+          <p:nvSpPr>
+            <p:cNvPr id="44" name="pl44"/>
+            <p:cNvSpPr/>
+            <p:nvPr/>
+          </p:nvSpPr>
+          <p:spPr>
+            <a:xfrm>
+              <a:off x="887106" y="5444019"/>
+              <a:ext cx="7660515" cy="0"/>
+            </a:xfrm>
+            <a:custGeom>
+              <a:avLst/>
+              <a:pathLst>
+                <a:path w="7660515" h="0">
+                  <a:moveTo>
+                    <a:pt x="0" y="0"/>
+                  </a:moveTo>
+                  <a:lnTo>
+                    <a:pt x="7660515" y="0"/>
+                  </a:lnTo>
+                  <a:lnTo>
+                    <a:pt x="7660515" y="0"/>
+                  </a:lnTo>
+                </a:path>
+              </a:pathLst>
+            </a:custGeom>
+            <a:ln w="6775" cap="flat">
+              <a:solidFill>
+                <a:srgbClr val="EBEBEB">
+                  <a:alpha val="100000"/>
+                </a:srgbClr>
+              </a:solidFill>
+              <a:prstDash val="solid"/>
+              <a:round/>
+            </a:ln>
+          </p:spPr>
+          <p:txBody>
+            <a:bodyPr/>
+            <a:lstStyle/>
+            <a:p/>
+          </p:txBody>
+        </p:sp>
+        <p:sp>
+          <p:nvSpPr>
+            <p:cNvPr id="45" name="pl45"/>
+            <p:cNvSpPr/>
+            <p:nvPr/>
+          </p:nvSpPr>
+          <p:spPr>
+            <a:xfrm>
+              <a:off x="887106" y="5144686"/>
+              <a:ext cx="7660515" cy="0"/>
+            </a:xfrm>
+            <a:custGeom>
+              <a:avLst/>
+              <a:pathLst>
+                <a:path w="7660515" h="0">
+                  <a:moveTo>
+                    <a:pt x="0" y="0"/>
+                  </a:moveTo>
+                  <a:lnTo>
+                    <a:pt x="7660515" y="0"/>
+                  </a:lnTo>
+                  <a:lnTo>
+                    <a:pt x="7660515" y="0"/>
+                  </a:lnTo>
+                </a:path>
+              </a:pathLst>
+            </a:custGeom>
+            <a:ln w="6775" cap="flat">
+              <a:solidFill>
+                <a:srgbClr val="EBEBEB">
+                  <a:alpha val="100000"/>
+                </a:srgbClr>
+              </a:solidFill>
+              <a:prstDash val="solid"/>
+              <a:round/>
+            </a:ln>
+          </p:spPr>
+          <p:txBody>
+            <a:bodyPr/>
+            <a:lstStyle/>
+            <a:p/>
+          </p:txBody>
+        </p:sp>
+        <p:sp>
+          <p:nvSpPr>
+            <p:cNvPr id="46" name="pl46"/>
+            <p:cNvSpPr/>
+            <p:nvPr/>
+          </p:nvSpPr>
+          <p:spPr>
+            <a:xfrm>
+              <a:off x="887106" y="4845352"/>
+              <a:ext cx="7660515" cy="0"/>
+            </a:xfrm>
+            <a:custGeom>
+              <a:avLst/>
+              <a:pathLst>
+                <a:path w="7660515" h="0">
+                  <a:moveTo>
+                    <a:pt x="0" y="0"/>
+                  </a:moveTo>
+                  <a:lnTo>
+                    <a:pt x="7660515" y="0"/>
+                  </a:lnTo>
+                  <a:lnTo>
+                    <a:pt x="7660515" y="0"/>
+                  </a:lnTo>
+                </a:path>
+              </a:pathLst>
+            </a:custGeom>
+            <a:ln w="6775" cap="flat">
+              <a:solidFill>
+                <a:srgbClr val="EBEBEB">
+                  <a:alpha val="100000"/>
+                </a:srgbClr>
+              </a:solidFill>
+              <a:prstDash val="solid"/>
+              <a:round/>
+            </a:ln>
+          </p:spPr>
+          <p:txBody>
+            <a:bodyPr/>
+            <a:lstStyle/>
+            <a:p/>
+          </p:txBody>
+        </p:sp>
+        <p:sp>
+          <p:nvSpPr>
+            <p:cNvPr id="47" name="pl47"/>
+            <p:cNvSpPr/>
+            <p:nvPr/>
+          </p:nvSpPr>
+          <p:spPr>
+            <a:xfrm>
+              <a:off x="887106" y="4546018"/>
+              <a:ext cx="7660515" cy="0"/>
+            </a:xfrm>
+            <a:custGeom>
+              <a:avLst/>
+              <a:pathLst>
+                <a:path w="7660515" h="0">
+                  <a:moveTo>
+                    <a:pt x="0" y="0"/>
+                  </a:moveTo>
+                  <a:lnTo>
+                    <a:pt x="7660515" y="0"/>
+                  </a:lnTo>
+                  <a:lnTo>
+                    <a:pt x="7660515" y="0"/>
+                  </a:lnTo>
+                </a:path>
+              </a:pathLst>
+            </a:custGeom>
+            <a:ln w="6775" cap="flat">
+              <a:solidFill>
+                <a:srgbClr val="EBEBEB">
+                  <a:alpha val="100000"/>
+                </a:srgbClr>
+              </a:solidFill>
+              <a:prstDash val="solid"/>
+              <a:round/>
+            </a:ln>
+          </p:spPr>
+          <p:txBody>
+            <a:bodyPr/>
+            <a:lstStyle/>
+            <a:p/>
+          </p:txBody>
+        </p:sp>
+        <p:sp>
+          <p:nvSpPr>
+            <p:cNvPr id="48" name="pl48"/>
+            <p:cNvSpPr/>
+            <p:nvPr/>
+          </p:nvSpPr>
+          <p:spPr>
+            <a:xfrm>
+              <a:off x="977504" y="4336484"/>
+              <a:ext cx="0" cy="1317069"/>
+            </a:xfrm>
+            <a:custGeom>
+              <a:avLst/>
+              <a:pathLst>
+                <a:path w="0" h="1317069">
+                  <a:moveTo>
+                    <a:pt x="0" y="1317069"/>
+                  </a:moveTo>
+                  <a:lnTo>
+                    <a:pt x="0" y="0"/>
+                  </a:lnTo>
+                  <a:lnTo>
+                    <a:pt x="0" y="0"/>
+                  </a:lnTo>
+                </a:path>
+              </a:pathLst>
+            </a:custGeom>
+            <a:ln w="6775" cap="flat">
+              <a:solidFill>
+                <a:srgbClr val="EBEBEB">
+                  <a:alpha val="100000"/>
+                </a:srgbClr>
+              </a:solidFill>
+              <a:prstDash val="solid"/>
+              <a:round/>
+            </a:ln>
+          </p:spPr>
+          <p:txBody>
+            <a:bodyPr/>
+            <a:lstStyle/>
+            <a:p/>
+          </p:txBody>
+        </p:sp>
+        <p:sp>
+          <p:nvSpPr>
+            <p:cNvPr id="49" name="pl49"/>
+            <p:cNvSpPr/>
+            <p:nvPr/>
+          </p:nvSpPr>
+          <p:spPr>
+            <a:xfrm>
+              <a:off x="1832530" y="4336484"/>
+              <a:ext cx="0" cy="1317069"/>
+            </a:xfrm>
+            <a:custGeom>
+              <a:avLst/>
+              <a:pathLst>
+                <a:path w="0" h="1317069">
+                  <a:moveTo>
+                    <a:pt x="0" y="1317069"/>
+                  </a:moveTo>
+                  <a:lnTo>
+                    <a:pt x="0" y="0"/>
+                  </a:lnTo>
+                  <a:lnTo>
+                    <a:pt x="0" y="0"/>
+                  </a:lnTo>
+                </a:path>
+              </a:pathLst>
+            </a:custGeom>
+            <a:ln w="6775" cap="flat">
+              <a:solidFill>
+                <a:srgbClr val="EBEBEB">
+                  <a:alpha val="100000"/>
+                </a:srgbClr>
+              </a:solidFill>
+              <a:prstDash val="solid"/>
+              <a:round/>
+            </a:ln>
+          </p:spPr>
+          <p:txBody>
+            <a:bodyPr/>
+            <a:lstStyle/>
+            <a:p/>
+          </p:txBody>
+        </p:sp>
+        <p:sp>
+          <p:nvSpPr>
+            <p:cNvPr id="50" name="pl50"/>
+            <p:cNvSpPr/>
+            <p:nvPr/>
+          </p:nvSpPr>
+          <p:spPr>
+            <a:xfrm>
+              <a:off x="2687556" y="4336484"/>
+              <a:ext cx="0" cy="1317069"/>
+            </a:xfrm>
+            <a:custGeom>
+              <a:avLst/>
+              <a:pathLst>
+                <a:path w="0" h="1317069">
+                  <a:moveTo>
+                    <a:pt x="0" y="1317069"/>
+                  </a:moveTo>
+                  <a:lnTo>
+                    <a:pt x="0" y="0"/>
+                  </a:lnTo>
+                  <a:lnTo>
+                    <a:pt x="0" y="0"/>
+                  </a:lnTo>
+                </a:path>
+              </a:pathLst>
+            </a:custGeom>
+            <a:ln w="6775" cap="flat">
+              <a:solidFill>
+                <a:srgbClr val="EBEBEB">
+                  <a:alpha val="100000"/>
+                </a:srgbClr>
+              </a:solidFill>
+              <a:prstDash val="solid"/>
+              <a:round/>
+            </a:ln>
+          </p:spPr>
+          <p:txBody>
+            <a:bodyPr/>
+            <a:lstStyle/>
+            <a:p/>
+          </p:txBody>
+        </p:sp>
+        <p:sp>
+          <p:nvSpPr>
+            <p:cNvPr id="51" name="pl51"/>
+            <p:cNvSpPr/>
+            <p:nvPr/>
+          </p:nvSpPr>
+          <p:spPr>
+            <a:xfrm>
+              <a:off x="3542582" y="4336484"/>
+              <a:ext cx="0" cy="1317069"/>
+            </a:xfrm>
+            <a:custGeom>
+              <a:avLst/>
+              <a:pathLst>
+                <a:path w="0" h="1317069">
+                  <a:moveTo>
+                    <a:pt x="0" y="1317069"/>
+                  </a:moveTo>
+                  <a:lnTo>
+                    <a:pt x="0" y="0"/>
+                  </a:lnTo>
+                  <a:lnTo>
+                    <a:pt x="0" y="0"/>
+                  </a:lnTo>
+                </a:path>
+              </a:pathLst>
+            </a:custGeom>
+            <a:ln w="6775" cap="flat">
+              <a:solidFill>
+                <a:srgbClr val="EBEBEB">
+                  <a:alpha val="100000"/>
+                </a:srgbClr>
+              </a:solidFill>
+              <a:prstDash val="solid"/>
+              <a:round/>
+            </a:ln>
+          </p:spPr>
+          <p:txBody>
+            <a:bodyPr/>
+            <a:lstStyle/>
+            <a:p/>
+          </p:txBody>
+        </p:sp>
+        <p:sp>
+          <p:nvSpPr>
+            <p:cNvPr id="52" name="pl52"/>
+            <p:cNvSpPr/>
+            <p:nvPr/>
+          </p:nvSpPr>
+          <p:spPr>
+            <a:xfrm>
+              <a:off x="4397608" y="4336484"/>
+              <a:ext cx="0" cy="1317069"/>
+            </a:xfrm>
+            <a:custGeom>
+              <a:avLst/>
+              <a:pathLst>
+                <a:path w="0" h="1317069">
+                  <a:moveTo>
+                    <a:pt x="0" y="1317069"/>
+                  </a:moveTo>
+                  <a:lnTo>
+                    <a:pt x="0" y="0"/>
+                  </a:lnTo>
+                  <a:lnTo>
+                    <a:pt x="0" y="0"/>
+                  </a:lnTo>
+                </a:path>
+              </a:pathLst>
+            </a:custGeom>
+            <a:ln w="6775" cap="flat">
+              <a:solidFill>
+                <a:srgbClr val="EBEBEB">
+                  <a:alpha val="100000"/>
+                </a:srgbClr>
+              </a:solidFill>
+              <a:prstDash val="solid"/>
+              <a:round/>
+            </a:ln>
+          </p:spPr>
+          <p:txBody>
+            <a:bodyPr/>
+            <a:lstStyle/>
+            <a:p/>
+          </p:txBody>
+        </p:sp>
+        <p:sp>
+          <p:nvSpPr>
+            <p:cNvPr id="53" name="pl53"/>
+            <p:cNvSpPr/>
+            <p:nvPr/>
+          </p:nvSpPr>
+          <p:spPr>
+            <a:xfrm>
+              <a:off x="5252634" y="4336484"/>
+              <a:ext cx="0" cy="1317069"/>
+            </a:xfrm>
+            <a:custGeom>
+              <a:avLst/>
+              <a:pathLst>
+                <a:path w="0" h="1317069">
+                  <a:moveTo>
+                    <a:pt x="0" y="1317069"/>
+                  </a:moveTo>
+                  <a:lnTo>
+                    <a:pt x="0" y="0"/>
+                  </a:lnTo>
+                  <a:lnTo>
+                    <a:pt x="0" y="0"/>
+                  </a:lnTo>
+                </a:path>
+              </a:pathLst>
+            </a:custGeom>
+            <a:ln w="6775" cap="flat">
+              <a:solidFill>
+                <a:srgbClr val="EBEBEB">
+                  <a:alpha val="100000"/>
+                </a:srgbClr>
+              </a:solidFill>
+              <a:prstDash val="solid"/>
+              <a:round/>
+            </a:ln>
+          </p:spPr>
+          <p:txBody>
+            <a:bodyPr/>
+            <a:lstStyle/>
+            <a:p/>
+          </p:txBody>
+        </p:sp>
+        <p:sp>
+          <p:nvSpPr>
+            <p:cNvPr id="54" name="pl54"/>
+            <p:cNvSpPr/>
+            <p:nvPr/>
+          </p:nvSpPr>
+          <p:spPr>
+            <a:xfrm>
+              <a:off x="6107660" y="4336484"/>
+              <a:ext cx="0" cy="1317069"/>
+            </a:xfrm>
+            <a:custGeom>
+              <a:avLst/>
+              <a:pathLst>
+                <a:path w="0" h="1317069">
+                  <a:moveTo>
+                    <a:pt x="0" y="1317069"/>
+                  </a:moveTo>
+                  <a:lnTo>
+                    <a:pt x="0" y="0"/>
+                  </a:lnTo>
+                  <a:lnTo>
+                    <a:pt x="0" y="0"/>
+                  </a:lnTo>
+                </a:path>
+              </a:pathLst>
+            </a:custGeom>
+            <a:ln w="6775" cap="flat">
+              <a:solidFill>
+                <a:srgbClr val="EBEBEB">
+                  <a:alpha val="100000"/>
+                </a:srgbClr>
+              </a:solidFill>
+              <a:prstDash val="solid"/>
+              <a:round/>
+            </a:ln>
+          </p:spPr>
+          <p:txBody>
+            <a:bodyPr/>
+            <a:lstStyle/>
+            <a:p/>
+          </p:txBody>
+        </p:sp>
+        <p:sp>
+          <p:nvSpPr>
+            <p:cNvPr id="55" name="pl55"/>
+            <p:cNvSpPr/>
+            <p:nvPr/>
+          </p:nvSpPr>
+          <p:spPr>
+            <a:xfrm>
+              <a:off x="6962686" y="4336484"/>
+              <a:ext cx="0" cy="1317069"/>
+            </a:xfrm>
+            <a:custGeom>
+              <a:avLst/>
+              <a:pathLst>
+                <a:path w="0" h="1317069">
+                  <a:moveTo>
+                    <a:pt x="0" y="1317069"/>
+                  </a:moveTo>
+                  <a:lnTo>
+                    <a:pt x="0" y="0"/>
+                  </a:lnTo>
+                  <a:lnTo>
+                    <a:pt x="0" y="0"/>
+                  </a:lnTo>
+                </a:path>
+              </a:pathLst>
+            </a:custGeom>
+            <a:ln w="6775" cap="flat">
+              <a:solidFill>
+                <a:srgbClr val="EBEBEB">
+                  <a:alpha val="100000"/>
+                </a:srgbClr>
+              </a:solidFill>
+              <a:prstDash val="solid"/>
+              <a:round/>
+            </a:ln>
+          </p:spPr>
+          <p:txBody>
+            <a:bodyPr/>
+            <a:lstStyle/>
+            <a:p/>
+          </p:txBody>
+        </p:sp>
+        <p:sp>
+          <p:nvSpPr>
+            <p:cNvPr id="56" name="pl56"/>
+            <p:cNvSpPr/>
+            <p:nvPr/>
+          </p:nvSpPr>
+          <p:spPr>
+            <a:xfrm>
+              <a:off x="7817712" y="4336484"/>
+              <a:ext cx="0" cy="1317069"/>
+            </a:xfrm>
+            <a:custGeom>
+              <a:avLst/>
+              <a:pathLst>
+                <a:path w="0" h="1317069">
+                  <a:moveTo>
+                    <a:pt x="0" y="1317069"/>
+                  </a:moveTo>
+                  <a:lnTo>
+                    <a:pt x="0" y="0"/>
+                  </a:lnTo>
+                  <a:lnTo>
+                    <a:pt x="0" y="0"/>
+                  </a:lnTo>
+                </a:path>
+              </a:pathLst>
+            </a:custGeom>
+            <a:ln w="6775" cap="flat">
+              <a:solidFill>
+                <a:srgbClr val="EBEBEB">
+                  <a:alpha val="100000"/>
+                </a:srgbClr>
+              </a:solidFill>
+              <a:prstDash val="solid"/>
+              <a:round/>
+            </a:ln>
+          </p:spPr>
+          <p:txBody>
+            <a:bodyPr/>
+            <a:lstStyle/>
+            <a:p/>
+          </p:txBody>
+        </p:sp>
+        <p:sp>
+          <p:nvSpPr>
+            <p:cNvPr id="57" name="pl57"/>
+            <p:cNvSpPr/>
+            <p:nvPr/>
+          </p:nvSpPr>
+          <p:spPr>
+            <a:xfrm>
+              <a:off x="887106" y="5593686"/>
+              <a:ext cx="7660515" cy="0"/>
+            </a:xfrm>
+            <a:custGeom>
+              <a:avLst/>
+              <a:pathLst>
+                <a:path w="7660515" h="0">
+                  <a:moveTo>
+                    <a:pt x="0" y="0"/>
+                  </a:moveTo>
+                  <a:lnTo>
+                    <a:pt x="7660515" y="0"/>
+                  </a:lnTo>
+                  <a:lnTo>
+                    <a:pt x="7660515" y="0"/>
+                  </a:lnTo>
+                </a:path>
+              </a:pathLst>
+            </a:custGeom>
+            <a:ln w="13550" cap="flat">
+              <a:solidFill>
+                <a:srgbClr val="EBEBEB">
+                  <a:alpha val="100000"/>
+                </a:srgbClr>
+              </a:solidFill>
+              <a:prstDash val="solid"/>
+              <a:round/>
+            </a:ln>
+          </p:spPr>
+          <p:txBody>
+            <a:bodyPr/>
+            <a:lstStyle/>
+            <a:p/>
+          </p:txBody>
+        </p:sp>
+        <p:sp>
+          <p:nvSpPr>
+            <p:cNvPr id="58" name="pl58"/>
+            <p:cNvSpPr/>
+            <p:nvPr/>
+          </p:nvSpPr>
+          <p:spPr>
+            <a:xfrm>
+              <a:off x="887106" y="5294352"/>
+              <a:ext cx="7660515" cy="0"/>
+            </a:xfrm>
+            <a:custGeom>
+              <a:avLst/>
+              <a:pathLst>
+                <a:path w="7660515" h="0">
+                  <a:moveTo>
+                    <a:pt x="0" y="0"/>
+                  </a:moveTo>
+                  <a:lnTo>
+                    <a:pt x="7660515" y="0"/>
+                  </a:lnTo>
+                  <a:lnTo>
+                    <a:pt x="7660515" y="0"/>
+                  </a:lnTo>
+                </a:path>
+              </a:pathLst>
+            </a:custGeom>
+            <a:ln w="13550" cap="flat">
+              <a:solidFill>
+                <a:srgbClr val="EBEBEB">
+                  <a:alpha val="100000"/>
+                </a:srgbClr>
+              </a:solidFill>
+              <a:prstDash val="solid"/>
+              <a:round/>
+            </a:ln>
+          </p:spPr>
+          <p:txBody>
+            <a:bodyPr/>
+            <a:lstStyle/>
+            <a:p/>
+          </p:txBody>
+        </p:sp>
+        <p:sp>
+          <p:nvSpPr>
+            <p:cNvPr id="59" name="pl59"/>
+            <p:cNvSpPr/>
+            <p:nvPr/>
+          </p:nvSpPr>
+          <p:spPr>
+            <a:xfrm>
+              <a:off x="887106" y="4995019"/>
+              <a:ext cx="7660515" cy="0"/>
+            </a:xfrm>
+            <a:custGeom>
+              <a:avLst/>
+              <a:pathLst>
+                <a:path w="7660515" h="0">
+                  <a:moveTo>
+                    <a:pt x="0" y="0"/>
+                  </a:moveTo>
+                  <a:lnTo>
+                    <a:pt x="7660515" y="0"/>
+                  </a:lnTo>
+                  <a:lnTo>
+                    <a:pt x="7660515" y="0"/>
+                  </a:lnTo>
+                </a:path>
+              </a:pathLst>
+            </a:custGeom>
+            <a:ln w="13550" cap="flat">
+              <a:solidFill>
+                <a:srgbClr val="EBEBEB">
+                  <a:alpha val="100000"/>
+                </a:srgbClr>
+              </a:solidFill>
+              <a:prstDash val="solid"/>
+              <a:round/>
+            </a:ln>
+          </p:spPr>
+          <p:txBody>
+            <a:bodyPr/>
+            <a:lstStyle/>
+            <a:p/>
+          </p:txBody>
+        </p:sp>
+        <p:sp>
+          <p:nvSpPr>
+            <p:cNvPr id="60" name="pl60"/>
+            <p:cNvSpPr/>
+            <p:nvPr/>
+          </p:nvSpPr>
+          <p:spPr>
+            <a:xfrm>
+              <a:off x="887106" y="4695685"/>
+              <a:ext cx="7660515" cy="0"/>
+            </a:xfrm>
+            <a:custGeom>
+              <a:avLst/>
+              <a:pathLst>
+                <a:path w="7660515" h="0">
+                  <a:moveTo>
+                    <a:pt x="0" y="0"/>
+                  </a:moveTo>
+                  <a:lnTo>
+                    <a:pt x="7660515" y="0"/>
+                  </a:lnTo>
+                  <a:lnTo>
+                    <a:pt x="7660515" y="0"/>
+                  </a:lnTo>
+                </a:path>
+              </a:pathLst>
+            </a:custGeom>
+            <a:ln w="13550" cap="flat">
+              <a:solidFill>
+                <a:srgbClr val="EBEBEB">
+                  <a:alpha val="100000"/>
+                </a:srgbClr>
+              </a:solidFill>
+              <a:prstDash val="solid"/>
+              <a:round/>
+            </a:ln>
+          </p:spPr>
+          <p:txBody>
+            <a:bodyPr/>
+            <a:lstStyle/>
+            <a:p/>
+          </p:txBody>
+        </p:sp>
+        <p:sp>
+          <p:nvSpPr>
+            <p:cNvPr id="61" name="pl61"/>
+            <p:cNvSpPr/>
+            <p:nvPr/>
+          </p:nvSpPr>
+          <p:spPr>
+            <a:xfrm>
+              <a:off x="887106" y="4396351"/>
+              <a:ext cx="7660515" cy="0"/>
+            </a:xfrm>
+            <a:custGeom>
+              <a:avLst/>
+              <a:pathLst>
+                <a:path w="7660515" h="0">
+                  <a:moveTo>
+                    <a:pt x="0" y="0"/>
+                  </a:moveTo>
+                  <a:lnTo>
+                    <a:pt x="7660515" y="0"/>
+                  </a:lnTo>
+                  <a:lnTo>
+                    <a:pt x="7660515" y="0"/>
+                  </a:lnTo>
+                </a:path>
+              </a:pathLst>
+            </a:custGeom>
+            <a:ln w="13550" cap="flat">
+              <a:solidFill>
+                <a:srgbClr val="EBEBEB">
+                  <a:alpha val="100000"/>
+                </a:srgbClr>
+              </a:solidFill>
+              <a:prstDash val="solid"/>
+              <a:round/>
+            </a:ln>
+          </p:spPr>
+          <p:txBody>
+            <a:bodyPr/>
+            <a:lstStyle/>
+            <a:p/>
+          </p:txBody>
+        </p:sp>
+        <p:sp>
+          <p:nvSpPr>
+            <p:cNvPr id="62" name="pl62"/>
+            <p:cNvSpPr/>
+            <p:nvPr/>
+          </p:nvSpPr>
+          <p:spPr>
+            <a:xfrm>
+              <a:off x="1405017" y="4336484"/>
+              <a:ext cx="0" cy="1317069"/>
+            </a:xfrm>
+            <a:custGeom>
+              <a:avLst/>
+              <a:pathLst>
+                <a:path w="0" h="1317069">
+                  <a:moveTo>
+                    <a:pt x="0" y="1317069"/>
+                  </a:moveTo>
+                  <a:lnTo>
+                    <a:pt x="0" y="0"/>
+                  </a:lnTo>
+                  <a:lnTo>
+                    <a:pt x="0" y="0"/>
+                  </a:lnTo>
+                </a:path>
+              </a:pathLst>
+            </a:custGeom>
+            <a:ln w="13550" cap="flat">
+              <a:solidFill>
+                <a:srgbClr val="EBEBEB">
+                  <a:alpha val="100000"/>
+                </a:srgbClr>
+              </a:solidFill>
+              <a:prstDash val="solid"/>
+              <a:round/>
+            </a:ln>
+          </p:spPr>
+          <p:txBody>
+            <a:bodyPr/>
+            <a:lstStyle/>
+            <a:p/>
+          </p:txBody>
+        </p:sp>
+        <p:sp>
+          <p:nvSpPr>
+            <p:cNvPr id="63" name="pl63"/>
+            <p:cNvSpPr/>
+            <p:nvPr/>
+          </p:nvSpPr>
+          <p:spPr>
+            <a:xfrm>
+              <a:off x="2260043" y="4336484"/>
+              <a:ext cx="0" cy="1317069"/>
+            </a:xfrm>
+            <a:custGeom>
+              <a:avLst/>
+              <a:pathLst>
+                <a:path w="0" h="1317069">
+                  <a:moveTo>
+                    <a:pt x="0" y="1317069"/>
+                  </a:moveTo>
+                  <a:lnTo>
+                    <a:pt x="0" y="0"/>
+                  </a:lnTo>
+                  <a:lnTo>
+                    <a:pt x="0" y="0"/>
+                  </a:lnTo>
+                </a:path>
+              </a:pathLst>
+            </a:custGeom>
+            <a:ln w="13550" cap="flat">
+              <a:solidFill>
+                <a:srgbClr val="EBEBEB">
+                  <a:alpha val="100000"/>
+                </a:srgbClr>
+              </a:solidFill>
+              <a:prstDash val="solid"/>
+              <a:round/>
+            </a:ln>
+          </p:spPr>
+          <p:txBody>
+            <a:bodyPr/>
+            <a:lstStyle/>
+            <a:p/>
+          </p:txBody>
+        </p:sp>
+        <p:sp>
+          <p:nvSpPr>
+            <p:cNvPr id="64" name="pl64"/>
+            <p:cNvSpPr/>
+            <p:nvPr/>
+          </p:nvSpPr>
+          <p:spPr>
+            <a:xfrm>
+              <a:off x="3115069" y="4336484"/>
+              <a:ext cx="0" cy="1317069"/>
+            </a:xfrm>
+            <a:custGeom>
+              <a:avLst/>
+              <a:pathLst>
+                <a:path w="0" h="1317069">
+                  <a:moveTo>
+                    <a:pt x="0" y="1317069"/>
+                  </a:moveTo>
+                  <a:lnTo>
+                    <a:pt x="0" y="0"/>
+                  </a:lnTo>
+                  <a:lnTo>
+                    <a:pt x="0" y="0"/>
+                  </a:lnTo>
+                </a:path>
+              </a:pathLst>
+            </a:custGeom>
+            <a:ln w="13550" cap="flat">
+              <a:solidFill>
+                <a:srgbClr val="EBEBEB">
+                  <a:alpha val="100000"/>
+                </a:srgbClr>
+              </a:solidFill>
+              <a:prstDash val="solid"/>
+              <a:round/>
+            </a:ln>
+          </p:spPr>
+          <p:txBody>
+            <a:bodyPr/>
+            <a:lstStyle/>
+            <a:p/>
+          </p:txBody>
+        </p:sp>
+        <p:sp>
+          <p:nvSpPr>
+            <p:cNvPr id="65" name="pl65"/>
+            <p:cNvSpPr/>
+            <p:nvPr/>
+          </p:nvSpPr>
+          <p:spPr>
+            <a:xfrm>
+              <a:off x="3970095" y="4336484"/>
+              <a:ext cx="0" cy="1317069"/>
+            </a:xfrm>
+            <a:custGeom>
+              <a:avLst/>
+              <a:pathLst>
+                <a:path w="0" h="1317069">
+                  <a:moveTo>
+                    <a:pt x="0" y="1317069"/>
+                  </a:moveTo>
+                  <a:lnTo>
+                    <a:pt x="0" y="0"/>
+                  </a:lnTo>
+                  <a:lnTo>
+                    <a:pt x="0" y="0"/>
+                  </a:lnTo>
+                </a:path>
+              </a:pathLst>
+            </a:custGeom>
+            <a:ln w="13550" cap="flat">
+              <a:solidFill>
+                <a:srgbClr val="EBEBEB">
+                  <a:alpha val="100000"/>
+                </a:srgbClr>
+              </a:solidFill>
+              <a:prstDash val="solid"/>
+              <a:round/>
+            </a:ln>
+          </p:spPr>
+          <p:txBody>
+            <a:bodyPr/>
+            <a:lstStyle/>
+            <a:p/>
+          </p:txBody>
+        </p:sp>
+        <p:sp>
+          <p:nvSpPr>
+            <p:cNvPr id="66" name="pl66"/>
+            <p:cNvSpPr/>
+            <p:nvPr/>
+          </p:nvSpPr>
+          <p:spPr>
+            <a:xfrm>
+              <a:off x="4825121" y="4336484"/>
+              <a:ext cx="0" cy="1317069"/>
+            </a:xfrm>
+            <a:custGeom>
+              <a:avLst/>
+              <a:pathLst>
+                <a:path w="0" h="1317069">
+                  <a:moveTo>
+                    <a:pt x="0" y="1317069"/>
+                  </a:moveTo>
+                  <a:lnTo>
+                    <a:pt x="0" y="0"/>
+                  </a:lnTo>
+                  <a:lnTo>
+                    <a:pt x="0" y="0"/>
+                  </a:lnTo>
+                </a:path>
+              </a:pathLst>
+            </a:custGeom>
+            <a:ln w="13550" cap="flat">
+              <a:solidFill>
+                <a:srgbClr val="EBEBEB">
+                  <a:alpha val="100000"/>
+                </a:srgbClr>
+              </a:solidFill>
+              <a:prstDash val="solid"/>
+              <a:round/>
+            </a:ln>
+          </p:spPr>
+          <p:txBody>
+            <a:bodyPr/>
+            <a:lstStyle/>
+            <a:p/>
+          </p:txBody>
+        </p:sp>
+        <p:sp>
+          <p:nvSpPr>
+            <p:cNvPr id="67" name="pl67"/>
+            <p:cNvSpPr/>
+            <p:nvPr/>
+          </p:nvSpPr>
+          <p:spPr>
+            <a:xfrm>
+              <a:off x="5680147" y="4336484"/>
+              <a:ext cx="0" cy="1317069"/>
+            </a:xfrm>
+            <a:custGeom>
+              <a:avLst/>
+              <a:pathLst>
+                <a:path w="0" h="1317069">
+                  <a:moveTo>
+                    <a:pt x="0" y="1317069"/>
+                  </a:moveTo>
+                  <a:lnTo>
+                    <a:pt x="0" y="0"/>
+                  </a:lnTo>
+                  <a:lnTo>
+                    <a:pt x="0" y="0"/>
+                  </a:lnTo>
+                </a:path>
+              </a:pathLst>
+            </a:custGeom>
+            <a:ln w="13550" cap="flat">
+              <a:solidFill>
+                <a:srgbClr val="EBEBEB">
+                  <a:alpha val="100000"/>
+                </a:srgbClr>
+              </a:solidFill>
+              <a:prstDash val="solid"/>
+              <a:round/>
+            </a:ln>
+          </p:spPr>
+          <p:txBody>
+            <a:bodyPr/>
+            <a:lstStyle/>
+            <a:p/>
+          </p:txBody>
+        </p:sp>
+        <p:sp>
+          <p:nvSpPr>
+            <p:cNvPr id="68" name="pl68"/>
+            <p:cNvSpPr/>
+            <p:nvPr/>
+          </p:nvSpPr>
+          <p:spPr>
+            <a:xfrm>
+              <a:off x="6535173" y="4336484"/>
+              <a:ext cx="0" cy="1317069"/>
+            </a:xfrm>
+            <a:custGeom>
+              <a:avLst/>
+              <a:pathLst>
+                <a:path w="0" h="1317069">
+                  <a:moveTo>
+                    <a:pt x="0" y="1317069"/>
+                  </a:moveTo>
+                  <a:lnTo>
+                    <a:pt x="0" y="0"/>
+                  </a:lnTo>
+                  <a:lnTo>
+                    <a:pt x="0" y="0"/>
+                  </a:lnTo>
+                </a:path>
+              </a:pathLst>
+            </a:custGeom>
+            <a:ln w="13550" cap="flat">
+              <a:solidFill>
+                <a:srgbClr val="EBEBEB">
+                  <a:alpha val="100000"/>
+                </a:srgbClr>
+              </a:solidFill>
+              <a:prstDash val="solid"/>
+              <a:round/>
+            </a:ln>
+          </p:spPr>
+          <p:txBody>
+            <a:bodyPr/>
+            <a:lstStyle/>
+            <a:p/>
+          </p:txBody>
+        </p:sp>
+        <p:sp>
+          <p:nvSpPr>
+            <p:cNvPr id="69" name="pl69"/>
+            <p:cNvSpPr/>
+            <p:nvPr/>
+          </p:nvSpPr>
+          <p:spPr>
+            <a:xfrm>
+              <a:off x="7390199" y="4336484"/>
+              <a:ext cx="0" cy="1317069"/>
+            </a:xfrm>
+            <a:custGeom>
+              <a:avLst/>
+              <a:pathLst>
+                <a:path w="0" h="1317069">
+                  <a:moveTo>
+                    <a:pt x="0" y="1317069"/>
+                  </a:moveTo>
+                  <a:lnTo>
+                    <a:pt x="0" y="0"/>
+                  </a:lnTo>
+                  <a:lnTo>
+                    <a:pt x="0" y="0"/>
+                  </a:lnTo>
+                </a:path>
+              </a:pathLst>
+            </a:custGeom>
+            <a:ln w="13550" cap="flat">
+              <a:solidFill>
+                <a:srgbClr val="EBEBEB">
+                  <a:alpha val="100000"/>
+                </a:srgbClr>
+              </a:solidFill>
+              <a:prstDash val="solid"/>
+              <a:round/>
+            </a:ln>
+          </p:spPr>
+          <p:txBody>
+            <a:bodyPr/>
+            <a:lstStyle/>
+            <a:p/>
+          </p:txBody>
+        </p:sp>
+        <p:sp>
+          <p:nvSpPr>
+            <p:cNvPr id="70" name="pl70"/>
+            <p:cNvSpPr/>
+            <p:nvPr/>
+          </p:nvSpPr>
+          <p:spPr>
+            <a:xfrm>
+              <a:off x="8245225" y="4336484"/>
+              <a:ext cx="0" cy="1317069"/>
+            </a:xfrm>
+            <a:custGeom>
+              <a:avLst/>
+              <a:pathLst>
+                <a:path w="0" h="1317069">
+                  <a:moveTo>
+                    <a:pt x="0" y="1317069"/>
+                  </a:moveTo>
+                  <a:lnTo>
+                    <a:pt x="0" y="0"/>
+                  </a:lnTo>
+                  <a:lnTo>
+                    <a:pt x="0" y="0"/>
+                  </a:lnTo>
+                </a:path>
+              </a:pathLst>
+            </a:custGeom>
+            <a:ln w="13550" cap="flat">
+              <a:solidFill>
+                <a:srgbClr val="EBEBEB">
+                  <a:alpha val="100000"/>
+                </a:srgbClr>
+              </a:solidFill>
+              <a:prstDash val="solid"/>
+              <a:round/>
+            </a:ln>
+          </p:spPr>
+          <p:txBody>
+            <a:bodyPr/>
+            <a:lstStyle/>
+            <a:p/>
+          </p:txBody>
+        </p:sp>
+        <p:sp>
+          <p:nvSpPr>
+            <p:cNvPr id="71" name="pg71"/>
+            <p:cNvSpPr/>
+            <p:nvPr/>
+          </p:nvSpPr>
+          <p:spPr>
+            <a:xfrm>
+              <a:off x="1235312" y="4965054"/>
+              <a:ext cx="6964104" cy="512134"/>
+            </a:xfrm>
+            <a:custGeom>
+              <a:avLst/>
+              <a:pathLst>
+                <a:path w="6964104" h="512134">
+                  <a:moveTo>
+                    <a:pt x="0" y="0"/>
+                  </a:moveTo>
+                  <a:lnTo>
+                    <a:pt x="70344" y="10613"/>
+                  </a:lnTo>
+                  <a:lnTo>
+                    <a:pt x="140688" y="21047"/>
+                  </a:lnTo>
+                  <a:lnTo>
+                    <a:pt x="211033" y="31304"/>
+                  </a:lnTo>
+                  <a:lnTo>
+                    <a:pt x="281377" y="41389"/>
+                  </a:lnTo>
+                  <a:lnTo>
+                    <a:pt x="351722" y="51303"/>
+                  </a:lnTo>
+                  <a:lnTo>
+                    <a:pt x="422066" y="61050"/>
+                  </a:lnTo>
+                  <a:lnTo>
+                    <a:pt x="492411" y="70633"/>
+                  </a:lnTo>
+                  <a:lnTo>
+                    <a:pt x="562755" y="80053"/>
+                  </a:lnTo>
+                  <a:lnTo>
+                    <a:pt x="633100" y="89315"/>
+                  </a:lnTo>
+                  <a:lnTo>
+                    <a:pt x="703444" y="98420"/>
+                  </a:lnTo>
+                  <a:lnTo>
+                    <a:pt x="773789" y="107372"/>
+                  </a:lnTo>
+                  <a:lnTo>
+                    <a:pt x="844133" y="116172"/>
+                  </a:lnTo>
+                  <a:lnTo>
+                    <a:pt x="914478" y="124824"/>
+                  </a:lnTo>
+                  <a:lnTo>
+                    <a:pt x="984822" y="133330"/>
+                  </a:lnTo>
+                  <a:lnTo>
+                    <a:pt x="1055167" y="141692"/>
+                  </a:lnTo>
+                  <a:lnTo>
+                    <a:pt x="1125511" y="149913"/>
+                  </a:lnTo>
+                  <a:lnTo>
+                    <a:pt x="1195856" y="157995"/>
+                  </a:lnTo>
+                  <a:lnTo>
+                    <a:pt x="1266200" y="165941"/>
+                  </a:lnTo>
+                  <a:lnTo>
+                    <a:pt x="1336545" y="173752"/>
+                  </a:lnTo>
+                  <a:lnTo>
+                    <a:pt x="1406889" y="181432"/>
+                  </a:lnTo>
+                  <a:lnTo>
+                    <a:pt x="1477234" y="188982"/>
+                  </a:lnTo>
+                  <a:lnTo>
+                    <a:pt x="1547578" y="196404"/>
+                  </a:lnTo>
+                  <a:lnTo>
+                    <a:pt x="1617923" y="203702"/>
+                  </a:lnTo>
+                  <a:lnTo>
+                    <a:pt x="1688267" y="210876"/>
+                  </a:lnTo>
+                  <a:lnTo>
+                    <a:pt x="1758612" y="217929"/>
+                  </a:lnTo>
+                  <a:lnTo>
+                    <a:pt x="1828956" y="224863"/>
+                  </a:lnTo>
+                  <a:lnTo>
+                    <a:pt x="1899301" y="231679"/>
+                  </a:lnTo>
+                  <a:lnTo>
+                    <a:pt x="1969645" y="238381"/>
+                  </a:lnTo>
+                  <a:lnTo>
+                    <a:pt x="2039990" y="244970"/>
+                  </a:lnTo>
+                  <a:lnTo>
+                    <a:pt x="2110334" y="251447"/>
+                  </a:lnTo>
+                  <a:lnTo>
+                    <a:pt x="2180679" y="257815"/>
+                  </a:lnTo>
+                  <a:lnTo>
+                    <a:pt x="2251023" y="264075"/>
+                  </a:lnTo>
+                  <a:lnTo>
+                    <a:pt x="2321368" y="270230"/>
+                  </a:lnTo>
+                  <a:lnTo>
+                    <a:pt x="2391712" y="276281"/>
+                  </a:lnTo>
+                  <a:lnTo>
+                    <a:pt x="2462057" y="282230"/>
+                  </a:lnTo>
+                  <a:lnTo>
+                    <a:pt x="2532401" y="288078"/>
+                  </a:lnTo>
+                  <a:lnTo>
+                    <a:pt x="2602746" y="293828"/>
+                  </a:lnTo>
+                  <a:lnTo>
+                    <a:pt x="2673090" y="299480"/>
+                  </a:lnTo>
+                  <a:lnTo>
+                    <a:pt x="2743435" y="305037"/>
+                  </a:lnTo>
+                  <a:lnTo>
+                    <a:pt x="2813779" y="310500"/>
+                  </a:lnTo>
+                  <a:lnTo>
+                    <a:pt x="2884124" y="315871"/>
+                  </a:lnTo>
+                  <a:lnTo>
+                    <a:pt x="2954468" y="321152"/>
+                  </a:lnTo>
+                  <a:lnTo>
+                    <a:pt x="3024813" y="326343"/>
+                  </a:lnTo>
+                  <a:lnTo>
+                    <a:pt x="3095157" y="329778"/>
+                  </a:lnTo>
+                  <a:lnTo>
+                    <a:pt x="3165502" y="330911"/>
+                  </a:lnTo>
+                  <a:lnTo>
+                    <a:pt x="3235846" y="332039"/>
+                  </a:lnTo>
+                  <a:lnTo>
+                    <a:pt x="3306191" y="333163"/>
+                  </a:lnTo>
+                  <a:lnTo>
+                    <a:pt x="3376535" y="334283"/>
+                  </a:lnTo>
+                  <a:lnTo>
+                    <a:pt x="3446880" y="335399"/>
+                  </a:lnTo>
+                  <a:lnTo>
+                    <a:pt x="3517224" y="336510"/>
+                  </a:lnTo>
+                  <a:lnTo>
+                    <a:pt x="3587569" y="337617"/>
+                  </a:lnTo>
+                  <a:lnTo>
+                    <a:pt x="3657913" y="338720"/>
+                  </a:lnTo>
+                  <a:lnTo>
+                    <a:pt x="3728257" y="339819"/>
+                  </a:lnTo>
+                  <a:lnTo>
+                    <a:pt x="3798602" y="340914"/>
+                  </a:lnTo>
+                  <a:lnTo>
+                    <a:pt x="3868946" y="342004"/>
+                  </a:lnTo>
+                  <a:lnTo>
+                    <a:pt x="3939291" y="343090"/>
+                  </a:lnTo>
+                  <a:lnTo>
+                    <a:pt x="4009635" y="344172"/>
+                  </a:lnTo>
+                  <a:lnTo>
+                    <a:pt x="4079980" y="345251"/>
+                  </a:lnTo>
+                  <a:lnTo>
+                    <a:pt x="4150324" y="346325"/>
+                  </a:lnTo>
+                  <a:lnTo>
+                    <a:pt x="4220669" y="347394"/>
+                  </a:lnTo>
+                  <a:lnTo>
+                    <a:pt x="4291013" y="348460"/>
+                  </a:lnTo>
+                  <a:lnTo>
+                    <a:pt x="4361358" y="349522"/>
+                  </a:lnTo>
+                  <a:lnTo>
+                    <a:pt x="4431702" y="350580"/>
+                  </a:lnTo>
+                  <a:lnTo>
+                    <a:pt x="4502047" y="351634"/>
+                  </a:lnTo>
+                  <a:lnTo>
+                    <a:pt x="4572391" y="352684"/>
+                  </a:lnTo>
+                  <a:lnTo>
+                    <a:pt x="4642736" y="353729"/>
+                  </a:lnTo>
+                  <a:lnTo>
+                    <a:pt x="4713080" y="354771"/>
+                  </a:lnTo>
+                  <a:lnTo>
+                    <a:pt x="4783425" y="355809"/>
+                  </a:lnTo>
+                  <a:lnTo>
+                    <a:pt x="4853769" y="356843"/>
+                  </a:lnTo>
+                  <a:lnTo>
+                    <a:pt x="4924114" y="357873"/>
+                  </a:lnTo>
+                  <a:lnTo>
+                    <a:pt x="4994458" y="358899"/>
+                  </a:lnTo>
+                  <a:lnTo>
+                    <a:pt x="5064803" y="359922"/>
+                  </a:lnTo>
+                  <a:lnTo>
+                    <a:pt x="5135147" y="360940"/>
+                  </a:lnTo>
+                  <a:lnTo>
+                    <a:pt x="5205492" y="361955"/>
+                  </a:lnTo>
+                  <a:lnTo>
+                    <a:pt x="5275836" y="362965"/>
+                  </a:lnTo>
+                  <a:lnTo>
+                    <a:pt x="5346181" y="363972"/>
+                  </a:lnTo>
+                  <a:lnTo>
+                    <a:pt x="5416525" y="364975"/>
+                  </a:lnTo>
+                  <a:lnTo>
+                    <a:pt x="5486870" y="365974"/>
+                  </a:lnTo>
+                  <a:lnTo>
+                    <a:pt x="5557214" y="366970"/>
+                  </a:lnTo>
+                  <a:lnTo>
+                    <a:pt x="5627559" y="367962"/>
+                  </a:lnTo>
+                  <a:lnTo>
+                    <a:pt x="5697903" y="368949"/>
+                  </a:lnTo>
+                  <a:lnTo>
+                    <a:pt x="5768248" y="369934"/>
+                  </a:lnTo>
+                  <a:lnTo>
+                    <a:pt x="5838592" y="370914"/>
+                  </a:lnTo>
+                  <a:lnTo>
+                    <a:pt x="5908937" y="371891"/>
+                  </a:lnTo>
+                  <a:lnTo>
+                    <a:pt x="5979281" y="372864"/>
+                  </a:lnTo>
+                  <a:lnTo>
+                    <a:pt x="6049626" y="373833"/>
+                  </a:lnTo>
+                  <a:lnTo>
+                    <a:pt x="6119970" y="374799"/>
+                  </a:lnTo>
+                  <a:lnTo>
+                    <a:pt x="6190315" y="375761"/>
+                  </a:lnTo>
+                  <a:lnTo>
+                    <a:pt x="6260659" y="376719"/>
+                  </a:lnTo>
+                  <a:lnTo>
+                    <a:pt x="6331004" y="377674"/>
+                  </a:lnTo>
+                  <a:lnTo>
+                    <a:pt x="6401348" y="378625"/>
+                  </a:lnTo>
+                  <a:lnTo>
+                    <a:pt x="6471693" y="379573"/>
+                  </a:lnTo>
+                  <a:lnTo>
+                    <a:pt x="6542037" y="380517"/>
+                  </a:lnTo>
+                  <a:lnTo>
+                    <a:pt x="6612382" y="381457"/>
+                  </a:lnTo>
+                  <a:lnTo>
+                    <a:pt x="6682726" y="382394"/>
+                  </a:lnTo>
+                  <a:lnTo>
+                    <a:pt x="6753071" y="383327"/>
+                  </a:lnTo>
+                  <a:lnTo>
+                    <a:pt x="6823415" y="384257"/>
+                  </a:lnTo>
+                  <a:lnTo>
+                    <a:pt x="6893760" y="385183"/>
+                  </a:lnTo>
+                  <a:lnTo>
+                    <a:pt x="6964104" y="386105"/>
+                  </a:lnTo>
+                  <a:lnTo>
+                    <a:pt x="6964104" y="512134"/>
+                  </a:lnTo>
+                  <a:lnTo>
+                    <a:pt x="6893760" y="510134"/>
+                  </a:lnTo>
+                  <a:lnTo>
+                    <a:pt x="6823415" y="508099"/>
+                  </a:lnTo>
+                  <a:lnTo>
+                    <a:pt x="6753071" y="506029"/>
+                  </a:lnTo>
+                  <a:lnTo>
+                    <a:pt x="6682726" y="503923"/>
+                  </a:lnTo>
+                  <a:lnTo>
+                    <a:pt x="6612382" y="501782"/>
+                  </a:lnTo>
+                  <a:lnTo>
+                    <a:pt x="6542037" y="499603"/>
+                  </a:lnTo>
+                  <a:lnTo>
+                    <a:pt x="6471693" y="497388"/>
+                  </a:lnTo>
+                  <a:lnTo>
+                    <a:pt x="6401348" y="495134"/>
+                  </a:lnTo>
+                  <a:lnTo>
+                    <a:pt x="6331004" y="492841"/>
+                  </a:lnTo>
+                  <a:lnTo>
+                    <a:pt x="6260659" y="490509"/>
+                  </a:lnTo>
+                  <a:lnTo>
+                    <a:pt x="6190315" y="488137"/>
+                  </a:lnTo>
+                  <a:lnTo>
+                    <a:pt x="6119970" y="485725"/>
+                  </a:lnTo>
+                  <a:lnTo>
+                    <a:pt x="6049626" y="483271"/>
+                  </a:lnTo>
+                  <a:lnTo>
+                    <a:pt x="5979281" y="480774"/>
+                  </a:lnTo>
+                  <a:lnTo>
+                    <a:pt x="5908937" y="478235"/>
+                  </a:lnTo>
+                  <a:lnTo>
+                    <a:pt x="5838592" y="475653"/>
+                  </a:lnTo>
+                  <a:lnTo>
+                    <a:pt x="5768248" y="473025"/>
+                  </a:lnTo>
+                  <a:lnTo>
+                    <a:pt x="5697903" y="470353"/>
+                  </a:lnTo>
+                  <a:lnTo>
+                    <a:pt x="5627559" y="467635"/>
+                  </a:lnTo>
+                  <a:lnTo>
+                    <a:pt x="5557214" y="464870"/>
+                  </a:lnTo>
+                  <a:lnTo>
+                    <a:pt x="5486870" y="462058"/>
+                  </a:lnTo>
+                  <a:lnTo>
+                    <a:pt x="5416525" y="459198"/>
+                  </a:lnTo>
+                  <a:lnTo>
+                    <a:pt x="5346181" y="456288"/>
+                  </a:lnTo>
+                  <a:lnTo>
+                    <a:pt x="5275836" y="453328"/>
+                  </a:lnTo>
+                  <a:lnTo>
+                    <a:pt x="5205492" y="450318"/>
+                  </a:lnTo>
+                  <a:lnTo>
+                    <a:pt x="5135147" y="447256"/>
+                  </a:lnTo>
+                  <a:lnTo>
+                    <a:pt x="5064803" y="444141"/>
+                  </a:lnTo>
+                  <a:lnTo>
+                    <a:pt x="4994458" y="440973"/>
+                  </a:lnTo>
+                  <a:lnTo>
+                    <a:pt x="4924114" y="437750"/>
+                  </a:lnTo>
+                  <a:lnTo>
+                    <a:pt x="4853769" y="434472"/>
+                  </a:lnTo>
+                  <a:lnTo>
+                    <a:pt x="4783425" y="431138"/>
+                  </a:lnTo>
+                  <a:lnTo>
+                    <a:pt x="4713080" y="427746"/>
+                  </a:lnTo>
+                  <a:lnTo>
+                    <a:pt x="4642736" y="424297"/>
+                  </a:lnTo>
+                  <a:lnTo>
+                    <a:pt x="4572391" y="420788"/>
+                  </a:lnTo>
+                  <a:lnTo>
+                    <a:pt x="4502047" y="417218"/>
+                  </a:lnTo>
+                  <a:lnTo>
+                    <a:pt x="4431702" y="413588"/>
+                  </a:lnTo>
+                  <a:lnTo>
+                    <a:pt x="4361358" y="409895"/>
+                  </a:lnTo>
+                  <a:lnTo>
+                    <a:pt x="4291013" y="406138"/>
+                  </a:lnTo>
+                  <a:lnTo>
+                    <a:pt x="4220669" y="402318"/>
+                  </a:lnTo>
+                  <a:lnTo>
+                    <a:pt x="4150324" y="398431"/>
+                  </a:lnTo>
+                  <a:lnTo>
+                    <a:pt x="4079980" y="394478"/>
+                  </a:lnTo>
+                  <a:lnTo>
+                    <a:pt x="4009635" y="390457"/>
+                  </a:lnTo>
+                  <a:lnTo>
+                    <a:pt x="3939291" y="386367"/>
+                  </a:lnTo>
+                  <a:lnTo>
+                    <a:pt x="3868946" y="382206"/>
+                  </a:lnTo>
+                  <a:lnTo>
+                    <a:pt x="3798602" y="377975"/>
+                  </a:lnTo>
+                  <a:lnTo>
+                    <a:pt x="3728257" y="373670"/>
+                  </a:lnTo>
+                  <a:lnTo>
+                    <a:pt x="3657913" y="369292"/>
+                  </a:lnTo>
+                  <a:lnTo>
+                    <a:pt x="3587569" y="364838"/>
+                  </a:lnTo>
+                  <a:lnTo>
+                    <a:pt x="3517224" y="360308"/>
+                  </a:lnTo>
+                  <a:lnTo>
+                    <a:pt x="3446880" y="355700"/>
+                  </a:lnTo>
+                  <a:lnTo>
+                    <a:pt x="3376535" y="351013"/>
+                  </a:lnTo>
+                  <a:lnTo>
+                    <a:pt x="3306191" y="346246"/>
+                  </a:lnTo>
+                  <a:lnTo>
+                    <a:pt x="3235846" y="341396"/>
+                  </a:lnTo>
+                  <a:lnTo>
+                    <a:pt x="3165502" y="336464"/>
+                  </a:lnTo>
+                  <a:lnTo>
+                    <a:pt x="3095157" y="331446"/>
+                  </a:lnTo>
+                  <a:lnTo>
+                    <a:pt x="3024813" y="328641"/>
+                  </a:lnTo>
+                  <a:lnTo>
+                    <a:pt x="2954468" y="327500"/>
+                  </a:lnTo>
+                  <a:lnTo>
+                    <a:pt x="2884124" y="326355"/>
+                  </a:lnTo>
+                  <a:lnTo>
+                    <a:pt x="2813779" y="325205"/>
+                  </a:lnTo>
+                  <a:lnTo>
+                    <a:pt x="2743435" y="324050"/>
+                  </a:lnTo>
+                  <a:lnTo>
+                    <a:pt x="2673090" y="322892"/>
+                  </a:lnTo>
+                  <a:lnTo>
+                    <a:pt x="2602746" y="321728"/>
+                  </a:lnTo>
+                  <a:lnTo>
+                    <a:pt x="2532401" y="320561"/>
+                  </a:lnTo>
+                  <a:lnTo>
+                    <a:pt x="2462057" y="319389"/>
+                  </a:lnTo>
+                  <a:lnTo>
+                    <a:pt x="2391712" y="318212"/>
+                  </a:lnTo>
+                  <a:lnTo>
+                    <a:pt x="2321368" y="317031"/>
+                  </a:lnTo>
+                  <a:lnTo>
+                    <a:pt x="2251023" y="315846"/>
+                  </a:lnTo>
+                  <a:lnTo>
+                    <a:pt x="2180679" y="314656"/>
+                  </a:lnTo>
+                  <a:lnTo>
+                    <a:pt x="2110334" y="313461"/>
+                  </a:lnTo>
+                  <a:lnTo>
+                    <a:pt x="2039990" y="312262"/>
+                  </a:lnTo>
+                  <a:lnTo>
+                    <a:pt x="1969645" y="311059"/>
+                  </a:lnTo>
+                  <a:lnTo>
+                    <a:pt x="1899301" y="309851"/>
+                  </a:lnTo>
+                  <a:lnTo>
+                    <a:pt x="1828956" y="308638"/>
+                  </a:lnTo>
+                  <a:lnTo>
+                    <a:pt x="1758612" y="307421"/>
+                  </a:lnTo>
+                  <a:lnTo>
+                    <a:pt x="1688267" y="306199"/>
+                  </a:lnTo>
+                  <a:lnTo>
+                    <a:pt x="1617923" y="304972"/>
+                  </a:lnTo>
+                  <a:lnTo>
+                    <a:pt x="1547578" y="303741"/>
+                  </a:lnTo>
+                  <a:lnTo>
+                    <a:pt x="1477234" y="302505"/>
+                  </a:lnTo>
+                  <a:lnTo>
+                    <a:pt x="1406889" y="301264"/>
+                  </a:lnTo>
+                  <a:lnTo>
+                    <a:pt x="1336545" y="300019"/>
+                  </a:lnTo>
+                  <a:lnTo>
+                    <a:pt x="1266200" y="298768"/>
+                  </a:lnTo>
+                  <a:lnTo>
+                    <a:pt x="1195856" y="297513"/>
+                  </a:lnTo>
+                  <a:lnTo>
+                    <a:pt x="1125511" y="296254"/>
+                  </a:lnTo>
+                  <a:lnTo>
+                    <a:pt x="1055167" y="294989"/>
+                  </a:lnTo>
+                  <a:lnTo>
+                    <a:pt x="984822" y="293720"/>
+                  </a:lnTo>
+                  <a:lnTo>
+                    <a:pt x="914478" y="292446"/>
+                  </a:lnTo>
+                  <a:lnTo>
+                    <a:pt x="844133" y="291167"/>
+                  </a:lnTo>
+                  <a:lnTo>
+                    <a:pt x="773789" y="289883"/>
+                  </a:lnTo>
+                  <a:lnTo>
+                    <a:pt x="703444" y="288594"/>
+                  </a:lnTo>
+                  <a:lnTo>
+                    <a:pt x="633100" y="287301"/>
+                  </a:lnTo>
+                  <a:lnTo>
+                    <a:pt x="562755" y="286002"/>
+                  </a:lnTo>
+                  <a:lnTo>
+                    <a:pt x="492411" y="284699"/>
+                  </a:lnTo>
+                  <a:lnTo>
+                    <a:pt x="422066" y="283390"/>
+                  </a:lnTo>
+                  <a:lnTo>
+                    <a:pt x="351722" y="282077"/>
+                  </a:lnTo>
+                  <a:lnTo>
+                    <a:pt x="281377" y="280758"/>
+                  </a:lnTo>
+                  <a:lnTo>
+                    <a:pt x="211033" y="279435"/>
+                  </a:lnTo>
+                  <a:lnTo>
+                    <a:pt x="140688" y="278106"/>
+                  </a:lnTo>
+                  <a:lnTo>
+                    <a:pt x="70344" y="276773"/>
+                  </a:lnTo>
+                  <a:lnTo>
+                    <a:pt x="0" y="275434"/>
+                  </a:lnTo>
+                  <a:close/>
+                </a:path>
+              </a:pathLst>
+            </a:custGeom>
+            <a:solidFill>
+              <a:srgbClr val="FF8C00">
+                <a:alpha val="20000"/>
+              </a:srgbClr>
+            </a:solidFill>
+          </p:spPr>
+          <p:txBody>
+            <a:bodyPr/>
+            <a:lstStyle/>
+            <a:p/>
+          </p:txBody>
+        </p:sp>
+        <p:sp>
+          <p:nvSpPr>
+            <p:cNvPr id="72" name="pl72"/>
+            <p:cNvSpPr/>
+            <p:nvPr/>
+          </p:nvSpPr>
+          <p:spPr>
+            <a:xfrm>
+              <a:off x="1235312" y="4965054"/>
+              <a:ext cx="6964104" cy="386105"/>
+            </a:xfrm>
+            <a:custGeom>
+              <a:avLst/>
+              <a:pathLst>
+                <a:path w="6964104" h="386105">
+                  <a:moveTo>
+                    <a:pt x="0" y="0"/>
+                  </a:moveTo>
+                  <a:lnTo>
+                    <a:pt x="70344" y="10613"/>
+                  </a:lnTo>
+                  <a:lnTo>
+                    <a:pt x="140688" y="21047"/>
+                  </a:lnTo>
+                  <a:lnTo>
+                    <a:pt x="211033" y="31304"/>
+                  </a:lnTo>
+                  <a:lnTo>
+                    <a:pt x="281377" y="41389"/>
+                  </a:lnTo>
+                  <a:lnTo>
+                    <a:pt x="351722" y="51303"/>
+                  </a:lnTo>
+                  <a:lnTo>
+                    <a:pt x="422066" y="61050"/>
+                  </a:lnTo>
+                  <a:lnTo>
+                    <a:pt x="492411" y="70633"/>
+                  </a:lnTo>
+                  <a:lnTo>
+                    <a:pt x="562755" y="80053"/>
+                  </a:lnTo>
+                  <a:lnTo>
+                    <a:pt x="633100" y="89315"/>
+                  </a:lnTo>
+                  <a:lnTo>
+                    <a:pt x="703444" y="98420"/>
+                  </a:lnTo>
+                  <a:lnTo>
+                    <a:pt x="773789" y="107372"/>
+                  </a:lnTo>
+                  <a:lnTo>
+                    <a:pt x="844133" y="116172"/>
+                  </a:lnTo>
+                  <a:lnTo>
+                    <a:pt x="914478" y="124824"/>
+                  </a:lnTo>
+                  <a:lnTo>
+                    <a:pt x="984822" y="133330"/>
+                  </a:lnTo>
+                  <a:lnTo>
+                    <a:pt x="1055167" y="141692"/>
+                  </a:lnTo>
+                  <a:lnTo>
+                    <a:pt x="1125511" y="149913"/>
+                  </a:lnTo>
+                  <a:lnTo>
+                    <a:pt x="1195856" y="157995"/>
+                  </a:lnTo>
+                  <a:lnTo>
+                    <a:pt x="1266200" y="165941"/>
+                  </a:lnTo>
+                  <a:lnTo>
+                    <a:pt x="1336545" y="173752"/>
+                  </a:lnTo>
+                  <a:lnTo>
+                    <a:pt x="1406889" y="181432"/>
+                  </a:lnTo>
+                  <a:lnTo>
+                    <a:pt x="1477234" y="188982"/>
+                  </a:lnTo>
+                  <a:lnTo>
+                    <a:pt x="1547578" y="196404"/>
+                  </a:lnTo>
+                  <a:lnTo>
+                    <a:pt x="1617923" y="203702"/>
+                  </a:lnTo>
+                  <a:lnTo>
+                    <a:pt x="1688267" y="210876"/>
+                  </a:lnTo>
+                  <a:lnTo>
+                    <a:pt x="1758612" y="217929"/>
+                  </a:lnTo>
+                  <a:lnTo>
+                    <a:pt x="1828956" y="224863"/>
+                  </a:lnTo>
+                  <a:lnTo>
+                    <a:pt x="1899301" y="231679"/>
+                  </a:lnTo>
+                  <a:lnTo>
+                    <a:pt x="1969645" y="238381"/>
+                  </a:lnTo>
+                  <a:lnTo>
+                    <a:pt x="2039990" y="244970"/>
+                  </a:lnTo>
+                  <a:lnTo>
+                    <a:pt x="2110334" y="251447"/>
+                  </a:lnTo>
+                  <a:lnTo>
+                    <a:pt x="2180679" y="257815"/>
+                  </a:lnTo>
+                  <a:lnTo>
+                    <a:pt x="2251023" y="264075"/>
+                  </a:lnTo>
+                  <a:lnTo>
+                    <a:pt x="2321368" y="270230"/>
+                  </a:lnTo>
+                  <a:lnTo>
+                    <a:pt x="2391712" y="276281"/>
+                  </a:lnTo>
+                  <a:lnTo>
+                    <a:pt x="2462057" y="282230"/>
+                  </a:lnTo>
+                  <a:lnTo>
+                    <a:pt x="2532401" y="288078"/>
+                  </a:lnTo>
+                  <a:lnTo>
+                    <a:pt x="2602746" y="293828"/>
+                  </a:lnTo>
+                  <a:lnTo>
+                    <a:pt x="2673090" y="299480"/>
+                  </a:lnTo>
+                  <a:lnTo>
+                    <a:pt x="2743435" y="305037"/>
+                  </a:lnTo>
+                  <a:lnTo>
+                    <a:pt x="2813779" y="310500"/>
+                  </a:lnTo>
+                  <a:lnTo>
+                    <a:pt x="2884124" y="315871"/>
+                  </a:lnTo>
+                  <a:lnTo>
+                    <a:pt x="2954468" y="321152"/>
+                  </a:lnTo>
+                  <a:lnTo>
+                    <a:pt x="3024813" y="326343"/>
+                  </a:lnTo>
+                  <a:lnTo>
+                    <a:pt x="3095157" y="329778"/>
+                  </a:lnTo>
+                  <a:lnTo>
+                    <a:pt x="3165502" y="330911"/>
+                  </a:lnTo>
+                  <a:lnTo>
+                    <a:pt x="3235846" y="332039"/>
+                  </a:lnTo>
+                  <a:lnTo>
+                    <a:pt x="3306191" y="333163"/>
+                  </a:lnTo>
+                  <a:lnTo>
+                    <a:pt x="3376535" y="334283"/>
+                  </a:lnTo>
+                  <a:lnTo>
+                    <a:pt x="3446880" y="335399"/>
+                  </a:lnTo>
+                  <a:lnTo>
+                    <a:pt x="3517224" y="336510"/>
+                  </a:lnTo>
+                  <a:lnTo>
+                    <a:pt x="3587569" y="337617"/>
+                  </a:lnTo>
+                  <a:lnTo>
+                    <a:pt x="3657913" y="338720"/>
+                  </a:lnTo>
+                  <a:lnTo>
+                    <a:pt x="3728257" y="339819"/>
+                  </a:lnTo>
+                  <a:lnTo>
+                    <a:pt x="3798602" y="340914"/>
+                  </a:lnTo>
+                  <a:lnTo>
+                    <a:pt x="3868946" y="342004"/>
+                  </a:lnTo>
+                  <a:lnTo>
+                    <a:pt x="3939291" y="343090"/>
+                  </a:lnTo>
+                  <a:lnTo>
+                    <a:pt x="4009635" y="344172"/>
+                  </a:lnTo>
+                  <a:lnTo>
+                    <a:pt x="4079980" y="345251"/>
+                  </a:lnTo>
+                  <a:lnTo>
+                    <a:pt x="4150324" y="346325"/>
+                  </a:lnTo>
+                  <a:lnTo>
+                    <a:pt x="4220669" y="347394"/>
+                  </a:lnTo>
+                  <a:lnTo>
+                    <a:pt x="4291013" y="348460"/>
+                  </a:lnTo>
+                  <a:lnTo>
+                    <a:pt x="4361358" y="349522"/>
+                  </a:lnTo>
+                  <a:lnTo>
+                    <a:pt x="4431702" y="350580"/>
+                  </a:lnTo>
+                  <a:lnTo>
+                    <a:pt x="4502047" y="351634"/>
+                  </a:lnTo>
+                  <a:lnTo>
+                    <a:pt x="4572391" y="352684"/>
+                  </a:lnTo>
+                  <a:lnTo>
+                    <a:pt x="4642736" y="353729"/>
+                  </a:lnTo>
+                  <a:lnTo>
+                    <a:pt x="4713080" y="354771"/>
+                  </a:lnTo>
+                  <a:lnTo>
+                    <a:pt x="4783425" y="355809"/>
+                  </a:lnTo>
+                  <a:lnTo>
+                    <a:pt x="4853769" y="356843"/>
+                  </a:lnTo>
+                  <a:lnTo>
+                    <a:pt x="4924114" y="357873"/>
+                  </a:lnTo>
+                  <a:lnTo>
+                    <a:pt x="4994458" y="358899"/>
+                  </a:lnTo>
+                  <a:lnTo>
+                    <a:pt x="5064803" y="359922"/>
+                  </a:lnTo>
+                  <a:lnTo>
+                    <a:pt x="5135147" y="360940"/>
+                  </a:lnTo>
+                  <a:lnTo>
+                    <a:pt x="5205492" y="361955"/>
+                  </a:lnTo>
+                  <a:lnTo>
+                    <a:pt x="5275836" y="362965"/>
+                  </a:lnTo>
+                  <a:lnTo>
+                    <a:pt x="5346181" y="363972"/>
+                  </a:lnTo>
+                  <a:lnTo>
+                    <a:pt x="5416525" y="364975"/>
+                  </a:lnTo>
+                  <a:lnTo>
+                    <a:pt x="5486870" y="365974"/>
+                  </a:lnTo>
+                  <a:lnTo>
+                    <a:pt x="5557214" y="366970"/>
+                  </a:lnTo>
+                  <a:lnTo>
+                    <a:pt x="5627559" y="367962"/>
+                  </a:lnTo>
+                  <a:lnTo>
+                    <a:pt x="5697903" y="368949"/>
+                  </a:lnTo>
+                  <a:lnTo>
+                    <a:pt x="5768248" y="369934"/>
+                  </a:lnTo>
+                  <a:lnTo>
+                    <a:pt x="5838592" y="370914"/>
+                  </a:lnTo>
+                  <a:lnTo>
+                    <a:pt x="5908937" y="371891"/>
+                  </a:lnTo>
+                  <a:lnTo>
+                    <a:pt x="5979281" y="372864"/>
+                  </a:lnTo>
+                  <a:lnTo>
+                    <a:pt x="6049626" y="373833"/>
+                  </a:lnTo>
+                  <a:lnTo>
+                    <a:pt x="6119970" y="374799"/>
+                  </a:lnTo>
+                  <a:lnTo>
+                    <a:pt x="6190315" y="375761"/>
+                  </a:lnTo>
+                  <a:lnTo>
+                    <a:pt x="6260659" y="376719"/>
+                  </a:lnTo>
+                  <a:lnTo>
+                    <a:pt x="6331004" y="377674"/>
+                  </a:lnTo>
+                  <a:lnTo>
+                    <a:pt x="6401348" y="378625"/>
+                  </a:lnTo>
+                  <a:lnTo>
+                    <a:pt x="6471693" y="379573"/>
+                  </a:lnTo>
+                  <a:lnTo>
+                    <a:pt x="6542037" y="380517"/>
+                  </a:lnTo>
+                  <a:lnTo>
+                    <a:pt x="6612382" y="381457"/>
+                  </a:lnTo>
+                  <a:lnTo>
+                    <a:pt x="6682726" y="382394"/>
+                  </a:lnTo>
+                  <a:lnTo>
+                    <a:pt x="6753071" y="383327"/>
+                  </a:lnTo>
+                  <a:lnTo>
+                    <a:pt x="6823415" y="384257"/>
+                  </a:lnTo>
+                  <a:lnTo>
+                    <a:pt x="6893760" y="385183"/>
+                  </a:lnTo>
+                  <a:lnTo>
+                    <a:pt x="6964104" y="386105"/>
+                  </a:lnTo>
+                </a:path>
+              </a:pathLst>
+            </a:custGeom>
+          </p:spPr>
+          <p:txBody>
+            <a:bodyPr/>
+            <a:lstStyle/>
+            <a:p/>
+          </p:txBody>
+        </p:sp>
+        <p:sp>
+          <p:nvSpPr>
+            <p:cNvPr id="73" name="pl73"/>
+            <p:cNvSpPr/>
+            <p:nvPr/>
+          </p:nvSpPr>
+          <p:spPr>
+            <a:xfrm>
+              <a:off x="1235312" y="5240489"/>
+              <a:ext cx="6964104" cy="236699"/>
+            </a:xfrm>
+            <a:custGeom>
+              <a:avLst/>
+              <a:pathLst>
+                <a:path w="6964104" h="236699">
+                  <a:moveTo>
+                    <a:pt x="6964104" y="236699"/>
+                  </a:moveTo>
+                  <a:lnTo>
+                    <a:pt x="6893760" y="234699"/>
+                  </a:lnTo>
+                  <a:lnTo>
+                    <a:pt x="6823415" y="232664"/>
+                  </a:lnTo>
+                  <a:lnTo>
+                    <a:pt x="6753071" y="230594"/>
+                  </a:lnTo>
+                  <a:lnTo>
+                    <a:pt x="6682726" y="228489"/>
+                  </a:lnTo>
+                  <a:lnTo>
+                    <a:pt x="6612382" y="226347"/>
+                  </a:lnTo>
+                  <a:lnTo>
+                    <a:pt x="6542037" y="224169"/>
+                  </a:lnTo>
+                  <a:lnTo>
+                    <a:pt x="6471693" y="221953"/>
+                  </a:lnTo>
+                  <a:lnTo>
+                    <a:pt x="6401348" y="219699"/>
+                  </a:lnTo>
+                  <a:lnTo>
+                    <a:pt x="6331004" y="217406"/>
+                  </a:lnTo>
+                  <a:lnTo>
+                    <a:pt x="6260659" y="215075"/>
+                  </a:lnTo>
+                  <a:lnTo>
+                    <a:pt x="6190315" y="212703"/>
+                  </a:lnTo>
+                  <a:lnTo>
+                    <a:pt x="6119970" y="210290"/>
+                  </a:lnTo>
+                  <a:lnTo>
+                    <a:pt x="6049626" y="207836"/>
+                  </a:lnTo>
+                  <a:lnTo>
+                    <a:pt x="5979281" y="205340"/>
+                  </a:lnTo>
+                  <a:lnTo>
+                    <a:pt x="5908937" y="202800"/>
+                  </a:lnTo>
+                  <a:lnTo>
+                    <a:pt x="5838592" y="200218"/>
+                  </a:lnTo>
+                  <a:lnTo>
+                    <a:pt x="5768248" y="197591"/>
+                  </a:lnTo>
+                  <a:lnTo>
+                    <a:pt x="5697903" y="194918"/>
+                  </a:lnTo>
+                  <a:lnTo>
+                    <a:pt x="5627559" y="192200"/>
+                  </a:lnTo>
+                  <a:lnTo>
+                    <a:pt x="5557214" y="189436"/>
+                  </a:lnTo>
+                  <a:lnTo>
+                    <a:pt x="5486870" y="186623"/>
+                  </a:lnTo>
+                  <a:lnTo>
+                    <a:pt x="5416525" y="183763"/>
+                  </a:lnTo>
+                  <a:lnTo>
+                    <a:pt x="5346181" y="180853"/>
+                  </a:lnTo>
+                  <a:lnTo>
+                    <a:pt x="5275836" y="177893"/>
+                  </a:lnTo>
+                  <a:lnTo>
+                    <a:pt x="5205492" y="174883"/>
+                  </a:lnTo>
+                  <a:lnTo>
+                    <a:pt x="5135147" y="171821"/>
+                  </a:lnTo>
+                  <a:lnTo>
+                    <a:pt x="5064803" y="168706"/>
+                  </a:lnTo>
+                  <a:lnTo>
+                    <a:pt x="4994458" y="165538"/>
+                  </a:lnTo>
+                  <a:lnTo>
+                    <a:pt x="4924114" y="162315"/>
+                  </a:lnTo>
+                  <a:lnTo>
+                    <a:pt x="4853769" y="159037"/>
+                  </a:lnTo>
+                  <a:lnTo>
+                    <a:pt x="4783425" y="155703"/>
+                  </a:lnTo>
+                  <a:lnTo>
+                    <a:pt x="4713080" y="152311"/>
+                  </a:lnTo>
+                  <a:lnTo>
+                    <a:pt x="4642736" y="148862"/>
+                  </a:lnTo>
+                  <a:lnTo>
+                    <a:pt x="4572391" y="145353"/>
+                  </a:lnTo>
+                  <a:lnTo>
+                    <a:pt x="4502047" y="141783"/>
+                  </a:lnTo>
+                  <a:lnTo>
+                    <a:pt x="4431702" y="138153"/>
+                  </a:lnTo>
+                  <a:lnTo>
+                    <a:pt x="4361358" y="134460"/>
+                  </a:lnTo>
+                  <a:lnTo>
+                    <a:pt x="4291013" y="130704"/>
+                  </a:lnTo>
+                  <a:lnTo>
+                    <a:pt x="4220669" y="126883"/>
+                  </a:lnTo>
+                  <a:lnTo>
+                    <a:pt x="4150324" y="122996"/>
+                  </a:lnTo>
+                  <a:lnTo>
+                    <a:pt x="4079980" y="119043"/>
+                  </a:lnTo>
+                  <a:lnTo>
+                    <a:pt x="4009635" y="115022"/>
+                  </a:lnTo>
+                  <a:lnTo>
+                    <a:pt x="3939291" y="110932"/>
+                  </a:lnTo>
+                  <a:lnTo>
+                    <a:pt x="3868946" y="106772"/>
+                  </a:lnTo>
+                  <a:lnTo>
+                    <a:pt x="3798602" y="102540"/>
+                  </a:lnTo>
+                  <a:lnTo>
+                    <a:pt x="3728257" y="98235"/>
+                  </a:lnTo>
+                  <a:lnTo>
+                    <a:pt x="3657913" y="93857"/>
+                  </a:lnTo>
+                  <a:lnTo>
+                    <a:pt x="3587569" y="89403"/>
+                  </a:lnTo>
+                  <a:lnTo>
+                    <a:pt x="3517224" y="84873"/>
+                  </a:lnTo>
+                  <a:lnTo>
+                    <a:pt x="3446880" y="80265"/>
+                  </a:lnTo>
+                  <a:lnTo>
+                    <a:pt x="3376535" y="75578"/>
+                  </a:lnTo>
+                  <a:lnTo>
+                    <a:pt x="3306191" y="70811"/>
+                  </a:lnTo>
+                  <a:lnTo>
+                    <a:pt x="3235846" y="65961"/>
+                  </a:lnTo>
+                  <a:lnTo>
+                    <a:pt x="3165502" y="61029"/>
+                  </a:lnTo>
+                  <a:lnTo>
+                    <a:pt x="3095157" y="56011"/>
+                  </a:lnTo>
+                  <a:lnTo>
+                    <a:pt x="3024813" y="53207"/>
+                  </a:lnTo>
+                  <a:lnTo>
+                    <a:pt x="2954468" y="52065"/>
+                  </a:lnTo>
+                  <a:lnTo>
+                    <a:pt x="2884124" y="50920"/>
+                  </a:lnTo>
+                  <a:lnTo>
+                    <a:pt x="2813779" y="49770"/>
+                  </a:lnTo>
+                  <a:lnTo>
+                    <a:pt x="2743435" y="48615"/>
+                  </a:lnTo>
+                  <a:lnTo>
+                    <a:pt x="2673090" y="47457"/>
+                  </a:lnTo>
+                  <a:lnTo>
+                    <a:pt x="2602746" y="46294"/>
+                  </a:lnTo>
+                  <a:lnTo>
+                    <a:pt x="2532401" y="45126"/>
+                  </a:lnTo>
+                  <a:lnTo>
+                    <a:pt x="2462057" y="43954"/>
+                  </a:lnTo>
+                  <a:lnTo>
+                    <a:pt x="2391712" y="42777"/>
+                  </a:lnTo>
+                  <a:lnTo>
+                    <a:pt x="2321368" y="41597"/>
+                  </a:lnTo>
+                  <a:lnTo>
+                    <a:pt x="2251023" y="40411"/>
+                  </a:lnTo>
+                  <a:lnTo>
+                    <a:pt x="2180679" y="39221"/>
+                  </a:lnTo>
+                  <a:lnTo>
+                    <a:pt x="2110334" y="38027"/>
+                  </a:lnTo>
+                  <a:lnTo>
+                    <a:pt x="2039990" y="36828"/>
+                  </a:lnTo>
+                  <a:lnTo>
+                    <a:pt x="1969645" y="35624"/>
+                  </a:lnTo>
+                  <a:lnTo>
+                    <a:pt x="1899301" y="34416"/>
+                  </a:lnTo>
+                  <a:lnTo>
+                    <a:pt x="1828956" y="33203"/>
+                  </a:lnTo>
+                  <a:lnTo>
+                    <a:pt x="1758612" y="31986"/>
+                  </a:lnTo>
+                  <a:lnTo>
+                    <a:pt x="1688267" y="30764"/>
+                  </a:lnTo>
+                  <a:lnTo>
+                    <a:pt x="1617923" y="29537"/>
+                  </a:lnTo>
+                  <a:lnTo>
+                    <a:pt x="1547578" y="28306"/>
+                  </a:lnTo>
+                  <a:lnTo>
+                    <a:pt x="1477234" y="27070"/>
+                  </a:lnTo>
+                  <a:lnTo>
+                    <a:pt x="1406889" y="25829"/>
+                  </a:lnTo>
+                  <a:lnTo>
+                    <a:pt x="1336545" y="24584"/>
+                  </a:lnTo>
+                  <a:lnTo>
+                    <a:pt x="1266200" y="23334"/>
+                  </a:lnTo>
+                  <a:lnTo>
+                    <a:pt x="1195856" y="22079"/>
+                  </a:lnTo>
+                  <a:lnTo>
+                    <a:pt x="1125511" y="20819"/>
+                  </a:lnTo>
+                  <a:lnTo>
+                    <a:pt x="1055167" y="19554"/>
+                  </a:lnTo>
+                  <a:lnTo>
+                    <a:pt x="984822" y="18285"/>
+                  </a:lnTo>
+                  <a:lnTo>
+                    <a:pt x="914478" y="17011"/>
+                  </a:lnTo>
+                  <a:lnTo>
+                    <a:pt x="844133" y="15732"/>
+                  </a:lnTo>
+                  <a:lnTo>
+                    <a:pt x="773789" y="14448"/>
+                  </a:lnTo>
+                  <a:lnTo>
+                    <a:pt x="703444" y="13159"/>
+                  </a:lnTo>
+                  <a:lnTo>
+                    <a:pt x="633100" y="11866"/>
+                  </a:lnTo>
+                  <a:lnTo>
+                    <a:pt x="562755" y="10567"/>
+                  </a:lnTo>
+                  <a:lnTo>
+                    <a:pt x="492411" y="9264"/>
+                  </a:lnTo>
+                  <a:lnTo>
+                    <a:pt x="422066" y="7955"/>
+                  </a:lnTo>
+                  <a:lnTo>
+                    <a:pt x="351722" y="6642"/>
+                  </a:lnTo>
+                  <a:lnTo>
+                    <a:pt x="281377" y="5324"/>
+                  </a:lnTo>
+                  <a:lnTo>
+                    <a:pt x="211033" y="4000"/>
+                  </a:lnTo>
+                  <a:lnTo>
+                    <a:pt x="140688" y="2672"/>
+                  </a:lnTo>
+                  <a:lnTo>
+                    <a:pt x="70344" y="1338"/>
+                  </a:lnTo>
+                  <a:lnTo>
+                    <a:pt x="0" y="0"/>
+                  </a:lnTo>
+                </a:path>
+              </a:pathLst>
+            </a:custGeom>
+          </p:spPr>
+          <p:txBody>
+            <a:bodyPr/>
+            <a:lstStyle/>
+            <a:p/>
+          </p:txBody>
+        </p:sp>
+        <p:sp>
+          <p:nvSpPr>
+            <p:cNvPr id="74" name="pl74"/>
+            <p:cNvSpPr/>
+            <p:nvPr/>
+          </p:nvSpPr>
+          <p:spPr>
+            <a:xfrm>
+              <a:off x="1235312" y="5122484"/>
+              <a:ext cx="6964104" cy="303113"/>
+            </a:xfrm>
+            <a:custGeom>
+              <a:avLst/>
+              <a:pathLst>
+                <a:path w="6964104" h="303113">
+                  <a:moveTo>
+                    <a:pt x="0" y="0"/>
+                  </a:moveTo>
+                  <a:lnTo>
+                    <a:pt x="70344" y="4880"/>
+                  </a:lnTo>
+                  <a:lnTo>
+                    <a:pt x="140688" y="9710"/>
+                  </a:lnTo>
+                  <a:lnTo>
+                    <a:pt x="211033" y="14491"/>
+                  </a:lnTo>
+                  <a:lnTo>
+                    <a:pt x="281377" y="19221"/>
+                  </a:lnTo>
+                  <a:lnTo>
+                    <a:pt x="351722" y="23903"/>
+                  </a:lnTo>
+                  <a:lnTo>
+                    <a:pt x="422066" y="28536"/>
+                  </a:lnTo>
+                  <a:lnTo>
+                    <a:pt x="492411" y="33121"/>
+                  </a:lnTo>
+                  <a:lnTo>
+                    <a:pt x="562755" y="37659"/>
+                  </a:lnTo>
+                  <a:lnTo>
+                    <a:pt x="633100" y="42150"/>
+                  </a:lnTo>
+                  <a:lnTo>
+                    <a:pt x="703444" y="46594"/>
+                  </a:lnTo>
+                  <a:lnTo>
+                    <a:pt x="773789" y="50992"/>
+                  </a:lnTo>
+                  <a:lnTo>
+                    <a:pt x="844133" y="55344"/>
+                  </a:lnTo>
+                  <a:lnTo>
+                    <a:pt x="914478" y="59652"/>
+                  </a:lnTo>
+                  <a:lnTo>
+                    <a:pt x="984822" y="63915"/>
+                  </a:lnTo>
+                  <a:lnTo>
+                    <a:pt x="1055167" y="68133"/>
+                  </a:lnTo>
+                  <a:lnTo>
+                    <a:pt x="1125511" y="72308"/>
+                  </a:lnTo>
+                  <a:lnTo>
+                    <a:pt x="1195856" y="76440"/>
+                  </a:lnTo>
+                  <a:lnTo>
+                    <a:pt x="1266200" y="80529"/>
+                  </a:lnTo>
+                  <a:lnTo>
+                    <a:pt x="1336545" y="84576"/>
+                  </a:lnTo>
+                  <a:lnTo>
+                    <a:pt x="1406889" y="88580"/>
+                  </a:lnTo>
+                  <a:lnTo>
+                    <a:pt x="1477234" y="92544"/>
+                  </a:lnTo>
+                  <a:lnTo>
+                    <a:pt x="1547578" y="96466"/>
+                  </a:lnTo>
+                  <a:lnTo>
+                    <a:pt x="1617923" y="100347"/>
+                  </a:lnTo>
+                  <a:lnTo>
+                    <a:pt x="1688267" y="104189"/>
+                  </a:lnTo>
+                  <a:lnTo>
+                    <a:pt x="1758612" y="107990"/>
+                  </a:lnTo>
+                  <a:lnTo>
+                    <a:pt x="1828956" y="111752"/>
+                  </a:lnTo>
+                  <a:lnTo>
+                    <a:pt x="1899301" y="115476"/>
+                  </a:lnTo>
+                  <a:lnTo>
+                    <a:pt x="1969645" y="119160"/>
+                  </a:lnTo>
+                  <a:lnTo>
+                    <a:pt x="2039990" y="122807"/>
+                  </a:lnTo>
+                  <a:lnTo>
+                    <a:pt x="2110334" y="126415"/>
+                  </a:lnTo>
+                  <a:lnTo>
+                    <a:pt x="2180679" y="129987"/>
+                  </a:lnTo>
+                  <a:lnTo>
+                    <a:pt x="2251023" y="133521"/>
+                  </a:lnTo>
+                  <a:lnTo>
+                    <a:pt x="2321368" y="137019"/>
+                  </a:lnTo>
+                  <a:lnTo>
+                    <a:pt x="2391712" y="140480"/>
+                  </a:lnTo>
+                  <a:lnTo>
+                    <a:pt x="2462057" y="143906"/>
+                  </a:lnTo>
+                  <a:lnTo>
+                    <a:pt x="2532401" y="147296"/>
+                  </a:lnTo>
+                  <a:lnTo>
+                    <a:pt x="2602746" y="150651"/>
+                  </a:lnTo>
+                  <a:lnTo>
+                    <a:pt x="2673090" y="153971"/>
+                  </a:lnTo>
+                  <a:lnTo>
+                    <a:pt x="2743435" y="157257"/>
+                  </a:lnTo>
+                  <a:lnTo>
+                    <a:pt x="2813779" y="160509"/>
+                  </a:lnTo>
+                  <a:lnTo>
+                    <a:pt x="2884124" y="163727"/>
+                  </a:lnTo>
+                  <a:lnTo>
+                    <a:pt x="2954468" y="166912"/>
+                  </a:lnTo>
+                  <a:lnTo>
+                    <a:pt x="3024813" y="170064"/>
+                  </a:lnTo>
+                  <a:lnTo>
+                    <a:pt x="3095157" y="173183"/>
+                  </a:lnTo>
+                  <a:lnTo>
+                    <a:pt x="3165502" y="176270"/>
+                  </a:lnTo>
+                  <a:lnTo>
+                    <a:pt x="3235846" y="179325"/>
+                  </a:lnTo>
+                  <a:lnTo>
+                    <a:pt x="3306191" y="182348"/>
+                  </a:lnTo>
+                  <a:lnTo>
+                    <a:pt x="3376535" y="185340"/>
+                  </a:lnTo>
+                  <a:lnTo>
+                    <a:pt x="3446880" y="188301"/>
+                  </a:lnTo>
+                  <a:lnTo>
+                    <a:pt x="3517224" y="191232"/>
+                  </a:lnTo>
+                  <a:lnTo>
+                    <a:pt x="3587569" y="194131"/>
+                  </a:lnTo>
+                  <a:lnTo>
+                    <a:pt x="3657913" y="197001"/>
+                  </a:lnTo>
+                  <a:lnTo>
+                    <a:pt x="3728257" y="199842"/>
+                  </a:lnTo>
+                  <a:lnTo>
+                    <a:pt x="3798602" y="202652"/>
+                  </a:lnTo>
+                  <a:lnTo>
+                    <a:pt x="3868946" y="205434"/>
+                  </a:lnTo>
+                  <a:lnTo>
+                    <a:pt x="3939291" y="208187"/>
+                  </a:lnTo>
+                  <a:lnTo>
+                    <a:pt x="4009635" y="210911"/>
+                  </a:lnTo>
+                  <a:lnTo>
+                    <a:pt x="4079980" y="213607"/>
+                  </a:lnTo>
+                  <a:lnTo>
+                    <a:pt x="4150324" y="216275"/>
+                  </a:lnTo>
+                  <a:lnTo>
+                    <a:pt x="4220669" y="218916"/>
+                  </a:lnTo>
+                  <a:lnTo>
+                    <a:pt x="4291013" y="221529"/>
+                  </a:lnTo>
+                  <a:lnTo>
+                    <a:pt x="4361358" y="224115"/>
+                  </a:lnTo>
+                  <a:lnTo>
+                    <a:pt x="4431702" y="226675"/>
+                  </a:lnTo>
+                  <a:lnTo>
+                    <a:pt x="4502047" y="229207"/>
+                  </a:lnTo>
+                  <a:lnTo>
+                    <a:pt x="4572391" y="231714"/>
+                  </a:lnTo>
+                  <a:lnTo>
+                    <a:pt x="4642736" y="234195"/>
+                  </a:lnTo>
+                  <a:lnTo>
+                    <a:pt x="4713080" y="236650"/>
+                  </a:lnTo>
+                  <a:lnTo>
+                    <a:pt x="4783425" y="239079"/>
+                  </a:lnTo>
+                  <a:lnTo>
+                    <a:pt x="4853769" y="241483"/>
+                  </a:lnTo>
+                  <a:lnTo>
+                    <a:pt x="4924114" y="243863"/>
+                  </a:lnTo>
+                  <a:lnTo>
+                    <a:pt x="4994458" y="246218"/>
+                  </a:lnTo>
+                  <a:lnTo>
+                    <a:pt x="5064803" y="248548"/>
+                  </a:lnTo>
+                  <a:lnTo>
+                    <a:pt x="5135147" y="250854"/>
+                  </a:lnTo>
+                  <a:lnTo>
+                    <a:pt x="5205492" y="253137"/>
+                  </a:lnTo>
+                  <a:lnTo>
+                    <a:pt x="5275836" y="255395"/>
+                  </a:lnTo>
+                  <a:lnTo>
+                    <a:pt x="5346181" y="257631"/>
+                  </a:lnTo>
+                  <a:lnTo>
+                    <a:pt x="5416525" y="259843"/>
+                  </a:lnTo>
+                  <a:lnTo>
+                    <a:pt x="5486870" y="262032"/>
+                  </a:lnTo>
+                  <a:lnTo>
+                    <a:pt x="5557214" y="264199"/>
+                  </a:lnTo>
+                  <a:lnTo>
+                    <a:pt x="5627559" y="266343"/>
+                  </a:lnTo>
+                  <a:lnTo>
+                    <a:pt x="5697903" y="268465"/>
+                  </a:lnTo>
+                  <a:lnTo>
+                    <a:pt x="5768248" y="270565"/>
+                  </a:lnTo>
+                  <a:lnTo>
+                    <a:pt x="5838592" y="272643"/>
+                  </a:lnTo>
+                  <a:lnTo>
+                    <a:pt x="5908937" y="274700"/>
+                  </a:lnTo>
+                  <a:lnTo>
+                    <a:pt x="5979281" y="276735"/>
+                  </a:lnTo>
+                  <a:lnTo>
+                    <a:pt x="6049626" y="278749"/>
+                  </a:lnTo>
+                  <a:lnTo>
+                    <a:pt x="6119970" y="280743"/>
+                  </a:lnTo>
+                  <a:lnTo>
+                    <a:pt x="6190315" y="282716"/>
+                  </a:lnTo>
+                  <a:lnTo>
+                    <a:pt x="6260659" y="284668"/>
+                  </a:lnTo>
+                  <a:lnTo>
+                    <a:pt x="6331004" y="286600"/>
+                  </a:lnTo>
+                  <a:lnTo>
+                    <a:pt x="6401348" y="288512"/>
+                  </a:lnTo>
+                  <a:lnTo>
+                    <a:pt x="6471693" y="290405"/>
+                  </a:lnTo>
+                  <a:lnTo>
+                    <a:pt x="6542037" y="292277"/>
+                  </a:lnTo>
+                  <a:lnTo>
+                    <a:pt x="6612382" y="294131"/>
+                  </a:lnTo>
+                  <a:lnTo>
+                    <a:pt x="6682726" y="295965"/>
+                  </a:lnTo>
+                  <a:lnTo>
+                    <a:pt x="6753071" y="297780"/>
+                  </a:lnTo>
+                  <a:lnTo>
+                    <a:pt x="6823415" y="299576"/>
+                  </a:lnTo>
+                  <a:lnTo>
+                    <a:pt x="6893760" y="301354"/>
+                  </a:lnTo>
+                  <a:lnTo>
+                    <a:pt x="6964104" y="303113"/>
+                  </a:lnTo>
+                </a:path>
+              </a:pathLst>
+            </a:custGeom>
+            <a:ln w="27101" cap="flat">
+              <a:solidFill>
+                <a:srgbClr val="FF8C00">
+                  <a:alpha val="100000"/>
+                </a:srgbClr>
+              </a:solidFill>
+              <a:prstDash val="solid"/>
+              <a:round/>
+            </a:ln>
+          </p:spPr>
+          <p:txBody>
+            <a:bodyPr/>
+            <a:lstStyle/>
+            <a:p/>
+          </p:txBody>
+        </p:sp>
+        <p:sp>
+          <p:nvSpPr>
+            <p:cNvPr id="75" name="pl75"/>
+            <p:cNvSpPr/>
+            <p:nvPr/>
+          </p:nvSpPr>
+          <p:spPr>
+            <a:xfrm>
+              <a:off x="887106" y="5294352"/>
+              <a:ext cx="7660515" cy="0"/>
+            </a:xfrm>
+            <a:custGeom>
+              <a:avLst/>
+              <a:pathLst>
+                <a:path w="7660515" h="0">
+                  <a:moveTo>
+                    <a:pt x="0" y="0"/>
+                  </a:moveTo>
+                  <a:lnTo>
+                    <a:pt x="7660515" y="0"/>
+                  </a:lnTo>
+                  <a:lnTo>
+                    <a:pt x="7660515" y="0"/>
+                  </a:lnTo>
+                </a:path>
+              </a:pathLst>
+            </a:custGeom>
+            <a:ln w="13550" cap="flat">
+              <a:solidFill>
+                <a:srgbClr val="7F7F7F">
+                  <a:alpha val="100000"/>
+                </a:srgbClr>
+              </a:solidFill>
+              <a:prstDash val="dash"/>
+              <a:round/>
+            </a:ln>
+          </p:spPr>
+          <p:txBody>
+            <a:bodyPr/>
+            <a:lstStyle/>
+            <a:p/>
+          </p:txBody>
+        </p:sp>
+        <p:sp>
+          <p:nvSpPr>
+            <p:cNvPr id="76" name="pl76"/>
+            <p:cNvSpPr/>
+            <p:nvPr/>
+          </p:nvSpPr>
+          <p:spPr>
+            <a:xfrm>
+              <a:off x="4300713" y="4336484"/>
+              <a:ext cx="0" cy="1317069"/>
+            </a:xfrm>
+            <a:custGeom>
+              <a:avLst/>
+              <a:pathLst>
+                <a:path w="0" h="1317069">
+                  <a:moveTo>
+                    <a:pt x="0" y="1317069"/>
+                  </a:moveTo>
+                  <a:lnTo>
+                    <a:pt x="0" y="0"/>
+                  </a:lnTo>
+                  <a:lnTo>
+                    <a:pt x="0" y="0"/>
+                  </a:lnTo>
+                </a:path>
+              </a:pathLst>
+            </a:custGeom>
+            <a:ln w="13550" cap="flat">
+              <a:solidFill>
+                <a:srgbClr val="666666">
+                  <a:alpha val="100000"/>
+                </a:srgbClr>
+              </a:solidFill>
+              <a:prstDash val="dot"/>
+              <a:round/>
+            </a:ln>
+          </p:spPr>
+          <p:txBody>
+            <a:bodyPr/>
+            <a:lstStyle/>
+            <a:p/>
+          </p:txBody>
+        </p:sp>
+        <p:sp>
+          <p:nvSpPr>
+            <p:cNvPr id="77" name="pl77"/>
+            <p:cNvSpPr/>
+            <p:nvPr/>
+          </p:nvSpPr>
+          <p:spPr>
+            <a:xfrm>
+              <a:off x="3103710" y="4336484"/>
+              <a:ext cx="0" cy="1317069"/>
+            </a:xfrm>
+            <a:custGeom>
+              <a:avLst/>
+              <a:pathLst>
+                <a:path w="0" h="1317069">
+                  <a:moveTo>
+                    <a:pt x="0" y="1317069"/>
+                  </a:moveTo>
+                  <a:lnTo>
+                    <a:pt x="0" y="0"/>
+                  </a:lnTo>
+                  <a:lnTo>
+                    <a:pt x="0" y="0"/>
+                  </a:lnTo>
+                </a:path>
+              </a:pathLst>
+            </a:custGeom>
+            <a:ln w="13550" cap="flat">
+              <a:solidFill>
+                <a:srgbClr val="4682B4">
+                  <a:alpha val="69803"/>
+                </a:srgbClr>
+              </a:solidFill>
+              <a:prstDash val="dash"/>
+              <a:round/>
+            </a:ln>
+          </p:spPr>
+          <p:txBody>
+            <a:bodyPr/>
+            <a:lstStyle/>
+            <a:p/>
+          </p:txBody>
+        </p:sp>
+        <p:sp>
+          <p:nvSpPr>
+            <p:cNvPr id="78" name="pl78"/>
+            <p:cNvSpPr/>
+            <p:nvPr/>
+          </p:nvSpPr>
+          <p:spPr>
+            <a:xfrm>
+              <a:off x="5504283" y="4336484"/>
+              <a:ext cx="0" cy="1317069"/>
+            </a:xfrm>
+            <a:custGeom>
+              <a:avLst/>
+              <a:pathLst>
+                <a:path w="0" h="1317069">
+                  <a:moveTo>
+                    <a:pt x="0" y="1317069"/>
+                  </a:moveTo>
+                  <a:lnTo>
+                    <a:pt x="0" y="0"/>
+                  </a:lnTo>
+                  <a:lnTo>
+                    <a:pt x="0" y="0"/>
+                  </a:lnTo>
+                </a:path>
+              </a:pathLst>
+            </a:custGeom>
+            <a:ln w="13550" cap="flat">
+              <a:solidFill>
+                <a:srgbClr val="4682B4">
+                  <a:alpha val="69803"/>
+                </a:srgbClr>
+              </a:solidFill>
+              <a:prstDash val="dash"/>
+              <a:round/>
+            </a:ln>
+          </p:spPr>
+          <p:txBody>
+            <a:bodyPr/>
+            <a:lstStyle/>
+            <a:p/>
+          </p:txBody>
+        </p:sp>
+        <p:sp>
+          <p:nvSpPr>
+            <p:cNvPr id="79" name="tx79"/>
+            <p:cNvSpPr/>
+            <p:nvPr/>
+          </p:nvSpPr>
+          <p:spPr>
+            <a:xfrm>
+              <a:off x="762297" y="5553636"/>
+              <a:ext cx="62179" cy="80101"/>
+            </a:xfrm>
+            <a:prstGeom prst="rect">
+              <a:avLst/>
+            </a:prstGeom>
+            <a:noFill/>
+          </p:spPr>
+          <p:txBody>
+            <a:bodyPr lIns="0" rIns="0" tIns="0" bIns="0" anchorCtr="1" anchor="ctr" wrap="none"/>
+            <a:lstStyle/>
+            <a:p>
+              <a:pPr algn="l" marL="0" marR="0" indent="0">
+                <a:lnSpc>
+                  <a:spcPts val="880"/>
+                </a:lnSpc>
+                <a:spcBef>
+                  <a:spcPts val="0"/>
+                </a:spcBef>
+                <a:spcAft>
+                  <a:spcPts val="0"/>
+                </a:spcAft>
+              </a:pPr>
+              <a:r>
+                <a:rPr sz="880">
+                  <a:solidFill>
+                    <a:srgbClr val="4D4D4D">
+                      <a:alpha val="100000"/>
+                    </a:srgbClr>
+                  </a:solidFill>
+                  <a:latin typeface="Helvetica"/>
+                  <a:cs typeface="Helvetica"/>
+                </a:rPr>
+                <a:t>0</a:t>
+              </a:r>
+            </a:p>
+          </p:txBody>
+        </p:sp>
+        <p:sp>
+          <p:nvSpPr>
+            <p:cNvPr id="80" name="tx80"/>
+            <p:cNvSpPr/>
+            <p:nvPr/>
+          </p:nvSpPr>
+          <p:spPr>
+            <a:xfrm>
+              <a:off x="762297" y="5254302"/>
+              <a:ext cx="62179" cy="80101"/>
+            </a:xfrm>
+            <a:prstGeom prst="rect">
+              <a:avLst/>
+            </a:prstGeom>
+            <a:noFill/>
+          </p:spPr>
+          <p:txBody>
+            <a:bodyPr lIns="0" rIns="0" tIns="0" bIns="0" anchorCtr="1" anchor="ctr" wrap="none"/>
+            <a:lstStyle/>
+            <a:p>
+              <a:pPr algn="l" marL="0" marR="0" indent="0">
+                <a:lnSpc>
+                  <a:spcPts val="880"/>
+                </a:lnSpc>
+                <a:spcBef>
+                  <a:spcPts val="0"/>
+                </a:spcBef>
+                <a:spcAft>
+                  <a:spcPts val="0"/>
+                </a:spcAft>
+              </a:pPr>
+              <a:r>
+                <a:rPr sz="880">
+                  <a:solidFill>
+                    <a:srgbClr val="4D4D4D">
+                      <a:alpha val="100000"/>
+                    </a:srgbClr>
+                  </a:solidFill>
+                  <a:latin typeface="Helvetica"/>
+                  <a:cs typeface="Helvetica"/>
+                </a:rPr>
+                <a:t>1</a:t>
+              </a:r>
+            </a:p>
+          </p:txBody>
+        </p:sp>
+        <p:sp>
+          <p:nvSpPr>
+            <p:cNvPr id="81" name="tx81"/>
+            <p:cNvSpPr/>
+            <p:nvPr/>
+          </p:nvSpPr>
+          <p:spPr>
+            <a:xfrm>
+              <a:off x="762297" y="4954968"/>
+              <a:ext cx="62179" cy="80101"/>
+            </a:xfrm>
+            <a:prstGeom prst="rect">
+              <a:avLst/>
+            </a:prstGeom>
+            <a:noFill/>
+          </p:spPr>
+          <p:txBody>
+            <a:bodyPr lIns="0" rIns="0" tIns="0" bIns="0" anchorCtr="1" anchor="ctr" wrap="none"/>
+            <a:lstStyle/>
+            <a:p>
+              <a:pPr algn="l" marL="0" marR="0" indent="0">
+                <a:lnSpc>
+                  <a:spcPts val="880"/>
+                </a:lnSpc>
+                <a:spcBef>
+                  <a:spcPts val="0"/>
+                </a:spcBef>
+                <a:spcAft>
+                  <a:spcPts val="0"/>
+                </a:spcAft>
+              </a:pPr>
+              <a:r>
+                <a:rPr sz="880">
+                  <a:solidFill>
+                    <a:srgbClr val="4D4D4D">
+                      <a:alpha val="100000"/>
+                    </a:srgbClr>
+                  </a:solidFill>
+                  <a:latin typeface="Helvetica"/>
+                  <a:cs typeface="Helvetica"/>
+                </a:rPr>
+                <a:t>2</a:t>
+              </a:r>
+            </a:p>
+          </p:txBody>
+        </p:sp>
+        <p:sp>
+          <p:nvSpPr>
+            <p:cNvPr id="82" name="tx82"/>
+            <p:cNvSpPr/>
+            <p:nvPr/>
+          </p:nvSpPr>
+          <p:spPr>
+            <a:xfrm>
+              <a:off x="762297" y="4655634"/>
+              <a:ext cx="62179" cy="80101"/>
+            </a:xfrm>
+            <a:prstGeom prst="rect">
+              <a:avLst/>
+            </a:prstGeom>
+            <a:noFill/>
+          </p:spPr>
+          <p:txBody>
+            <a:bodyPr lIns="0" rIns="0" tIns="0" bIns="0" anchorCtr="1" anchor="ctr" wrap="none"/>
+            <a:lstStyle/>
+            <a:p>
+              <a:pPr algn="l" marL="0" marR="0" indent="0">
+                <a:lnSpc>
+                  <a:spcPts val="880"/>
+                </a:lnSpc>
+                <a:spcBef>
+                  <a:spcPts val="0"/>
+                </a:spcBef>
+                <a:spcAft>
+                  <a:spcPts val="0"/>
+                </a:spcAft>
+              </a:pPr>
+              <a:r>
+                <a:rPr sz="880">
+                  <a:solidFill>
+                    <a:srgbClr val="4D4D4D">
+                      <a:alpha val="100000"/>
+                    </a:srgbClr>
+                  </a:solidFill>
+                  <a:latin typeface="Helvetica"/>
+                  <a:cs typeface="Helvetica"/>
+                </a:rPr>
+                <a:t>3</a:t>
+              </a:r>
+            </a:p>
+          </p:txBody>
+        </p:sp>
+        <p:sp>
+          <p:nvSpPr>
+            <p:cNvPr id="83" name="tx83"/>
+            <p:cNvSpPr/>
+            <p:nvPr/>
+          </p:nvSpPr>
+          <p:spPr>
+            <a:xfrm>
+              <a:off x="762297" y="4356300"/>
+              <a:ext cx="62179" cy="80101"/>
+            </a:xfrm>
+            <a:prstGeom prst="rect">
+              <a:avLst/>
+            </a:prstGeom>
+            <a:noFill/>
+          </p:spPr>
+          <p:txBody>
+            <a:bodyPr lIns="0" rIns="0" tIns="0" bIns="0" anchorCtr="1" anchor="ctr" wrap="none"/>
+            <a:lstStyle/>
+            <a:p>
+              <a:pPr algn="l" marL="0" marR="0" indent="0">
+                <a:lnSpc>
+                  <a:spcPts val="880"/>
+                </a:lnSpc>
+                <a:spcBef>
+                  <a:spcPts val="0"/>
+                </a:spcBef>
+                <a:spcAft>
+                  <a:spcPts val="0"/>
+                </a:spcAft>
+              </a:pPr>
+              <a:r>
+                <a:rPr sz="880">
+                  <a:solidFill>
+                    <a:srgbClr val="4D4D4D">
+                      <a:alpha val="100000"/>
+                    </a:srgbClr>
+                  </a:solidFill>
+                  <a:latin typeface="Helvetica"/>
+                  <a:cs typeface="Helvetica"/>
+                </a:rPr>
+                <a:t>4</a:t>
+              </a:r>
+            </a:p>
+          </p:txBody>
+        </p:sp>
+        <p:sp>
+          <p:nvSpPr>
+            <p:cNvPr id="84" name="tx84"/>
+            <p:cNvSpPr/>
+            <p:nvPr/>
+          </p:nvSpPr>
+          <p:spPr>
+            <a:xfrm>
+              <a:off x="1324230" y="5716183"/>
+              <a:ext cx="161574" cy="80101"/>
+            </a:xfrm>
+            <a:prstGeom prst="rect">
+              <a:avLst/>
+            </a:prstGeom>
+            <a:noFill/>
+          </p:spPr>
+          <p:txBody>
+            <a:bodyPr lIns="0" rIns="0" tIns="0" bIns="0" anchorCtr="1" anchor="ctr" wrap="none"/>
+            <a:lstStyle/>
+            <a:p>
+              <a:pPr algn="l" marL="0" marR="0" indent="0">
+                <a:lnSpc>
+                  <a:spcPts val="880"/>
+                </a:lnSpc>
+                <a:spcBef>
+                  <a:spcPts val="0"/>
+                </a:spcBef>
+                <a:spcAft>
+                  <a:spcPts val="0"/>
+                </a:spcAft>
+              </a:pPr>
+              <a:r>
+                <a:rPr sz="880">
+                  <a:solidFill>
+                    <a:srgbClr val="4D4D4D">
+                      <a:alpha val="100000"/>
+                    </a:srgbClr>
+                  </a:solidFill>
+                  <a:latin typeface="Helvetica"/>
+                  <a:cs typeface="Helvetica"/>
+                </a:rPr>
+                <a:t>-50</a:t>
+              </a:r>
+            </a:p>
+          </p:txBody>
+        </p:sp>
+        <p:sp>
+          <p:nvSpPr>
+            <p:cNvPr id="85" name="tx85"/>
+            <p:cNvSpPr/>
+            <p:nvPr/>
+          </p:nvSpPr>
+          <p:spPr>
+            <a:xfrm>
+              <a:off x="2179256" y="5716183"/>
+              <a:ext cx="161574" cy="80101"/>
+            </a:xfrm>
+            <a:prstGeom prst="rect">
+              <a:avLst/>
+            </a:prstGeom>
+            <a:noFill/>
+          </p:spPr>
+          <p:txBody>
+            <a:bodyPr lIns="0" rIns="0" tIns="0" bIns="0" anchorCtr="1" anchor="ctr" wrap="none"/>
+            <a:lstStyle/>
+            <a:p>
+              <a:pPr algn="l" marL="0" marR="0" indent="0">
+                <a:lnSpc>
+                  <a:spcPts val="880"/>
+                </a:lnSpc>
+                <a:spcBef>
+                  <a:spcPts val="0"/>
+                </a:spcBef>
+                <a:spcAft>
+                  <a:spcPts val="0"/>
+                </a:spcAft>
+              </a:pPr>
+              <a:r>
+                <a:rPr sz="880">
+                  <a:solidFill>
+                    <a:srgbClr val="4D4D4D">
+                      <a:alpha val="100000"/>
+                    </a:srgbClr>
+                  </a:solidFill>
+                  <a:latin typeface="Helvetica"/>
+                  <a:cs typeface="Helvetica"/>
+                </a:rPr>
+                <a:t>-40</a:t>
+              </a:r>
+            </a:p>
+          </p:txBody>
+        </p:sp>
+        <p:sp>
+          <p:nvSpPr>
+            <p:cNvPr id="86" name="tx86"/>
+            <p:cNvSpPr/>
+            <p:nvPr/>
+          </p:nvSpPr>
+          <p:spPr>
+            <a:xfrm>
+              <a:off x="3034282" y="5716183"/>
+              <a:ext cx="161574" cy="80101"/>
+            </a:xfrm>
+            <a:prstGeom prst="rect">
+              <a:avLst/>
+            </a:prstGeom>
+            <a:noFill/>
+          </p:spPr>
+          <p:txBody>
+            <a:bodyPr lIns="0" rIns="0" tIns="0" bIns="0" anchorCtr="1" anchor="ctr" wrap="none"/>
+            <a:lstStyle/>
+            <a:p>
+              <a:pPr algn="l" marL="0" marR="0" indent="0">
+                <a:lnSpc>
+                  <a:spcPts val="880"/>
+                </a:lnSpc>
+                <a:spcBef>
+                  <a:spcPts val="0"/>
+                </a:spcBef>
+                <a:spcAft>
+                  <a:spcPts val="0"/>
+                </a:spcAft>
+              </a:pPr>
+              <a:r>
+                <a:rPr sz="880">
+                  <a:solidFill>
+                    <a:srgbClr val="4D4D4D">
+                      <a:alpha val="100000"/>
+                    </a:srgbClr>
+                  </a:solidFill>
+                  <a:latin typeface="Helvetica"/>
+                  <a:cs typeface="Helvetica"/>
+                </a:rPr>
+                <a:t>-30</a:t>
+              </a:r>
+            </a:p>
+          </p:txBody>
+        </p:sp>
+        <p:sp>
+          <p:nvSpPr>
+            <p:cNvPr id="87" name="tx87"/>
+            <p:cNvSpPr/>
+            <p:nvPr/>
+          </p:nvSpPr>
+          <p:spPr>
+            <a:xfrm>
+              <a:off x="3889308" y="5716183"/>
+              <a:ext cx="161574" cy="80101"/>
+            </a:xfrm>
+            <a:prstGeom prst="rect">
+              <a:avLst/>
+            </a:prstGeom>
+            <a:noFill/>
+          </p:spPr>
+          <p:txBody>
+            <a:bodyPr lIns="0" rIns="0" tIns="0" bIns="0" anchorCtr="1" anchor="ctr" wrap="none"/>
+            <a:lstStyle/>
+            <a:p>
+              <a:pPr algn="l" marL="0" marR="0" indent="0">
+                <a:lnSpc>
+                  <a:spcPts val="880"/>
+                </a:lnSpc>
+                <a:spcBef>
+                  <a:spcPts val="0"/>
+                </a:spcBef>
+                <a:spcAft>
+                  <a:spcPts val="0"/>
+                </a:spcAft>
+              </a:pPr>
+              <a:r>
+                <a:rPr sz="880">
+                  <a:solidFill>
+                    <a:srgbClr val="4D4D4D">
+                      <a:alpha val="100000"/>
+                    </a:srgbClr>
+                  </a:solidFill>
+                  <a:latin typeface="Helvetica"/>
+                  <a:cs typeface="Helvetica"/>
+                </a:rPr>
+                <a:t>-20</a:t>
+              </a:r>
+            </a:p>
+          </p:txBody>
+        </p:sp>
+        <p:sp>
+          <p:nvSpPr>
+            <p:cNvPr id="88" name="tx88"/>
+            <p:cNvSpPr/>
+            <p:nvPr/>
+          </p:nvSpPr>
+          <p:spPr>
+            <a:xfrm>
+              <a:off x="4744334" y="5716183"/>
+              <a:ext cx="161574" cy="80101"/>
+            </a:xfrm>
+            <a:prstGeom prst="rect">
+              <a:avLst/>
+            </a:prstGeom>
+            <a:noFill/>
+          </p:spPr>
+          <p:txBody>
+            <a:bodyPr lIns="0" rIns="0" tIns="0" bIns="0" anchorCtr="1" anchor="ctr" wrap="none"/>
+            <a:lstStyle/>
+            <a:p>
+              <a:pPr algn="l" marL="0" marR="0" indent="0">
+                <a:lnSpc>
+                  <a:spcPts val="880"/>
+                </a:lnSpc>
+                <a:spcBef>
+                  <a:spcPts val="0"/>
+                </a:spcBef>
+                <a:spcAft>
+                  <a:spcPts val="0"/>
+                </a:spcAft>
+              </a:pPr>
+              <a:r>
+                <a:rPr sz="880">
+                  <a:solidFill>
+                    <a:srgbClr val="4D4D4D">
+                      <a:alpha val="100000"/>
+                    </a:srgbClr>
+                  </a:solidFill>
+                  <a:latin typeface="Helvetica"/>
+                  <a:cs typeface="Helvetica"/>
+                </a:rPr>
+                <a:t>-10</a:t>
+              </a:r>
+            </a:p>
+          </p:txBody>
+        </p:sp>
+        <p:sp>
+          <p:nvSpPr>
+            <p:cNvPr id="89" name="tx89"/>
+            <p:cNvSpPr/>
+            <p:nvPr/>
+          </p:nvSpPr>
+          <p:spPr>
+            <a:xfrm>
+              <a:off x="5649057" y="5716183"/>
+              <a:ext cx="62179" cy="80101"/>
+            </a:xfrm>
+            <a:prstGeom prst="rect">
+              <a:avLst/>
+            </a:prstGeom>
+            <a:noFill/>
+          </p:spPr>
+          <p:txBody>
+            <a:bodyPr lIns="0" rIns="0" tIns="0" bIns="0" anchorCtr="1" anchor="ctr" wrap="none"/>
+            <a:lstStyle/>
+            <a:p>
+              <a:pPr algn="l" marL="0" marR="0" indent="0">
+                <a:lnSpc>
+                  <a:spcPts val="880"/>
+                </a:lnSpc>
+                <a:spcBef>
+                  <a:spcPts val="0"/>
+                </a:spcBef>
+                <a:spcAft>
+                  <a:spcPts val="0"/>
+                </a:spcAft>
+              </a:pPr>
+              <a:r>
+                <a:rPr sz="880">
+                  <a:solidFill>
+                    <a:srgbClr val="4D4D4D">
+                      <a:alpha val="100000"/>
+                    </a:srgbClr>
+                  </a:solidFill>
+                  <a:latin typeface="Helvetica"/>
+                  <a:cs typeface="Helvetica"/>
+                </a:rPr>
+                <a:t>0</a:t>
+              </a:r>
+            </a:p>
+          </p:txBody>
+        </p:sp>
+        <p:sp>
+          <p:nvSpPr>
+            <p:cNvPr id="90" name="tx90"/>
+            <p:cNvSpPr/>
+            <p:nvPr/>
+          </p:nvSpPr>
+          <p:spPr>
+            <a:xfrm>
+              <a:off x="6472994" y="5716183"/>
+              <a:ext cx="124358" cy="80101"/>
+            </a:xfrm>
+            <a:prstGeom prst="rect">
+              <a:avLst/>
+            </a:prstGeom>
+            <a:noFill/>
+          </p:spPr>
+          <p:txBody>
+            <a:bodyPr lIns="0" rIns="0" tIns="0" bIns="0" anchorCtr="1" anchor="ctr" wrap="none"/>
+            <a:lstStyle/>
+            <a:p>
+              <a:pPr algn="l" marL="0" marR="0" indent="0">
+                <a:lnSpc>
+                  <a:spcPts val="880"/>
+                </a:lnSpc>
+                <a:spcBef>
+                  <a:spcPts val="0"/>
+                </a:spcBef>
+                <a:spcAft>
+                  <a:spcPts val="0"/>
+                </a:spcAft>
+              </a:pPr>
+              <a:r>
+                <a:rPr sz="880">
+                  <a:solidFill>
+                    <a:srgbClr val="4D4D4D">
+                      <a:alpha val="100000"/>
+                    </a:srgbClr>
+                  </a:solidFill>
+                  <a:latin typeface="Helvetica"/>
+                  <a:cs typeface="Helvetica"/>
+                </a:rPr>
+                <a:t>10</a:t>
+              </a:r>
+            </a:p>
+          </p:txBody>
+        </p:sp>
+        <p:sp>
+          <p:nvSpPr>
+            <p:cNvPr id="91" name="tx91"/>
+            <p:cNvSpPr/>
+            <p:nvPr/>
+          </p:nvSpPr>
+          <p:spPr>
+            <a:xfrm>
+              <a:off x="7328020" y="5716183"/>
+              <a:ext cx="124358" cy="80101"/>
+            </a:xfrm>
+            <a:prstGeom prst="rect">
+              <a:avLst/>
+            </a:prstGeom>
+            <a:noFill/>
+          </p:spPr>
+          <p:txBody>
+            <a:bodyPr lIns="0" rIns="0" tIns="0" bIns="0" anchorCtr="1" anchor="ctr" wrap="none"/>
+            <a:lstStyle/>
+            <a:p>
+              <a:pPr algn="l" marL="0" marR="0" indent="0">
+                <a:lnSpc>
+                  <a:spcPts val="880"/>
+                </a:lnSpc>
+                <a:spcBef>
+                  <a:spcPts val="0"/>
+                </a:spcBef>
+                <a:spcAft>
+                  <a:spcPts val="0"/>
+                </a:spcAft>
+              </a:pPr>
+              <a:r>
+                <a:rPr sz="880">
+                  <a:solidFill>
+                    <a:srgbClr val="4D4D4D">
+                      <a:alpha val="100000"/>
+                    </a:srgbClr>
+                  </a:solidFill>
+                  <a:latin typeface="Helvetica"/>
+                  <a:cs typeface="Helvetica"/>
+                </a:rPr>
+                <a:t>20</a:t>
+              </a:r>
+            </a:p>
+          </p:txBody>
+        </p:sp>
+        <p:sp>
+          <p:nvSpPr>
+            <p:cNvPr id="92" name="tx92"/>
+            <p:cNvSpPr/>
+            <p:nvPr/>
+          </p:nvSpPr>
+          <p:spPr>
+            <a:xfrm>
+              <a:off x="8183046" y="5716183"/>
+              <a:ext cx="124358" cy="80101"/>
+            </a:xfrm>
+            <a:prstGeom prst="rect">
+              <a:avLst/>
+            </a:prstGeom>
+            <a:noFill/>
+          </p:spPr>
+          <p:txBody>
+            <a:bodyPr lIns="0" rIns="0" tIns="0" bIns="0" anchorCtr="1" anchor="ctr" wrap="none"/>
+            <a:lstStyle/>
+            <a:p>
+              <a:pPr algn="l" marL="0" marR="0" indent="0">
+                <a:lnSpc>
+                  <a:spcPts val="880"/>
+                </a:lnSpc>
+                <a:spcBef>
+                  <a:spcPts val="0"/>
+                </a:spcBef>
+                <a:spcAft>
+                  <a:spcPts val="0"/>
+                </a:spcAft>
+              </a:pPr>
+              <a:r>
+                <a:rPr sz="880">
+                  <a:solidFill>
+                    <a:srgbClr val="4D4D4D">
+                      <a:alpha val="100000"/>
+                    </a:srgbClr>
+                  </a:solidFill>
+                  <a:latin typeface="Helvetica"/>
+                  <a:cs typeface="Helvetica"/>
+                </a:rPr>
+                <a:t>30</a:t>
+              </a:r>
+            </a:p>
+          </p:txBody>
+        </p:sp>
+        <p:sp>
+          <p:nvSpPr>
+            <p:cNvPr id="93" name="tx93"/>
+            <p:cNvSpPr/>
+            <p:nvPr/>
+          </p:nvSpPr>
+          <p:spPr>
+            <a:xfrm>
+              <a:off x="1561815" y="5855859"/>
+              <a:ext cx="6311097" cy="100218"/>
+            </a:xfrm>
+            <a:prstGeom prst="rect">
+              <a:avLst/>
+            </a:prstGeom>
+            <a:noFill/>
+          </p:spPr>
+          <p:txBody>
+            <a:bodyPr lIns="0" rIns="0" tIns="0" bIns="0" anchorCtr="1" anchor="ctr" wrap="none"/>
+            <a:lstStyle/>
+            <a:p>
+              <a:pPr algn="l" marL="0" marR="0" indent="0">
+                <a:lnSpc>
+                  <a:spcPts val="1100"/>
+                </a:lnSpc>
+                <a:spcBef>
+                  <a:spcPts val="0"/>
+                </a:spcBef>
+                <a:spcAft>
+                  <a:spcPts val="0"/>
+                </a:spcAft>
+              </a:pPr>
+              <a:r>
+                <a:rPr sz="1100">
+                  <a:solidFill>
+                    <a:srgbClr val="000000">
+                      <a:alpha val="100000"/>
+                    </a:srgbClr>
+                  </a:solidFill>
+                  <a:latin typeface="Helvetica"/>
+                  <a:cs typeface="Helvetica"/>
+                </a:rPr>
+                <a:t>Sensitivity eGFR Difference (%): 100 × (CKD-EPI 2012 CysC − CKD-EPI 2021 Cr) / CKD-EPI 2021 Cr</a:t>
+              </a:r>
+            </a:p>
+          </p:txBody>
+        </p:sp>
+        <p:sp>
+          <p:nvSpPr>
+            <p:cNvPr id="94" name="tx94"/>
+            <p:cNvSpPr/>
+            <p:nvPr/>
+          </p:nvSpPr>
+          <p:spPr>
+            <a:xfrm rot="-5400000">
+              <a:off x="138035" y="4944909"/>
+              <a:ext cx="1016904" cy="100218"/>
+            </a:xfrm>
+            <a:prstGeom prst="rect">
+              <a:avLst/>
+            </a:prstGeom>
+            <a:noFill/>
+          </p:spPr>
+          <p:txBody>
+            <a:bodyPr lIns="0" rIns="0" tIns="0" bIns="0" anchorCtr="1" anchor="ctr" wrap="none"/>
+            <a:lstStyle/>
+            <a:p>
+              <a:pPr algn="l" marL="0" marR="0" indent="0">
+                <a:lnSpc>
+                  <a:spcPts val="1100"/>
+                </a:lnSpc>
+                <a:spcBef>
+                  <a:spcPts val="0"/>
+                </a:spcBef>
+                <a:spcAft>
+                  <a:spcPts val="0"/>
+                </a:spcAft>
+              </a:pPr>
+              <a:r>
+                <a:rPr sz="1100">
+                  <a:solidFill>
+                    <a:srgbClr val="000000">
+                      <a:alpha val="100000"/>
+                    </a:srgbClr>
+                  </a:solidFill>
+                  <a:latin typeface="Helvetica"/>
+                  <a:cs typeface="Helvetica"/>
+                </a:rPr>
+                <a:t>subHR (95% CI)</a:t>
+              </a:r>
+            </a:p>
+          </p:txBody>
+        </p:sp>
+        <p:sp>
+          <p:nvSpPr>
+            <p:cNvPr id="95" name="tx95"/>
+            <p:cNvSpPr/>
+            <p:nvPr/>
+          </p:nvSpPr>
+          <p:spPr>
+            <a:xfrm>
+              <a:off x="887106" y="4159544"/>
+              <a:ext cx="6959864" cy="82021"/>
+            </a:xfrm>
+            <a:prstGeom prst="rect">
+              <a:avLst/>
+            </a:prstGeom>
+            <a:noFill/>
+          </p:spPr>
+          <p:txBody>
+            <a:bodyPr lIns="0" rIns="0" tIns="0" bIns="0" anchorCtr="1" anchor="ctr" wrap="none"/>
+            <a:lstStyle/>
+            <a:p>
+              <a:pPr algn="l" marL="0" marR="0" indent="0">
+                <a:lnSpc>
+                  <a:spcPts val="900"/>
+                </a:lnSpc>
+                <a:spcBef>
+                  <a:spcPts val="0"/>
+                </a:spcBef>
+                <a:spcAft>
+                  <a:spcPts val="0"/>
+                </a:spcAft>
+              </a:pPr>
+              <a:r>
+                <a:rPr sz="900">
+                  <a:solidFill>
+                    <a:srgbClr val="404040">
+                      <a:alpha val="100000"/>
+                    </a:srgbClr>
+                  </a:solidFill>
+                  <a:latin typeface="Helvetica"/>
+                  <a:cs typeface="Helvetica"/>
+                </a:rPr>
+                <a:t>subHR per 10 % decline: 1.13 (1.05-1.23), p_Bonf = 0.012 (n = 6)  |  per IQR decline (Δ = 28.1 %): 1.43 (1.14-1.79)  |  IQR: [-30.1, -2.1] %</a:t>
+              </a:r>
+            </a:p>
+          </p:txBody>
+        </p:sp>
+        <p:sp>
+          <p:nvSpPr>
+            <p:cNvPr id="96" name="tx96"/>
+            <p:cNvSpPr/>
+            <p:nvPr/>
+          </p:nvSpPr>
+          <p:spPr>
+            <a:xfrm>
+              <a:off x="887106" y="3932770"/>
               <a:ext cx="4346874" cy="120152"/>
             </a:xfrm>
             <a:prstGeom prst="rect">
